--- a/docs/pitch/goal-tracker-pitch.pptx
+++ b/docs/pitch/goal-tracker-pitch.pptx
@@ -115,14 +115,14 @@
   <p:extLst>
     <p:ext uri="{521415D9-36F7-43E2-AB2F-B90AF26B5E84}">
       <p14:sectionLst xmlns:p14="http://schemas.microsoft.com/office/powerpoint/2010/main">
-        <p14:section name="Pitch" id="{f8a066aa-b228-e0eb-ec13-18b00cc0692e}">
+        <p14:section name="Pitch" id="{453962a9-f110-be8f-a27c-e48c2ee7a611}">
           <p14:sldIdLst>
             <p14:sldId id="256"/>
             <p14:sldId id="257"/>
             <p14:sldId id="258"/>
           </p14:sldIdLst>
         </p14:section>
-        <p14:section name="Product tour" id="{80ea9a69-c646-151d-b5b5-bd4a8c3b9a01}">
+        <p14:section name="Product tour" id="{692e737a-8201-5046-a647-a55b777de4f8}">
           <p14:sldIdLst>
             <p14:sldId id="259"/>
             <p14:sldId id="260"/>
@@ -131,7 +131,7 @@
             <p14:sldId id="263"/>
           </p14:sldIdLst>
         </p14:section>
-        <p14:section name="Ask" id="{84317332-b8b8-1072-5d9c-37bf522cc56c}">
+        <p14:section name="Ask" id="{9eb87cb8-f60e-140e-1e7a-1c3e4cd34762}">
           <p14:sldIdLst>
             <p14:sldId id="264"/>
           </p14:sldIdLst>

--- a/docs/pitch/goal-tracker-pitch.pptx
+++ b/docs/pitch/goal-tracker-pitch.pptx
@@ -14,9 +14,11 @@
     <p:sldId id="262" r:id="rId8"/>
     <p:sldId id="263" r:id="rId9"/>
     <p:sldId id="264" r:id="rId10"/>
+    <p:sldId id="265" r:id="rId11"/>
+    <p:sldId id="266" r:id="rId12"/>
   </p:sldIdLst>
   <p:notesMasterIdLst>
-    <p:notesMasterId r:id="rId11"/>
+    <p:notesMasterId r:id="rId13"/>
   </p:notesMasterIdLst>
   <p:sldSz cx="12192000" cy="6858000"/>
   <p:notesSz cx="6858000" cy="12192000"/>
@@ -115,25 +117,27 @@
   <p:extLst>
     <p:ext uri="{521415D9-36F7-43E2-AB2F-B90AF26B5E84}">
       <p14:sectionLst xmlns:p14="http://schemas.microsoft.com/office/powerpoint/2010/main">
-        <p14:section name="Pitch" id="{453962a9-f110-be8f-a27c-e48c2ee7a611}">
+        <p14:section name="Pitch" id="{a0f5b212-0cc1-522a-c5e3-fbeabf4e4513}">
           <p14:sldIdLst>
             <p14:sldId id="256"/>
             <p14:sldId id="257"/>
             <p14:sldId id="258"/>
+            <p14:sldId id="259"/>
+            <p14:sldId id="260"/>
           </p14:sldIdLst>
         </p14:section>
-        <p14:section name="Product tour" id="{692e737a-8201-5046-a647-a55b777de4f8}">
+        <p14:section name="Product" id="{997d2869-a1f7-d4fb-b5f7-deee5facf5eb}">
           <p14:sldIdLst>
-            <p14:sldId id="259"/>
-            <p14:sldId id="260"/>
             <p14:sldId id="261"/>
             <p14:sldId id="262"/>
             <p14:sldId id="263"/>
           </p14:sldIdLst>
         </p14:section>
-        <p14:section name="Ask" id="{9eb87cb8-f60e-140e-1e7a-1c3e4cd34762}">
+        <p14:section name="Decision" id="{97179615-6b7b-14ff-d7f7-f8954b94ff4d}">
           <p14:sldIdLst>
             <p14:sldId id="264"/>
+            <p14:sldId id="265"/>
+            <p14:sldId id="266"/>
           </p14:sldIdLst>
         </p14:section>
       </p14:sectionLst>
@@ -582,6 +586,182 @@
 </p:notes>
 </file>
 
+<file path=ppt/notesSlides/notesSlide10.xml><?xml version="1.0" encoding="utf-8"?>
+<p:notes xmlns:a="http://schemas.openxmlformats.org/drawingml/2006/main" xmlns:r="http://schemas.openxmlformats.org/officeDocument/2006/relationships" xmlns:p="http://schemas.openxmlformats.org/presentationml/2006/main">
+  <p:cSld>
+    <p:spTree>
+      <p:nvGrpSpPr>
+        <p:cNvPr id="1" name=""/>
+        <p:cNvGrpSpPr/>
+        <p:nvPr/>
+      </p:nvGrpSpPr>
+      <p:grpSpPr>
+        <a:xfrm>
+          <a:off x="0" y="0"/>
+          <a:ext cx="0" cy="0"/>
+          <a:chOff x="0" y="0"/>
+          <a:chExt cx="0" cy="0"/>
+        </a:xfrm>
+      </p:grpSpPr>
+      <p:sp>
+        <p:nvSpPr>
+          <p:cNvPr id="2" name="Slide Image Placeholder 1"/>
+          <p:cNvSpPr>
+            <a:spLocks noGrp="1" noRot="1" noChangeAspect="1"/>
+          </p:cNvSpPr>
+          <p:nvPr>
+            <p:ph type="sldImg"/>
+          </p:nvPr>
+        </p:nvSpPr>
+        <p:spPr/>
+      </p:sp>
+      <p:sp>
+        <p:nvSpPr>
+          <p:cNvPr id="3" name="Notes Placeholder 2"/>
+          <p:cNvSpPr>
+            <a:spLocks noGrp="1"/>
+          </p:cNvSpPr>
+          <p:nvPr>
+            <p:ph type="body" idx="1"/>
+          </p:nvPr>
+        </p:nvSpPr>
+        <p:spPr/>
+        <p:txBody>
+          <a:bodyPr/>
+          <a:lstStyle/>
+          <a:p>
+            <a:r>
+              <a:rPr lang="en-US" dirty="0"/>
+              <a:t>The first is the real risk: the tool is only as good as the check-ins. The reminder depends on email being sent, which is one of the gaps on the previous slide. The pilot's first measure tests exactly this.</a:t>
+            </a:r>
+            <a:endParaRPr lang="en-US" dirty="0"/>
+          </a:p>
+        </p:txBody>
+      </p:sp>
+      <p:sp>
+        <p:nvSpPr>
+          <p:cNvPr id="4" name="Slide Number Placeholder 3"/>
+          <p:cNvSpPr>
+            <a:spLocks noGrp="1"/>
+          </p:cNvSpPr>
+          <p:nvPr>
+            <p:ph type="sldNum" sz="quarter" idx="10"/>
+          </p:nvPr>
+        </p:nvSpPr>
+        <p:spPr/>
+        <p:txBody>
+          <a:bodyPr/>
+          <a:lstStyle/>
+          <a:p>
+            <a:fld id="{F7021451-1387-4CA6-816F-3879F97B5CBC}" type="slidenum">
+              <a:rPr lang="en-US"/>
+              <a:t>10</a:t>
+            </a:fld>
+            <a:endParaRPr lang="en-US"/>
+          </a:p>
+        </p:txBody>
+      </p:sp>
+    </p:spTree>
+    <p:extLst>
+      <p:ext uri="{BB962C8B-B14F-4D97-AF65-F5344CB8AC3E}">
+        <p14:creationId xmlns:p14="http://schemas.microsoft.com/office/powerpoint/2010/main" val="1024086991"/>
+      </p:ext>
+    </p:extLst>
+  </p:cSld>
+  <p:clrMapOvr>
+    <a:masterClrMapping/>
+  </p:clrMapOvr>
+</p:notes>
+</file>
+
+<file path=ppt/notesSlides/notesSlide11.xml><?xml version="1.0" encoding="utf-8"?>
+<p:notes xmlns:a="http://schemas.openxmlformats.org/drawingml/2006/main" xmlns:r="http://schemas.openxmlformats.org/officeDocument/2006/relationships" xmlns:p="http://schemas.openxmlformats.org/presentationml/2006/main">
+  <p:cSld>
+    <p:spTree>
+      <p:nvGrpSpPr>
+        <p:cNvPr id="1" name=""/>
+        <p:cNvGrpSpPr/>
+        <p:nvPr/>
+      </p:nvGrpSpPr>
+      <p:grpSpPr>
+        <a:xfrm>
+          <a:off x="0" y="0"/>
+          <a:ext cx="0" cy="0"/>
+          <a:chOff x="0" y="0"/>
+          <a:chExt cx="0" cy="0"/>
+        </a:xfrm>
+      </p:grpSpPr>
+      <p:sp>
+        <p:nvSpPr>
+          <p:cNvPr id="2" name="Slide Image Placeholder 1"/>
+          <p:cNvSpPr>
+            <a:spLocks noGrp="1" noRot="1" noChangeAspect="1"/>
+          </p:cNvSpPr>
+          <p:nvPr>
+            <p:ph type="sldImg"/>
+          </p:nvPr>
+        </p:nvSpPr>
+        <p:spPr/>
+      </p:sp>
+      <p:sp>
+        <p:nvSpPr>
+          <p:cNvPr id="3" name="Notes Placeholder 2"/>
+          <p:cNvSpPr>
+            <a:spLocks noGrp="1"/>
+          </p:cNvSpPr>
+          <p:nvPr>
+            <p:ph type="body" idx="1"/>
+          </p:nvPr>
+        </p:nvSpPr>
+        <p:spPr/>
+        <p:txBody>
+          <a:bodyPr/>
+          <a:lstStyle/>
+          <a:p>
+            <a:r>
+              <a:rPr lang="en-US" dirty="0"/>
+              <a:t>The ask is small and time-boxed. Fill in the org, the start date and the sponsor before presenting. The 80% bar is a proposal; agree the bar with the VP. For the third measure, note how long the last PowerPoint status deck took to assemble before the pilot starts.</a:t>
+            </a:r>
+            <a:endParaRPr lang="en-US" dirty="0"/>
+          </a:p>
+        </p:txBody>
+      </p:sp>
+      <p:sp>
+        <p:nvSpPr>
+          <p:cNvPr id="4" name="Slide Number Placeholder 3"/>
+          <p:cNvSpPr>
+            <a:spLocks noGrp="1"/>
+          </p:cNvSpPr>
+          <p:nvPr>
+            <p:ph type="sldNum" sz="quarter" idx="10"/>
+          </p:nvPr>
+        </p:nvSpPr>
+        <p:spPr/>
+        <p:txBody>
+          <a:bodyPr/>
+          <a:lstStyle/>
+          <a:p>
+            <a:fld id="{F7021451-1387-4CA6-816F-3879F97B5CBC}" type="slidenum">
+              <a:rPr lang="en-US"/>
+              <a:t>11</a:t>
+            </a:fld>
+            <a:endParaRPr lang="en-US"/>
+          </a:p>
+        </p:txBody>
+      </p:sp>
+    </p:spTree>
+    <p:extLst>
+      <p:ext uri="{BB962C8B-B14F-4D97-AF65-F5344CB8AC3E}">
+        <p14:creationId xmlns:p14="http://schemas.microsoft.com/office/powerpoint/2010/main" val="1024086991"/>
+      </p:ext>
+    </p:extLst>
+  </p:cSld>
+  <p:clrMapOvr>
+    <a:masterClrMapping/>
+  </p:clrMapOvr>
+</p:notes>
+</file>
+
 <file path=ppt/notesSlides/notesSlide2.xml><?xml version="1.0" encoding="utf-8"?>
 <p:notes xmlns:a="http://schemas.openxmlformats.org/drawingml/2006/main" xmlns:r="http://schemas.openxmlformats.org/officeDocument/2006/relationships" xmlns:p="http://schemas.openxmlformats.org/presentationml/2006/main">
   <p:cSld>
@@ -628,7 +808,7 @@
           <a:p>
             <a:r>
               <a:rPr lang="en-US" dirty="0"/>
-              <a:t>Three failure modes we see with status tracking today. Adjust the wording to your org's own examples before presenting.</a:t>
+              <a:t>Say the ask first so the rest of the deck is heard as evidence for it. Name the org and the start date here once they are chosen.</a:t>
             </a:r>
             <a:endParaRPr lang="en-US" dirty="0"/>
           </a:p>
@@ -716,7 +896,7 @@
           <a:p>
             <a:r>
               <a:rPr lang="en-US" dirty="0"/>
-              <a:t>Two audiences. Frontline and mid-level managers own goals and check in. VPs and above read. The manager side has to be cheap or the data goes stale; the leader side has to be easy to read.</a:t>
+              <a:t>Three ways tracking goals in slides lets trouble hide. Replace these with a real incident from our own reviews before presenting.</a:t>
             </a:r>
             <a:endParaRPr lang="en-US" dirty="0"/>
           </a:p>
@@ -804,7 +984,7 @@
           <a:p>
             <a:r>
               <a:rPr lang="en-US" dirty="0"/>
-              <a:t>This is the data view: what exists and how each goal is doing. One goal type at every level, from org outcome to team project, linked by what contributes to what.</a:t>
+              <a:t>The first objection is 'why not keep the deck we have'. Slides are a fine way to present status and a poor way to track it: a slide can't notice that it is out of date. Check the left column against how our decks are really kept, and reword any row that isn't true of us.</a:t>
             </a:r>
             <a:endParaRPr lang="en-US" dirty="0"/>
           </a:p>
@@ -892,7 +1072,7 @@
           <a:p>
             <a:r>
               <a:rPr lang="en-US" dirty="0"/>
-              <a:t>This is the context view: which goals need attention, why, and who has to act. The count sits in the top bar on every page. In the demo org, 10 of 50 goals are flagged, and 4 of those are Green goals nobody has updated in three to six weeks.</a:t>
+              <a:t>Two audiences. Frontline and mid-level managers own goals and check in. VPs and above read. The manager side has to be cheap or the data goes stale; the leader side has to be easy to read.</a:t>
             </a:r>
             <a:endParaRPr lang="en-US" dirty="0"/>
           </a:p>
@@ -980,7 +1160,7 @@
           <a:p>
             <a:r>
               <a:rPr lang="en-US" dirty="0"/>
-              <a:t>Open any flagged goal to see the owner's latest status and plan, the worst Health among its child goals beside the owner's own call, and how it got here.</a:t>
+              <a:t>This is what a leader opens between reviews: which goals need attention, why, and who has to act. The count sits in the top bar on every page. In the demo org, 10 of 50 goals are flagged, and 4 of those are Green goals nobody has updated in three to six weeks.</a:t>
             </a:r>
             <a:endParaRPr lang="en-US" dirty="0"/>
           </a:p>
@@ -1068,7 +1248,7 @@
           <a:p>
             <a:r>
               <a:rPr lang="en-US" dirty="0"/>
-              <a:t>The video: an owner lands on Home, sees one Stale goal, opens the check-in, marks it Yellow with a Path to Green, and submits. This is the price of everything on the previous slides, so it has to stay low.</a:t>
+              <a:t>Left: any flagged goal opens to the owner's latest status and plan, the worst Health among its child goals beside the owner's own call, and the history of how it got here. Right: a Report built by one rule, Team is Growth, and published as it stands. The author writes only the introduction and their own notes. It shares from the tool, as Markdown, or printed to PDF.</a:t>
             </a:r>
             <a:endParaRPr lang="en-US" dirty="0"/>
           </a:p>
@@ -1156,7 +1336,7 @@
           <a:p>
             <a:r>
               <a:rPr lang="en-US" dirty="0"/>
-              <a:t>Anyone can build a Report over any goals, by rule (Team is Growth) or by hand-picking. The author writes only the introduction and their own notes. It shares from the tool, as Markdown, or printed to PDF.</a:t>
+              <a:t>The video: an owner lands on Home, clears a Stale goal with one click on No change, then checks in Yellow on another with a Path to Green. No change is refused when it would be wrong, such as a Green goal with an overdue milestone. This is the price of everything on the previous slides, so it has to stay low. We have not measured it with real managers yet; the pilot would.</a:t>
             </a:r>
             <a:endParaRPr lang="en-US" dirty="0"/>
           </a:p>
@@ -1244,7 +1424,7 @@
           <a:p>
             <a:r>
               <a:rPr lang="en-US" dirty="0"/>
-              <a:t>The ask is small and time-boxed: one org, one review cycle. Fill in which org, the start date, and who the sponsor is before presenting.</a:t>
+              <a:t>It is a working prototype. Everything shown in this deck was captured from the running product. The three gaps on the right are what stand between it and real users: sign-in is a development one, emails are written to a log, and it has no production home.</a:t>
             </a:r>
             <a:endParaRPr lang="en-US" dirty="0"/>
           </a:p>
@@ -1351,7 +1531,7 @@
         <p:spPr>
           <a:xfrm>
             <a:off x="640080" y="1920240"/>
-            <a:ext cx="5669280" cy="1371600"/>
+            <a:ext cx="4846320" cy="1371600"/>
           </a:xfrm>
           <a:prstGeom prst="rect">
             <a:avLst/>
@@ -1390,7 +1570,7 @@
         <p:spPr>
           <a:xfrm>
             <a:off x="640080" y="3429000"/>
-            <a:ext cx="5120640" cy="1463040"/>
+            <a:ext cx="4663440" cy="1463040"/>
           </a:xfrm>
           <a:prstGeom prst="rect">
             <a:avLst/>
@@ -2002,7 +2182,7 @@
         <p:spPr>
           <a:xfrm>
             <a:off x="640080" y="1920240"/>
-            <a:ext cx="5669280" cy="1371600"/>
+            <a:ext cx="4846320" cy="1371600"/>
           </a:xfrm>
           <a:prstGeom prst="rect">
             <a:avLst/>
@@ -2040,7 +2220,7 @@
         <p:spPr>
           <a:xfrm>
             <a:off x="640080" y="3429000"/>
-            <a:ext cx="5120640" cy="1463040"/>
+            <a:ext cx="4663440" cy="1463040"/>
           </a:xfrm>
           <a:prstGeom prst="rect">
             <a:avLst/>
@@ -2150,8 +2330,8 @@
         </p:nvSpPr>
         <p:spPr>
           <a:xfrm>
-            <a:off x="6309360" y="1737360"/>
-            <a:ext cx="5349240" cy="3343275"/>
+            <a:off x="5760720" y="1463040"/>
+            <a:ext cx="5879592" cy="3674745"/>
           </a:xfrm>
           <a:prstGeom prst="rect">
             <a:avLst/>
@@ -2176,7 +2356,7 @@
       </p:sp>
       <p:pic>
         <p:nvPicPr>
-          <p:cNvPr id="8" name="Risks page" descr="The Risks page listing ten goals that need attention">    </p:cNvPr>
+          <p:cNvPr id="8" name="Risks page" descr="The Risks page: ten goals need attention, four of them Stale">    </p:cNvPr>
           <p:cNvPicPr>
             <a:picLocks noChangeAspect="1"/>
           </p:cNvPicPr>
@@ -2190,14 +2370,1351 @@
         </p:blipFill>
         <p:spPr>
           <a:xfrm>
-            <a:off x="6309360" y="1737360"/>
-            <a:ext cx="5349240" cy="3343275"/>
+            <a:off x="5760720" y="1463040"/>
+            <a:ext cx="5879592" cy="3674745"/>
           </a:xfrm>
           <a:prstGeom prst="rect">
             <a:avLst/>
           </a:prstGeom>
         </p:spPr>
       </p:pic>
+    </p:spTree>
+  </p:cSld>
+  <p:clrMapOvr>
+    <a:masterClrMapping/>
+  </p:clrMapOvr>
+</p:sld>
+</file>
+
+<file path=ppt/slides/slide10.xml><?xml version="1.0" encoding="utf-8"?>
+<p:sld xmlns:a="http://schemas.openxmlformats.org/drawingml/2006/main" xmlns:r="http://schemas.openxmlformats.org/officeDocument/2006/relationships" xmlns:p="http://schemas.openxmlformats.org/presentationml/2006/main">
+  <p:cSld name="Slide 10">
+    <p:spTree>
+      <p:nvGrpSpPr>
+        <p:cNvPr id="1" name=""/>
+        <p:cNvGrpSpPr/>
+        <p:nvPr/>
+      </p:nvGrpSpPr>
+      <p:grpSpPr>
+        <a:xfrm>
+          <a:off x="0" y="0"/>
+          <a:ext cx="0" cy="0"/>
+          <a:chOff x="0" y="0"/>
+          <a:chExt cx="0" cy="0"/>
+        </a:xfrm>
+      </p:grpSpPr>
+      <p:sp>
+        <p:nvSpPr>
+          <p:cNvPr id="2" name="Text 0"/>
+          <p:cNvSpPr/>
+          <p:nvPr>
+            <p:ph idx="100" type="title" hasCustomPrompt="1"/>
+          </p:nvPr>
+        </p:nvSpPr>
+        <p:spPr>
+          <a:xfrm>
+            <a:off x="548640" y="411480"/>
+            <a:ext cx="11064240" cy="822960"/>
+          </a:xfrm>
+          <a:prstGeom prst="rect">
+            <a:avLst/>
+          </a:prstGeom>
+          <a:noFill/>
+          <a:ln/>
+        </p:spPr>
+        <p:txBody>
+          <a:bodyPr wrap="square" lIns="0" tIns="0" rIns="0" bIns="0" rtlCol="0" anchor="ctr"/>
+          <a:lstStyle/>
+          <a:p>
+            <a:pPr algn="l" indent="0" marL="0">
+              <a:buNone/>
+            </a:pPr>
+            <a:r>
+              <a:rPr lang="en-US" sz="3600" b="1" dirty="0">
+                <a:solidFill>
+                  <a:schemeClr val="tx2"/>
+                </a:solidFill>
+              </a:rPr>
+              <a:t>Three ways this could fail, and the answer</a:t>
+            </a:r>
+            <a:endParaRPr lang="en-US" sz="3600" dirty="0"/>
+          </a:p>
+        </p:txBody>
+      </p:sp>
+      <p:sp>
+        <p:nvSpPr>
+          <p:cNvPr id="3" name="Objection 1 card"/>
+          <p:cNvSpPr/>
+          <p:nvPr/>
+        </p:nvSpPr>
+        <p:spPr>
+          <a:xfrm>
+            <a:off x="548640" y="1600200"/>
+            <a:ext cx="3657600" cy="1234440"/>
+          </a:xfrm>
+          <a:prstGeom prst="roundRect">
+            <a:avLst>
+              <a:gd name="adj" fmla="val 4444"/>
+            </a:avLst>
+          </a:prstGeom>
+          <a:solidFill>
+            <a:schemeClr val="bg2"/>
+          </a:solidFill>
+          <a:ln w="12700">
+            <a:solidFill>
+              <a:schemeClr val="bg2"/>
+            </a:solidFill>
+            <a:prstDash val="solid"/>
+          </a:ln>
+        </p:spPr>
+      </p:sp>
+      <p:sp>
+        <p:nvSpPr>
+          <p:cNvPr id="4" name="Objection 1"/>
+          <p:cNvSpPr txBox="1"/>
+          <p:nvPr/>
+        </p:nvSpPr>
+        <p:spPr>
+          <a:xfrm>
+            <a:off x="822960" y="1600200"/>
+            <a:ext cx="3108960" cy="1234440"/>
+          </a:xfrm>
+          <a:prstGeom prst="rect">
+            <a:avLst/>
+          </a:prstGeom>
+          <a:noFill/>
+          <a:ln/>
+        </p:spPr>
+        <p:txBody>
+          <a:bodyPr wrap="square" lIns="0" tIns="0" rIns="0" bIns="0" rtlCol="0" anchor="ctr"/>
+          <a:lstStyle/>
+          <a:p>
+            <a:pPr indent="0" marL="0">
+              <a:buNone/>
+            </a:pPr>
+            <a:r>
+              <a:rPr lang="en-US" sz="2000" b="1" dirty="0">
+                <a:solidFill>
+                  <a:schemeClr val="tx2"/>
+                </a:solidFill>
+              </a:rPr>
+              <a:t>"Managers won't check in"</a:t>
+            </a:r>
+            <a:endParaRPr lang="en-US" sz="2000" dirty="0"/>
+          </a:p>
+        </p:txBody>
+      </p:sp>
+      <p:sp>
+        <p:nvSpPr>
+          <p:cNvPr id="5" name="Objection 1 arrow"/>
+          <p:cNvSpPr/>
+          <p:nvPr/>
+        </p:nvSpPr>
+        <p:spPr>
+          <a:xfrm>
+            <a:off x="4343400" y="2217420"/>
+            <a:ext cx="548640" cy="0"/>
+          </a:xfrm>
+          <a:prstGeom prst="line">
+            <a:avLst/>
+          </a:prstGeom>
+          <a:noFill/>
+          <a:ln w="25400">
+            <a:solidFill>
+              <a:schemeClr val="accent6"/>
+            </a:solidFill>
+            <a:prstDash val="solid"/>
+            <a:tailEnd type="triangle"/>
+          </a:ln>
+        </p:spPr>
+      </p:sp>
+      <p:sp>
+        <p:nvSpPr>
+          <p:cNvPr id="6" name="Answer 1"/>
+          <p:cNvSpPr txBox="1"/>
+          <p:nvPr/>
+        </p:nvSpPr>
+        <p:spPr>
+          <a:xfrm>
+            <a:off x="5074920" y="1600200"/>
+            <a:ext cx="6537960" cy="1234440"/>
+          </a:xfrm>
+          <a:prstGeom prst="rect">
+            <a:avLst/>
+          </a:prstGeom>
+          <a:noFill/>
+          <a:ln/>
+        </p:spPr>
+        <p:txBody>
+          <a:bodyPr wrap="square" lIns="0" tIns="0" rIns="0" bIns="0" rtlCol="0" anchor="ctr"/>
+          <a:lstStyle/>
+          <a:p>
+            <a:pPr indent="0" marL="0">
+              <a:buNone/>
+            </a:pPr>
+            <a:r>
+              <a:rPr lang="en-US" sz="1600" dirty="0">
+                <a:solidFill>
+                  <a:schemeClr val="tx1"/>
+                </a:solidFill>
+              </a:rPr>
+              <a:t>A routine week is one click. A weekly reminder lists what's due, and anyone can nudge the owner of a Stale goal.</a:t>
+            </a:r>
+            <a:endParaRPr lang="en-US" sz="1600" dirty="0"/>
+          </a:p>
+        </p:txBody>
+      </p:sp>
+      <p:sp>
+        <p:nvSpPr>
+          <p:cNvPr id="7" name="Objection 2 card"/>
+          <p:cNvSpPr/>
+          <p:nvPr/>
+        </p:nvSpPr>
+        <p:spPr>
+          <a:xfrm>
+            <a:off x="548640" y="3063240"/>
+            <a:ext cx="3657600" cy="1234440"/>
+          </a:xfrm>
+          <a:prstGeom prst="roundRect">
+            <a:avLst>
+              <a:gd name="adj" fmla="val 4444"/>
+            </a:avLst>
+          </a:prstGeom>
+          <a:solidFill>
+            <a:schemeClr val="bg2"/>
+          </a:solidFill>
+          <a:ln w="12700">
+            <a:solidFill>
+              <a:schemeClr val="bg2"/>
+            </a:solidFill>
+            <a:prstDash val="solid"/>
+          </a:ln>
+        </p:spPr>
+      </p:sp>
+      <p:sp>
+        <p:nvSpPr>
+          <p:cNvPr id="8" name="Objection 2"/>
+          <p:cNvSpPr txBox="1"/>
+          <p:nvPr/>
+        </p:nvSpPr>
+        <p:spPr>
+          <a:xfrm>
+            <a:off x="822960" y="3063240"/>
+            <a:ext cx="3108960" cy="1234440"/>
+          </a:xfrm>
+          <a:prstGeom prst="rect">
+            <a:avLst/>
+          </a:prstGeom>
+          <a:noFill/>
+          <a:ln/>
+        </p:spPr>
+        <p:txBody>
+          <a:bodyPr wrap="square" lIns="0" tIns="0" rIns="0" bIns="0" rtlCol="0" anchor="ctr"/>
+          <a:lstStyle/>
+          <a:p>
+            <a:pPr indent="0" marL="0">
+              <a:buNone/>
+            </a:pPr>
+            <a:r>
+              <a:rPr lang="en-US" sz="2000" b="1" dirty="0">
+                <a:solidFill>
+                  <a:schemeClr val="tx2"/>
+                </a:solidFill>
+              </a:rPr>
+              <a:t>"It's one more tool"</a:t>
+            </a:r>
+            <a:endParaRPr lang="en-US" sz="2000" dirty="0"/>
+          </a:p>
+        </p:txBody>
+      </p:sp>
+      <p:sp>
+        <p:nvSpPr>
+          <p:cNvPr id="9" name="Objection 2 arrow"/>
+          <p:cNvSpPr/>
+          <p:nvPr/>
+        </p:nvSpPr>
+        <p:spPr>
+          <a:xfrm>
+            <a:off x="4343400" y="3680460"/>
+            <a:ext cx="548640" cy="0"/>
+          </a:xfrm>
+          <a:prstGeom prst="line">
+            <a:avLst/>
+          </a:prstGeom>
+          <a:noFill/>
+          <a:ln w="25400">
+            <a:solidFill>
+              <a:schemeClr val="accent6"/>
+            </a:solidFill>
+            <a:prstDash val="solid"/>
+            <a:tailEnd type="triangle"/>
+          </a:ln>
+        </p:spPr>
+      </p:sp>
+      <p:sp>
+        <p:nvSpPr>
+          <p:cNvPr id="10" name="Answer 2"/>
+          <p:cNvSpPr txBox="1"/>
+          <p:nvPr/>
+        </p:nvSpPr>
+        <p:spPr>
+          <a:xfrm>
+            <a:off x="5074920" y="3063240"/>
+            <a:ext cx="6537960" cy="1234440"/>
+          </a:xfrm>
+          <a:prstGeom prst="rect">
+            <a:avLst/>
+          </a:prstGeom>
+          <a:noFill/>
+          <a:ln/>
+        </p:spPr>
+        <p:txBody>
+          <a:bodyPr wrap="square" lIns="0" tIns="0" rIns="0" bIns="0" rtlCol="0" anchor="ctr"/>
+          <a:lstStyle/>
+          <a:p>
+            <a:pPr indent="0" marL="0">
+              <a:buNone/>
+            </a:pPr>
+            <a:r>
+              <a:rPr lang="en-US" sz="1600" dirty="0">
+                <a:solidFill>
+                  <a:schemeClr val="tx1"/>
+                </a:solidFill>
+              </a:rPr>
+              <a:t>It replaces the status deck. The Report is the review document, and it exports to Markdown or PDF.</a:t>
+            </a:r>
+            <a:endParaRPr lang="en-US" sz="1600" dirty="0"/>
+          </a:p>
+        </p:txBody>
+      </p:sp>
+      <p:sp>
+        <p:nvSpPr>
+          <p:cNvPr id="11" name="Objection 3 card"/>
+          <p:cNvSpPr/>
+          <p:nvPr/>
+        </p:nvSpPr>
+        <p:spPr>
+          <a:xfrm>
+            <a:off x="548640" y="4526280"/>
+            <a:ext cx="3657600" cy="1234440"/>
+          </a:xfrm>
+          <a:prstGeom prst="roundRect">
+            <a:avLst>
+              <a:gd name="adj" fmla="val 4444"/>
+            </a:avLst>
+          </a:prstGeom>
+          <a:solidFill>
+            <a:schemeClr val="bg2"/>
+          </a:solidFill>
+          <a:ln w="12700">
+            <a:solidFill>
+              <a:schemeClr val="bg2"/>
+            </a:solidFill>
+            <a:prstDash val="solid"/>
+          </a:ln>
+        </p:spPr>
+      </p:sp>
+      <p:sp>
+        <p:nvSpPr>
+          <p:cNvPr id="12" name="Objection 3"/>
+          <p:cNvSpPr txBox="1"/>
+          <p:nvPr/>
+        </p:nvSpPr>
+        <p:spPr>
+          <a:xfrm>
+            <a:off x="822960" y="4526280"/>
+            <a:ext cx="3108960" cy="1234440"/>
+          </a:xfrm>
+          <a:prstGeom prst="rect">
+            <a:avLst/>
+          </a:prstGeom>
+          <a:noFill/>
+          <a:ln/>
+        </p:spPr>
+        <p:txBody>
+          <a:bodyPr wrap="square" lIns="0" tIns="0" rIns="0" bIns="0" rtlCol="0" anchor="ctr"/>
+          <a:lstStyle/>
+          <a:p>
+            <a:pPr indent="0" marL="0">
+              <a:buNone/>
+            </a:pPr>
+            <a:r>
+              <a:rPr lang="en-US" sz="2000" b="1" dirty="0">
+                <a:solidFill>
+                  <a:schemeClr val="tx2"/>
+                </a:solidFill>
+              </a:rPr>
+              <a:t>"Owners will call it Green"</a:t>
+            </a:r>
+            <a:endParaRPr lang="en-US" sz="2000" dirty="0"/>
+          </a:p>
+        </p:txBody>
+      </p:sp>
+      <p:sp>
+        <p:nvSpPr>
+          <p:cNvPr id="13" name="Objection 3 arrow"/>
+          <p:cNvSpPr/>
+          <p:nvPr/>
+        </p:nvSpPr>
+        <p:spPr>
+          <a:xfrm>
+            <a:off x="4343400" y="5143500"/>
+            <a:ext cx="548640" cy="0"/>
+          </a:xfrm>
+          <a:prstGeom prst="line">
+            <a:avLst/>
+          </a:prstGeom>
+          <a:noFill/>
+          <a:ln w="25400">
+            <a:solidFill>
+              <a:schemeClr val="accent6"/>
+            </a:solidFill>
+            <a:prstDash val="solid"/>
+            <a:tailEnd type="triangle"/>
+          </a:ln>
+        </p:spPr>
+      </p:sp>
+      <p:sp>
+        <p:nvSpPr>
+          <p:cNvPr id="14" name="Answer 3"/>
+          <p:cNvSpPr txBox="1"/>
+          <p:nvPr/>
+        </p:nvSpPr>
+        <p:spPr>
+          <a:xfrm>
+            <a:off x="5074920" y="4526280"/>
+            <a:ext cx="6537960" cy="1234440"/>
+          </a:xfrm>
+          <a:prstGeom prst="rect">
+            <a:avLst/>
+          </a:prstGeom>
+          <a:noFill/>
+          <a:ln/>
+        </p:spPr>
+        <p:txBody>
+          <a:bodyPr wrap="square" lIns="0" tIns="0" rIns="0" bIns="0" rtlCol="0" anchor="ctr"/>
+          <a:lstStyle/>
+          <a:p>
+            <a:pPr indent="0" marL="0">
+              <a:buNone/>
+            </a:pPr>
+            <a:r>
+              <a:rPr lang="en-US" sz="1600" dirty="0">
+                <a:solidFill>
+                  <a:schemeClr val="tx1"/>
+                </a:solidFill>
+              </a:rPr>
+              <a:t>The worst Health among a goal's children shows beside the owner's call, and a difference must be explained. Stale goals and slipped dates show whatever the owner says.</a:t>
+            </a:r>
+            <a:endParaRPr lang="en-US" sz="1600" dirty="0"/>
+          </a:p>
+        </p:txBody>
+      </p:sp>
+      <p:sp>
+        <p:nvSpPr>
+          <p:cNvPr id="25" name="Slide Number Placeholder 0"/>
+          <p:cNvSpPr>
+            <a:spLocks noGrp="1"/>
+          </p:cNvSpPr>
+          <p:nvPr>
+            <p:ph type="sldNum" sz="quarter" idx="4294967295"/>
+          </p:nvPr>
+        </p:nvSpPr>
+        <p:spPr>
+          <a:xfrm>
+            <a:off x="11155680" y="6382512"/>
+            <a:ext cx="502920" cy="274320"/>
+          </a:xfrm>
+          <a:prstGeom prst="rect">
+            <a:avLst/>
+          </a:prstGeom>
+          <a:extLst>
+            <a:ext uri="{C572A759-6A51-4108-AA02-DFA0A04FC94B}">
+              <ma14:wrappingTextBoxFlag xmlns:ma14="http://schemas.microsoft.com/office/mac/drawingml/2011/main" val="0"/>
+            </a:ext>
+          </a:extLst>
+        </p:spPr>
+        <p:txBody>
+          <a:bodyPr/>
+          <a:lstStyle>
+            <a:lvl1pPr>
+              <a:defRPr sz="1000">
+                <a:solidFill>
+                  <a:schemeClr val="accent5"/>
+                </a:solidFill>
+              </a:defRPr>
+            </a:lvl1pPr>
+          </a:lstStyle>
+          <a:p>
+            <a:pPr algn="r"/>
+            <a:fld id="{F7021451-1387-4CA6-816F-3879F97B5CBC}" type="slidenum">
+              <a:rPr b="0" lang="en-US"/>
+              <a:t>10</a:t>
+            </a:fld>
+            <a:endParaRPr lang="en-US"/>
+          </a:p>
+        </p:txBody>
+      </p:sp>
+    </p:spTree>
+  </p:cSld>
+  <p:clrMapOvr>
+    <a:masterClrMapping/>
+  </p:clrMapOvr>
+</p:sld>
+</file>
+
+<file path=ppt/slides/slide11.xml><?xml version="1.0" encoding="utf-8"?>
+<p:sld xmlns:a="http://schemas.openxmlformats.org/drawingml/2006/main" xmlns:r="http://schemas.openxmlformats.org/officeDocument/2006/relationships" xmlns:p="http://schemas.openxmlformats.org/presentationml/2006/main">
+  <p:cSld name="Slide 11">
+    <p:spTree>
+      <p:nvGrpSpPr>
+        <p:cNvPr id="1" name=""/>
+        <p:cNvGrpSpPr/>
+        <p:nvPr/>
+      </p:nvGrpSpPr>
+      <p:grpSpPr>
+        <a:xfrm>
+          <a:off x="0" y="0"/>
+          <a:ext cx="0" cy="0"/>
+          <a:chOff x="0" y="0"/>
+          <a:chExt cx="0" cy="0"/>
+        </a:xfrm>
+      </p:grpSpPr>
+      <p:sp>
+        <p:nvSpPr>
+          <p:cNvPr id="2" name="Text 0"/>
+          <p:cNvSpPr/>
+          <p:nvPr>
+            <p:ph idx="100" type="title" hasCustomPrompt="1"/>
+          </p:nvPr>
+        </p:nvSpPr>
+        <p:spPr>
+          <a:xfrm>
+            <a:off x="640080" y="548640"/>
+            <a:ext cx="10972800" cy="914400"/>
+          </a:xfrm>
+          <a:prstGeom prst="rect">
+            <a:avLst/>
+          </a:prstGeom>
+          <a:noFill/>
+          <a:ln/>
+        </p:spPr>
+        <p:txBody>
+          <a:bodyPr wrap="square" lIns="0" tIns="0" rIns="0" bIns="0" rtlCol="0" anchor="ctr"/>
+          <a:lstStyle/>
+          <a:p>
+            <a:pPr algn="l" indent="0" marL="0">
+              <a:buNone/>
+            </a:pPr>
+            <a:r>
+              <a:rPr lang="en-US" sz="4000" b="1" dirty="0">
+                <a:solidFill>
+                  <a:schemeClr val="bg1"/>
+                </a:solidFill>
+              </a:rPr>
+              <a:t>The pilot: one org, one cycle, three measures</a:t>
+            </a:r>
+            <a:endParaRPr lang="en-US" sz="4000" dirty="0"/>
+          </a:p>
+        </p:txBody>
+      </p:sp>
+      <p:sp>
+        <p:nvSpPr>
+          <p:cNvPr id="3" name="Plan label"/>
+          <p:cNvSpPr txBox="1"/>
+          <p:nvPr/>
+        </p:nvSpPr>
+        <p:spPr>
+          <a:xfrm>
+            <a:off x="640080" y="1691640"/>
+            <a:ext cx="5120640" cy="365760"/>
+          </a:xfrm>
+          <a:prstGeom prst="rect">
+            <a:avLst/>
+          </a:prstGeom>
+          <a:noFill/>
+          <a:ln/>
+        </p:spPr>
+        <p:txBody>
+          <a:bodyPr wrap="square" lIns="0" tIns="0" rIns="0" bIns="0" rtlCol="0" anchor="ctr"/>
+          <a:lstStyle/>
+          <a:p>
+            <a:pPr indent="0" marL="0">
+              <a:buNone/>
+            </a:pPr>
+            <a:r>
+              <a:rPr lang="en-US" sz="1400" b="1" spc="200" kern="0" dirty="0">
+                <a:solidFill>
+                  <a:schemeClr val="accent6"/>
+                </a:solidFill>
+              </a:rPr>
+              <a:t>THE PLAN</a:t>
+            </a:r>
+            <a:endParaRPr lang="en-US" sz="1400" dirty="0"/>
+          </a:p>
+        </p:txBody>
+      </p:sp>
+      <p:sp>
+        <p:nvSpPr>
+          <p:cNvPr id="4" name="Measures label"/>
+          <p:cNvSpPr txBox="1"/>
+          <p:nvPr/>
+        </p:nvSpPr>
+        <p:spPr>
+          <a:xfrm>
+            <a:off x="6355080" y="1691640"/>
+            <a:ext cx="5120640" cy="365760"/>
+          </a:xfrm>
+          <a:prstGeom prst="rect">
+            <a:avLst/>
+          </a:prstGeom>
+          <a:noFill/>
+          <a:ln/>
+        </p:spPr>
+        <p:txBody>
+          <a:bodyPr wrap="square" lIns="0" tIns="0" rIns="0" bIns="0" rtlCol="0" anchor="ctr"/>
+          <a:lstStyle/>
+          <a:p>
+            <a:pPr indent="0" marL="0">
+              <a:buNone/>
+            </a:pPr>
+            <a:r>
+              <a:rPr lang="en-US" sz="1400" b="1" spc="200" kern="0" dirty="0">
+                <a:solidFill>
+                  <a:schemeClr val="accent6"/>
+                </a:solidFill>
+              </a:rPr>
+              <a:t>HOW WE'D JUDGE IT</a:t>
+            </a:r>
+            <a:endParaRPr lang="en-US" sz="1400" dirty="0"/>
+          </a:p>
+        </p:txBody>
+      </p:sp>
+      <p:sp>
+        <p:nvSpPr>
+          <p:cNvPr id="5" name="Plan 1 card"/>
+          <p:cNvSpPr/>
+          <p:nvPr/>
+        </p:nvSpPr>
+        <p:spPr>
+          <a:xfrm>
+            <a:off x="640080" y="2240280"/>
+            <a:ext cx="5193792" cy="886968"/>
+          </a:xfrm>
+          <a:prstGeom prst="roundRect">
+            <a:avLst>
+              <a:gd name="adj" fmla="val 6186"/>
+            </a:avLst>
+          </a:prstGeom>
+          <a:solidFill>
+            <a:schemeClr val="accent1"/>
+          </a:solidFill>
+          <a:ln w="12700">
+            <a:solidFill>
+              <a:schemeClr val="accent1"/>
+            </a:solidFill>
+            <a:prstDash val="solid"/>
+          </a:ln>
+        </p:spPr>
+      </p:sp>
+      <p:sp>
+        <p:nvSpPr>
+          <p:cNvPr id="6" name="Plan 1 number"/>
+          <p:cNvSpPr txBox="1"/>
+          <p:nvPr/>
+        </p:nvSpPr>
+        <p:spPr>
+          <a:xfrm>
+            <a:off x="868680" y="2240280"/>
+            <a:ext cx="457200" cy="886968"/>
+          </a:xfrm>
+          <a:prstGeom prst="rect">
+            <a:avLst/>
+          </a:prstGeom>
+          <a:noFill/>
+          <a:ln/>
+        </p:spPr>
+        <p:txBody>
+          <a:bodyPr wrap="square" lIns="0" tIns="0" rIns="0" bIns="0" rtlCol="0" anchor="ctr"/>
+          <a:lstStyle/>
+          <a:p>
+            <a:pPr indent="0" marL="0">
+              <a:buNone/>
+            </a:pPr>
+            <a:r>
+              <a:rPr lang="en-US" sz="2800" b="1" dirty="0">
+                <a:solidFill>
+                  <a:schemeClr val="accent6"/>
+                </a:solidFill>
+              </a:rPr>
+              <a:t>1</a:t>
+            </a:r>
+            <a:endParaRPr lang="en-US" sz="2800" dirty="0"/>
+          </a:p>
+        </p:txBody>
+      </p:sp>
+      <p:sp>
+        <p:nvSpPr>
+          <p:cNvPr id="7" name="Plan 1 text"/>
+          <p:cNvSpPr txBox="1"/>
+          <p:nvPr/>
+        </p:nvSpPr>
+        <p:spPr>
+          <a:xfrm>
+            <a:off x="1371600" y="2240280"/>
+            <a:ext cx="4297680" cy="886968"/>
+          </a:xfrm>
+          <a:prstGeom prst="rect">
+            <a:avLst/>
+          </a:prstGeom>
+          <a:noFill/>
+          <a:ln/>
+        </p:spPr>
+        <p:txBody>
+          <a:bodyPr wrap="square" lIns="0" tIns="0" rIns="0" bIns="0" rtlCol="0" anchor="ctr"/>
+          <a:lstStyle/>
+          <a:p>
+            <a:pPr indent="0" marL="0">
+              <a:buNone/>
+            </a:pPr>
+            <a:r>
+              <a:rPr lang="en-US" sz="1700" b="1" dirty="0">
+                <a:solidFill>
+                  <a:schemeClr val="bg1"/>
+                </a:solidFill>
+              </a:rPr>
+              <a:t>Load one org's goals</a:t>
+            </a:r>
+            <a:endParaRPr lang="en-US" sz="1700" dirty="0"/>
+          </a:p>
+          <a:p>
+            <a:pPr indent="0" marL="0">
+              <a:buNone/>
+            </a:pPr>
+            <a:r>
+              <a:rPr lang="en-US" sz="1400" dirty="0">
+                <a:solidFill>
+                  <a:schemeClr val="bg1"/>
+                </a:solidFill>
+              </a:rPr>
+              <a:t>Each with its So What and what it contributes to.</a:t>
+            </a:r>
+            <a:endParaRPr lang="en-US" sz="1700" dirty="0"/>
+          </a:p>
+        </p:txBody>
+      </p:sp>
+      <p:sp>
+        <p:nvSpPr>
+          <p:cNvPr id="8" name="Plan 2 card"/>
+          <p:cNvSpPr/>
+          <p:nvPr/>
+        </p:nvSpPr>
+        <p:spPr>
+          <a:xfrm>
+            <a:off x="640080" y="3264408"/>
+            <a:ext cx="5193792" cy="886968"/>
+          </a:xfrm>
+          <a:prstGeom prst="roundRect">
+            <a:avLst>
+              <a:gd name="adj" fmla="val 6186"/>
+            </a:avLst>
+          </a:prstGeom>
+          <a:solidFill>
+            <a:schemeClr val="accent1"/>
+          </a:solidFill>
+          <a:ln w="12700">
+            <a:solidFill>
+              <a:schemeClr val="accent1"/>
+            </a:solidFill>
+            <a:prstDash val="solid"/>
+          </a:ln>
+        </p:spPr>
+      </p:sp>
+      <p:sp>
+        <p:nvSpPr>
+          <p:cNvPr id="9" name="Plan 2 number"/>
+          <p:cNvSpPr txBox="1"/>
+          <p:nvPr/>
+        </p:nvSpPr>
+        <p:spPr>
+          <a:xfrm>
+            <a:off x="868680" y="3264408"/>
+            <a:ext cx="457200" cy="886968"/>
+          </a:xfrm>
+          <a:prstGeom prst="rect">
+            <a:avLst/>
+          </a:prstGeom>
+          <a:noFill/>
+          <a:ln/>
+        </p:spPr>
+        <p:txBody>
+          <a:bodyPr wrap="square" lIns="0" tIns="0" rIns="0" bIns="0" rtlCol="0" anchor="ctr"/>
+          <a:lstStyle/>
+          <a:p>
+            <a:pPr indent="0" marL="0">
+              <a:buNone/>
+            </a:pPr>
+            <a:r>
+              <a:rPr lang="en-US" sz="2800" b="1" dirty="0">
+                <a:solidFill>
+                  <a:schemeClr val="accent6"/>
+                </a:solidFill>
+              </a:rPr>
+              <a:t>2</a:t>
+            </a:r>
+            <a:endParaRPr lang="en-US" sz="2800" dirty="0"/>
+          </a:p>
+        </p:txBody>
+      </p:sp>
+      <p:sp>
+        <p:nvSpPr>
+          <p:cNvPr id="10" name="Plan 2 text"/>
+          <p:cNvSpPr txBox="1"/>
+          <p:nvPr/>
+        </p:nvSpPr>
+        <p:spPr>
+          <a:xfrm>
+            <a:off x="1371600" y="3264408"/>
+            <a:ext cx="4297680" cy="886968"/>
+          </a:xfrm>
+          <a:prstGeom prst="rect">
+            <a:avLst/>
+          </a:prstGeom>
+          <a:noFill/>
+          <a:ln/>
+        </p:spPr>
+        <p:txBody>
+          <a:bodyPr wrap="square" lIns="0" tIns="0" rIns="0" bIns="0" rtlCol="0" anchor="ctr"/>
+          <a:lstStyle/>
+          <a:p>
+            <a:pPr indent="0" marL="0">
+              <a:buNone/>
+            </a:pPr>
+            <a:r>
+              <a:rPr lang="en-US" sz="1700" b="1" dirty="0">
+                <a:solidFill>
+                  <a:schemeClr val="bg1"/>
+                </a:solidFill>
+              </a:rPr>
+              <a:t>Check in weekly for a month</a:t>
+            </a:r>
+            <a:endParaRPr lang="en-US" sz="1700" dirty="0"/>
+          </a:p>
+          <a:p>
+            <a:pPr indent="0" marL="0">
+              <a:buNone/>
+            </a:pPr>
+            <a:r>
+              <a:rPr lang="en-US" sz="1400" dirty="0">
+                <a:solidFill>
+                  <a:schemeClr val="bg1"/>
+                </a:solidFill>
+              </a:rPr>
+              <a:t>Reminders and nudges do the chasing.</a:t>
+            </a:r>
+            <a:endParaRPr lang="en-US" sz="1700" dirty="0"/>
+          </a:p>
+        </p:txBody>
+      </p:sp>
+      <p:sp>
+        <p:nvSpPr>
+          <p:cNvPr id="11" name="Plan 3 card"/>
+          <p:cNvSpPr/>
+          <p:nvPr/>
+        </p:nvSpPr>
+        <p:spPr>
+          <a:xfrm>
+            <a:off x="640080" y="4288536"/>
+            <a:ext cx="5193792" cy="886968"/>
+          </a:xfrm>
+          <a:prstGeom prst="roundRect">
+            <a:avLst>
+              <a:gd name="adj" fmla="val 6186"/>
+            </a:avLst>
+          </a:prstGeom>
+          <a:solidFill>
+            <a:schemeClr val="accent1"/>
+          </a:solidFill>
+          <a:ln w="12700">
+            <a:solidFill>
+              <a:schemeClr val="accent1"/>
+            </a:solidFill>
+            <a:prstDash val="solid"/>
+          </a:ln>
+        </p:spPr>
+      </p:sp>
+      <p:sp>
+        <p:nvSpPr>
+          <p:cNvPr id="12" name="Plan 3 number"/>
+          <p:cNvSpPr txBox="1"/>
+          <p:nvPr/>
+        </p:nvSpPr>
+        <p:spPr>
+          <a:xfrm>
+            <a:off x="868680" y="4288536"/>
+            <a:ext cx="457200" cy="886968"/>
+          </a:xfrm>
+          <a:prstGeom prst="rect">
+            <a:avLst/>
+          </a:prstGeom>
+          <a:noFill/>
+          <a:ln/>
+        </p:spPr>
+        <p:txBody>
+          <a:bodyPr wrap="square" lIns="0" tIns="0" rIns="0" bIns="0" rtlCol="0" anchor="ctr"/>
+          <a:lstStyle/>
+          <a:p>
+            <a:pPr indent="0" marL="0">
+              <a:buNone/>
+            </a:pPr>
+            <a:r>
+              <a:rPr lang="en-US" sz="2800" b="1" dirty="0">
+                <a:solidFill>
+                  <a:schemeClr val="accent6"/>
+                </a:solidFill>
+              </a:rPr>
+              <a:t>3</a:t>
+            </a:r>
+            <a:endParaRPr lang="en-US" sz="2800" dirty="0"/>
+          </a:p>
+        </p:txBody>
+      </p:sp>
+      <p:sp>
+        <p:nvSpPr>
+          <p:cNvPr id="13" name="Plan 3 text"/>
+          <p:cNvSpPr txBox="1"/>
+          <p:nvPr/>
+        </p:nvSpPr>
+        <p:spPr>
+          <a:xfrm>
+            <a:off x="1371600" y="4288536"/>
+            <a:ext cx="4297680" cy="886968"/>
+          </a:xfrm>
+          <a:prstGeom prst="rect">
+            <a:avLst/>
+          </a:prstGeom>
+          <a:noFill/>
+          <a:ln/>
+        </p:spPr>
+        <p:txBody>
+          <a:bodyPr wrap="square" lIns="0" tIns="0" rIns="0" bIns="0" rtlCol="0" anchor="ctr"/>
+          <a:lstStyle/>
+          <a:p>
+            <a:pPr indent="0" marL="0">
+              <a:buNone/>
+            </a:pPr>
+            <a:r>
+              <a:rPr lang="en-US" sz="1700" b="1" dirty="0">
+                <a:solidFill>
+                  <a:schemeClr val="bg1"/>
+                </a:solidFill>
+              </a:rPr>
+              <a:t>Run the review from the Report</a:t>
+            </a:r>
+            <a:endParaRPr lang="en-US" sz="1700" dirty="0"/>
+          </a:p>
+          <a:p>
+            <a:pPr indent="0" marL="0">
+              <a:buNone/>
+            </a:pPr>
+            <a:r>
+              <a:rPr lang="en-US" sz="1400" dirty="0">
+                <a:solidFill>
+                  <a:schemeClr val="bg1"/>
+                </a:solidFill>
+              </a:rPr>
+              <a:t>No hand-built status deck that cycle.</a:t>
+            </a:r>
+            <a:endParaRPr lang="en-US" sz="1700" dirty="0"/>
+          </a:p>
+        </p:txBody>
+      </p:sp>
+      <p:sp>
+        <p:nvSpPr>
+          <p:cNvPr id="14" name="Measure 1 card"/>
+          <p:cNvSpPr/>
+          <p:nvPr/>
+        </p:nvSpPr>
+        <p:spPr>
+          <a:xfrm>
+            <a:off x="6355080" y="2240280"/>
+            <a:ext cx="5193792" cy="886968"/>
+          </a:xfrm>
+          <a:prstGeom prst="roundRect">
+            <a:avLst>
+              <a:gd name="adj" fmla="val 6186"/>
+            </a:avLst>
+          </a:prstGeom>
+          <a:solidFill>
+            <a:schemeClr val="accent1"/>
+          </a:solidFill>
+          <a:ln w="12700">
+            <a:solidFill>
+              <a:schemeClr val="accent1"/>
+            </a:solidFill>
+            <a:prstDash val="solid"/>
+          </a:ln>
+        </p:spPr>
+      </p:sp>
+      <p:sp>
+        <p:nvSpPr>
+          <p:cNvPr id="15" name="Measure 1 number"/>
+          <p:cNvSpPr txBox="1"/>
+          <p:nvPr/>
+        </p:nvSpPr>
+        <p:spPr>
+          <a:xfrm>
+            <a:off x="6583680" y="2240280"/>
+            <a:ext cx="457200" cy="886968"/>
+          </a:xfrm>
+          <a:prstGeom prst="rect">
+            <a:avLst/>
+          </a:prstGeom>
+          <a:noFill/>
+          <a:ln/>
+        </p:spPr>
+        <p:txBody>
+          <a:bodyPr wrap="square" lIns="0" tIns="0" rIns="0" bIns="0" rtlCol="0" anchor="ctr"/>
+          <a:lstStyle/>
+          <a:p>
+            <a:pPr indent="0" marL="0">
+              <a:buNone/>
+            </a:pPr>
+            <a:r>
+              <a:rPr lang="en-US" sz="2800" b="1" dirty="0">
+                <a:solidFill>
+                  <a:schemeClr val="accent6"/>
+                </a:solidFill>
+              </a:rPr>
+              <a:t>1</a:t>
+            </a:r>
+            <a:endParaRPr lang="en-US" sz="2800" dirty="0"/>
+          </a:p>
+        </p:txBody>
+      </p:sp>
+      <p:sp>
+        <p:nvSpPr>
+          <p:cNvPr id="16" name="Measure 1 text"/>
+          <p:cNvSpPr txBox="1"/>
+          <p:nvPr/>
+        </p:nvSpPr>
+        <p:spPr>
+          <a:xfrm>
+            <a:off x="7086600" y="2240280"/>
+            <a:ext cx="4297680" cy="886968"/>
+          </a:xfrm>
+          <a:prstGeom prst="rect">
+            <a:avLst/>
+          </a:prstGeom>
+          <a:noFill/>
+          <a:ln/>
+        </p:spPr>
+        <p:txBody>
+          <a:bodyPr wrap="square" lIns="0" tIns="0" rIns="0" bIns="0" rtlCol="0" anchor="ctr"/>
+          <a:lstStyle/>
+          <a:p>
+            <a:pPr indent="0" marL="0">
+              <a:buNone/>
+            </a:pPr>
+            <a:r>
+              <a:rPr lang="en-US" sz="1700" b="1" dirty="0">
+                <a:solidFill>
+                  <a:schemeClr val="bg1"/>
+                </a:solidFill>
+              </a:rPr>
+              <a:t>Check-ins on time</a:t>
+            </a:r>
+            <a:endParaRPr lang="en-US" sz="1700" dirty="0"/>
+          </a:p>
+          <a:p>
+            <a:pPr indent="0" marL="0">
+              <a:buNone/>
+            </a:pPr>
+            <a:r>
+              <a:rPr lang="en-US" sz="1400" dirty="0">
+                <a:solidFill>
+                  <a:schemeClr val="bg1"/>
+                </a:solidFill>
+              </a:rPr>
+              <a:t>Goals updated each week. Proposed bar: 80%.</a:t>
+            </a:r>
+            <a:endParaRPr lang="en-US" sz="1700" dirty="0"/>
+          </a:p>
+        </p:txBody>
+      </p:sp>
+      <p:sp>
+        <p:nvSpPr>
+          <p:cNvPr id="17" name="Measure 2 card"/>
+          <p:cNvSpPr/>
+          <p:nvPr/>
+        </p:nvSpPr>
+        <p:spPr>
+          <a:xfrm>
+            <a:off x="6355080" y="3264408"/>
+            <a:ext cx="5193792" cy="886968"/>
+          </a:xfrm>
+          <a:prstGeom prst="roundRect">
+            <a:avLst>
+              <a:gd name="adj" fmla="val 6186"/>
+            </a:avLst>
+          </a:prstGeom>
+          <a:solidFill>
+            <a:schemeClr val="accent1"/>
+          </a:solidFill>
+          <a:ln w="12700">
+            <a:solidFill>
+              <a:schemeClr val="accent1"/>
+            </a:solidFill>
+            <a:prstDash val="solid"/>
+          </a:ln>
+        </p:spPr>
+      </p:sp>
+      <p:sp>
+        <p:nvSpPr>
+          <p:cNvPr id="18" name="Measure 2 number"/>
+          <p:cNvSpPr txBox="1"/>
+          <p:nvPr/>
+        </p:nvSpPr>
+        <p:spPr>
+          <a:xfrm>
+            <a:off x="6583680" y="3264408"/>
+            <a:ext cx="457200" cy="886968"/>
+          </a:xfrm>
+          <a:prstGeom prst="rect">
+            <a:avLst/>
+          </a:prstGeom>
+          <a:noFill/>
+          <a:ln/>
+        </p:spPr>
+        <p:txBody>
+          <a:bodyPr wrap="square" lIns="0" tIns="0" rIns="0" bIns="0" rtlCol="0" anchor="ctr"/>
+          <a:lstStyle/>
+          <a:p>
+            <a:pPr indent="0" marL="0">
+              <a:buNone/>
+            </a:pPr>
+            <a:r>
+              <a:rPr lang="en-US" sz="2800" b="1" dirty="0">
+                <a:solidFill>
+                  <a:schemeClr val="accent6"/>
+                </a:solidFill>
+              </a:rPr>
+              <a:t>2</a:t>
+            </a:r>
+            <a:endParaRPr lang="en-US" sz="2800" dirty="0"/>
+          </a:p>
+        </p:txBody>
+      </p:sp>
+      <p:sp>
+        <p:nvSpPr>
+          <p:cNvPr id="19" name="Measure 2 text"/>
+          <p:cNvSpPr txBox="1"/>
+          <p:nvPr/>
+        </p:nvSpPr>
+        <p:spPr>
+          <a:xfrm>
+            <a:off x="7086600" y="3264408"/>
+            <a:ext cx="4297680" cy="886968"/>
+          </a:xfrm>
+          <a:prstGeom prst="rect">
+            <a:avLst/>
+          </a:prstGeom>
+          <a:noFill/>
+          <a:ln/>
+        </p:spPr>
+        <p:txBody>
+          <a:bodyPr wrap="square" lIns="0" tIns="0" rIns="0" bIns="0" rtlCol="0" anchor="ctr"/>
+          <a:lstStyle/>
+          <a:p>
+            <a:pPr indent="0" marL="0">
+              <a:buNone/>
+            </a:pPr>
+            <a:r>
+              <a:rPr lang="en-US" sz="1700" b="1" dirty="0">
+                <a:solidFill>
+                  <a:schemeClr val="bg1"/>
+                </a:solidFill>
+              </a:rPr>
+              <a:t>Trouble found early</a:t>
+            </a:r>
+            <a:endParaRPr lang="en-US" sz="1700" dirty="0"/>
+          </a:p>
+          <a:p>
+            <a:pPr indent="0" marL="0">
+              <a:buNone/>
+            </a:pPr>
+            <a:r>
+              <a:rPr lang="en-US" sz="1400" dirty="0">
+                <a:solidFill>
+                  <a:schemeClr val="bg1"/>
+                </a:solidFill>
+              </a:rPr>
+              <a:t>Problems surfaced before the review, not at it.</a:t>
+            </a:r>
+            <a:endParaRPr lang="en-US" sz="1700" dirty="0"/>
+          </a:p>
+        </p:txBody>
+      </p:sp>
+      <p:sp>
+        <p:nvSpPr>
+          <p:cNvPr id="20" name="Measure 3 card"/>
+          <p:cNvSpPr/>
+          <p:nvPr/>
+        </p:nvSpPr>
+        <p:spPr>
+          <a:xfrm>
+            <a:off x="6355080" y="4288536"/>
+            <a:ext cx="5193792" cy="886968"/>
+          </a:xfrm>
+          <a:prstGeom prst="roundRect">
+            <a:avLst>
+              <a:gd name="adj" fmla="val 6186"/>
+            </a:avLst>
+          </a:prstGeom>
+          <a:solidFill>
+            <a:schemeClr val="accent1"/>
+          </a:solidFill>
+          <a:ln w="12700">
+            <a:solidFill>
+              <a:schemeClr val="accent1"/>
+            </a:solidFill>
+            <a:prstDash val="solid"/>
+          </a:ln>
+        </p:spPr>
+      </p:sp>
+      <p:sp>
+        <p:nvSpPr>
+          <p:cNvPr id="21" name="Measure 3 number"/>
+          <p:cNvSpPr txBox="1"/>
+          <p:nvPr/>
+        </p:nvSpPr>
+        <p:spPr>
+          <a:xfrm>
+            <a:off x="6583680" y="4288536"/>
+            <a:ext cx="457200" cy="886968"/>
+          </a:xfrm>
+          <a:prstGeom prst="rect">
+            <a:avLst/>
+          </a:prstGeom>
+          <a:noFill/>
+          <a:ln/>
+        </p:spPr>
+        <p:txBody>
+          <a:bodyPr wrap="square" lIns="0" tIns="0" rIns="0" bIns="0" rtlCol="0" anchor="ctr"/>
+          <a:lstStyle/>
+          <a:p>
+            <a:pPr indent="0" marL="0">
+              <a:buNone/>
+            </a:pPr>
+            <a:r>
+              <a:rPr lang="en-US" sz="2800" b="1" dirty="0">
+                <a:solidFill>
+                  <a:schemeClr val="accent6"/>
+                </a:solidFill>
+              </a:rPr>
+              <a:t>3</a:t>
+            </a:r>
+            <a:endParaRPr lang="en-US" sz="2800" dirty="0"/>
+          </a:p>
+        </p:txBody>
+      </p:sp>
+      <p:sp>
+        <p:nvSpPr>
+          <p:cNvPr id="22" name="Measure 3 text"/>
+          <p:cNvSpPr txBox="1"/>
+          <p:nvPr/>
+        </p:nvSpPr>
+        <p:spPr>
+          <a:xfrm>
+            <a:off x="7086600" y="4288536"/>
+            <a:ext cx="4297680" cy="886968"/>
+          </a:xfrm>
+          <a:prstGeom prst="rect">
+            <a:avLst/>
+          </a:prstGeom>
+          <a:noFill/>
+          <a:ln/>
+        </p:spPr>
+        <p:txBody>
+          <a:bodyPr wrap="square" lIns="0" tIns="0" rIns="0" bIns="0" rtlCol="0" anchor="ctr"/>
+          <a:lstStyle/>
+          <a:p>
+            <a:pPr indent="0" marL="0">
+              <a:buNone/>
+            </a:pPr>
+            <a:r>
+              <a:rPr lang="en-US" sz="1700" b="1" dirty="0">
+                <a:solidFill>
+                  <a:schemeClr val="bg1"/>
+                </a:solidFill>
+              </a:rPr>
+              <a:t>Review prep time</a:t>
+            </a:r>
+            <a:endParaRPr lang="en-US" sz="1700" dirty="0"/>
+          </a:p>
+          <a:p>
+            <a:pPr indent="0" marL="0">
+              <a:buNone/>
+            </a:pPr>
+            <a:r>
+              <a:rPr lang="en-US" sz="1400" dirty="0">
+                <a:solidFill>
+                  <a:schemeClr val="bg1"/>
+                </a:solidFill>
+              </a:rPr>
+              <a:t>Hours to produce the Report, against the last deck.</a:t>
+            </a:r>
+            <a:endParaRPr lang="en-US" sz="1700" dirty="0"/>
+          </a:p>
+        </p:txBody>
+      </p:sp>
+      <p:sp>
+        <p:nvSpPr>
+          <p:cNvPr id="23" name="Decision"/>
+          <p:cNvSpPr txBox="1"/>
+          <p:nvPr/>
+        </p:nvSpPr>
+        <p:spPr>
+          <a:xfrm>
+            <a:off x="640080" y="5486400"/>
+            <a:ext cx="10881360" cy="640080"/>
+          </a:xfrm>
+          <a:prstGeom prst="rect">
+            <a:avLst/>
+          </a:prstGeom>
+          <a:noFill/>
+          <a:ln/>
+        </p:spPr>
+        <p:txBody>
+          <a:bodyPr wrap="square" lIns="0" tIns="0" rIns="0" bIns="0" rtlCol="0" anchor="ctr"/>
+          <a:lstStyle/>
+          <a:p>
+            <a:pPr indent="0" marL="0">
+              <a:buNone/>
+            </a:pPr>
+            <a:r>
+              <a:rPr lang="en-US" sz="2200" b="1" dirty="0">
+                <a:solidFill>
+                  <a:schemeClr val="bg1"/>
+                </a:solidFill>
+              </a:rPr>
+              <a:t>Then one decision: </a:t>
+            </a:r>
+            <a:pPr indent="0" marL="0">
+              <a:buNone/>
+            </a:pPr>
+            <a:r>
+              <a:rPr lang="en-US" sz="2200" dirty="0">
+                <a:solidFill>
+                  <a:schemeClr val="accent6"/>
+                </a:solidFill>
+              </a:rPr>
+              <a:t>expand it, extend the pilot, or stop.</a:t>
+            </a:r>
+            <a:endParaRPr lang="en-US" sz="2200" dirty="0"/>
+          </a:p>
+        </p:txBody>
+      </p:sp>
     </p:spTree>
   </p:cSld>
   <p:clrMapOvr>
@@ -2255,7 +3772,7 @@
                   <a:schemeClr val="tx2"/>
                 </a:solidFill>
               </a:rPr>
-              <a:t>Trouble surfaces at the review, or after it</a:t>
+              <a:t>The ask: replace one status deck for one cycle</a:t>
             </a:r>
             <a:endParaRPr lang="en-US" sz="3600" dirty="0"/>
           </a:p>
@@ -2263,18 +3780,18 @@
       </p:sp>
       <p:sp>
         <p:nvSpPr>
-          <p:cNvPr id="3" name="Problem 1 card"/>
+          <p:cNvPr id="3" name="Ask 1 card"/>
           <p:cNvSpPr/>
           <p:nvPr/>
         </p:nvSpPr>
         <p:spPr>
           <a:xfrm>
             <a:off x="548640" y="1737360"/>
-            <a:ext cx="3456432" cy="3566160"/>
+            <a:ext cx="3456432" cy="2651760"/>
           </a:xfrm>
           <a:prstGeom prst="roundRect">
             <a:avLst>
-              <a:gd name="adj" fmla="val 2116"/>
+              <a:gd name="adj" fmla="val 2759"/>
             </a:avLst>
           </a:prstGeom>
           <a:solidFill>
@@ -2290,115 +3807,90 @@
       </p:sp>
       <p:sp>
         <p:nvSpPr>
-          <p:cNvPr id="4" name="Problem 1 mark"/>
+          <p:cNvPr id="4" name="Ask 1 heading"/>
+          <p:cNvSpPr txBox="1"/>
+          <p:nvPr/>
+        </p:nvSpPr>
+        <p:spPr>
+          <a:xfrm>
+            <a:off x="868680" y="2057400"/>
+            <a:ext cx="2834640" cy="731520"/>
+          </a:xfrm>
+          <a:prstGeom prst="rect">
+            <a:avLst/>
+          </a:prstGeom>
+          <a:noFill/>
+          <a:ln/>
+        </p:spPr>
+        <p:txBody>
+          <a:bodyPr wrap="square" lIns="0" tIns="0" rIns="0" bIns="0" rtlCol="0" anchor="t"/>
+          <a:lstStyle/>
+          <a:p>
+            <a:pPr indent="0" marL="0">
+              <a:buNone/>
+            </a:pPr>
+            <a:r>
+              <a:rPr lang="en-US" sz="3000" b="1" dirty="0">
+                <a:solidFill>
+                  <a:schemeClr val="accent1"/>
+                </a:solidFill>
+              </a:rPr>
+              <a:t>One org</a:t>
+            </a:r>
+            <a:endParaRPr lang="en-US" sz="3000" dirty="0"/>
+          </a:p>
+        </p:txBody>
+      </p:sp>
+      <p:sp>
+        <p:nvSpPr>
+          <p:cNvPr id="5" name="Ask 1 text"/>
+          <p:cNvSpPr txBox="1"/>
+          <p:nvPr/>
+        </p:nvSpPr>
+        <p:spPr>
+          <a:xfrm>
+            <a:off x="868680" y="2880360"/>
+            <a:ext cx="2834640" cy="1280160"/>
+          </a:xfrm>
+          <a:prstGeom prst="rect">
+            <a:avLst/>
+          </a:prstGeom>
+          <a:noFill/>
+          <a:ln/>
+        </p:spPr>
+        <p:txBody>
+          <a:bodyPr wrap="square" lIns="0" tIns="0" rIns="0" bIns="0" rtlCol="0" anchor="t"/>
+          <a:lstStyle/>
+          <a:p>
+            <a:pPr indent="0" marL="0">
+              <a:buNone/>
+            </a:pPr>
+            <a:r>
+              <a:rPr lang="en-US" sz="1600" dirty="0">
+                <a:solidFill>
+                  <a:schemeClr val="tx1"/>
+                </a:solidFill>
+              </a:rPr>
+              <a:t>Its goals move out of the PowerPoint status deck and into Goal Tracker.</a:t>
+            </a:r>
+            <a:endParaRPr lang="en-US" sz="1600" dirty="0"/>
+          </a:p>
+        </p:txBody>
+      </p:sp>
+      <p:sp>
+        <p:nvSpPr>
+          <p:cNvPr id="6" name="Ask 2 card"/>
           <p:cNvSpPr/>
           <p:nvPr/>
         </p:nvSpPr>
         <p:spPr>
           <a:xfrm>
-            <a:off x="868680" y="2103120"/>
-            <a:ext cx="384048" cy="384048"/>
-          </a:xfrm>
-          <a:prstGeom prst="rect">
-            <a:avLst/>
-          </a:prstGeom>
-          <a:solidFill>
-            <a:schemeClr val="accent5"/>
-          </a:solidFill>
-          <a:ln w="12700">
-            <a:solidFill>
-              <a:schemeClr val="accent5"/>
-            </a:solidFill>
-            <a:prstDash val="solid"/>
-          </a:ln>
-        </p:spPr>
-      </p:sp>
-      <p:sp>
-        <p:nvSpPr>
-          <p:cNvPr id="5" name="Problem 1 heading"/>
-          <p:cNvSpPr txBox="1"/>
-          <p:nvPr/>
-        </p:nvSpPr>
-        <p:spPr>
-          <a:xfrm>
-            <a:off x="868680" y="2788920"/>
-            <a:ext cx="2834640" cy="731520"/>
-          </a:xfrm>
-          <a:prstGeom prst="rect">
-            <a:avLst/>
-          </a:prstGeom>
-          <a:noFill/>
-          <a:ln/>
-        </p:spPr>
-        <p:txBody>
-          <a:bodyPr wrap="square" lIns="0" tIns="0" rIns="0" bIns="0" rtlCol="0" anchor="t"/>
-          <a:lstStyle/>
-          <a:p>
-            <a:pPr indent="0" marL="0">
-              <a:buNone/>
-            </a:pPr>
-            <a:r>
-              <a:rPr lang="en-US" sz="2200" b="1" dirty="0">
-                <a:solidFill>
-                  <a:schemeClr val="tx1"/>
-                </a:solidFill>
-              </a:rPr>
-              <a:t>Silence looks like Green</a:t>
-            </a:r>
-            <a:endParaRPr lang="en-US" sz="2200" dirty="0"/>
-          </a:p>
-        </p:txBody>
-      </p:sp>
-      <p:sp>
-        <p:nvSpPr>
-          <p:cNvPr id="6" name="Problem 1 text"/>
-          <p:cNvSpPr txBox="1"/>
-          <p:nvPr/>
-        </p:nvSpPr>
-        <p:spPr>
-          <a:xfrm>
-            <a:off x="868680" y="3611880"/>
-            <a:ext cx="2834640" cy="1463040"/>
-          </a:xfrm>
-          <a:prstGeom prst="rect">
-            <a:avLst/>
-          </a:prstGeom>
-          <a:noFill/>
-          <a:ln/>
-        </p:spPr>
-        <p:txBody>
-          <a:bodyPr wrap="square" lIns="0" tIns="0" rIns="0" bIns="0" rtlCol="0" anchor="t"/>
-          <a:lstStyle/>
-          <a:p>
-            <a:pPr indent="0" marL="0">
-              <a:buNone/>
-            </a:pPr>
-            <a:r>
-              <a:rPr lang="en-US" sz="1500" dirty="0">
-                <a:solidFill>
-                  <a:schemeClr val="accent5"/>
-                </a:solidFill>
-              </a:rPr>
-              <a:t>A goal nobody has updated in six weeks still shows its last good status. Nothing flags it.</a:t>
-            </a:r>
-            <a:endParaRPr lang="en-US" sz="1500" dirty="0"/>
-          </a:p>
-        </p:txBody>
-      </p:sp>
-      <p:sp>
-        <p:nvSpPr>
-          <p:cNvPr id="7" name="Problem 2 card"/>
-          <p:cNvSpPr/>
-          <p:nvPr/>
-        </p:nvSpPr>
-        <p:spPr>
-          <a:xfrm>
             <a:off x="4370832" y="1737360"/>
-            <a:ext cx="3456432" cy="3566160"/>
+            <a:ext cx="3456432" cy="2651760"/>
           </a:xfrm>
           <a:prstGeom prst="roundRect">
             <a:avLst>
-              <a:gd name="adj" fmla="val 2116"/>
+              <a:gd name="adj" fmla="val 2759"/>
             </a:avLst>
           </a:prstGeom>
           <a:solidFill>
@@ -2414,115 +3906,90 @@
       </p:sp>
       <p:sp>
         <p:nvSpPr>
-          <p:cNvPr id="8" name="Problem 2 mark"/>
+          <p:cNvPr id="7" name="Ask 2 heading"/>
+          <p:cNvSpPr txBox="1"/>
+          <p:nvPr/>
+        </p:nvSpPr>
+        <p:spPr>
+          <a:xfrm>
+            <a:off x="4690872" y="2057400"/>
+            <a:ext cx="2834640" cy="731520"/>
+          </a:xfrm>
+          <a:prstGeom prst="rect">
+            <a:avLst/>
+          </a:prstGeom>
+          <a:noFill/>
+          <a:ln/>
+        </p:spPr>
+        <p:txBody>
+          <a:bodyPr wrap="square" lIns="0" tIns="0" rIns="0" bIns="0" rtlCol="0" anchor="t"/>
+          <a:lstStyle/>
+          <a:p>
+            <a:pPr indent="0" marL="0">
+              <a:buNone/>
+            </a:pPr>
+            <a:r>
+              <a:rPr lang="en-US" sz="3000" b="1" dirty="0">
+                <a:solidFill>
+                  <a:schemeClr val="accent1"/>
+                </a:solidFill>
+              </a:rPr>
+              <a:t>One cycle</a:t>
+            </a:r>
+            <a:endParaRPr lang="en-US" sz="3000" dirty="0"/>
+          </a:p>
+        </p:txBody>
+      </p:sp>
+      <p:sp>
+        <p:nvSpPr>
+          <p:cNvPr id="8" name="Ask 2 text"/>
+          <p:cNvSpPr txBox="1"/>
+          <p:nvPr/>
+        </p:nvSpPr>
+        <p:spPr>
+          <a:xfrm>
+            <a:off x="4690872" y="2880360"/>
+            <a:ext cx="2834640" cy="1280160"/>
+          </a:xfrm>
+          <a:prstGeom prst="rect">
+            <a:avLst/>
+          </a:prstGeom>
+          <a:noFill/>
+          <a:ln/>
+        </p:spPr>
+        <p:txBody>
+          <a:bodyPr wrap="square" lIns="0" tIns="0" rIns="0" bIns="0" rtlCol="0" anchor="t"/>
+          <a:lstStyle/>
+          <a:p>
+            <a:pPr indent="0" marL="0">
+              <a:buNone/>
+            </a:pPr>
+            <a:r>
+              <a:rPr lang="en-US" sz="1600" dirty="0">
+                <a:solidFill>
+                  <a:schemeClr val="tx1"/>
+                </a:solidFill>
+              </a:rPr>
+              <a:t>Owners check in weekly. The review runs from a published Report.</a:t>
+            </a:r>
+            <a:endParaRPr lang="en-US" sz="1600" dirty="0"/>
+          </a:p>
+        </p:txBody>
+      </p:sp>
+      <p:sp>
+        <p:nvSpPr>
+          <p:cNvPr id="9" name="Ask 3 card"/>
           <p:cNvSpPr/>
           <p:nvPr/>
         </p:nvSpPr>
         <p:spPr>
           <a:xfrm>
-            <a:off x="4690872" y="2103120"/>
-            <a:ext cx="384048" cy="384048"/>
-          </a:xfrm>
-          <a:prstGeom prst="triangle">
-            <a:avLst/>
-          </a:prstGeom>
-          <a:solidFill>
-            <a:schemeClr val="accent3"/>
-          </a:solidFill>
-          <a:ln w="12700">
-            <a:solidFill>
-              <a:schemeClr val="accent3"/>
-            </a:solidFill>
-            <a:prstDash val="solid"/>
-          </a:ln>
-        </p:spPr>
-      </p:sp>
-      <p:sp>
-        <p:nvSpPr>
-          <p:cNvPr id="9" name="Problem 2 heading"/>
-          <p:cNvSpPr txBox="1"/>
-          <p:nvPr/>
-        </p:nvSpPr>
-        <p:spPr>
-          <a:xfrm>
-            <a:off x="4690872" y="2788920"/>
-            <a:ext cx="2834640" cy="731520"/>
-          </a:xfrm>
-          <a:prstGeom prst="rect">
-            <a:avLst/>
-          </a:prstGeom>
-          <a:noFill/>
-          <a:ln/>
-        </p:spPr>
-        <p:txBody>
-          <a:bodyPr wrap="square" lIns="0" tIns="0" rIns="0" bIns="0" rtlCol="0" anchor="t"/>
-          <a:lstStyle/>
-          <a:p>
-            <a:pPr indent="0" marL="0">
-              <a:buNone/>
-            </a:pPr>
-            <a:r>
-              <a:rPr lang="en-US" sz="2200" b="1" dirty="0">
-                <a:solidFill>
-                  <a:schemeClr val="tx1"/>
-                </a:solidFill>
-              </a:rPr>
-              <a:t>Reviews run on retyped status</a:t>
-            </a:r>
-            <a:endParaRPr lang="en-US" sz="2200" dirty="0"/>
-          </a:p>
-        </p:txBody>
-      </p:sp>
-      <p:sp>
-        <p:nvSpPr>
-          <p:cNvPr id="10" name="Problem 2 text"/>
-          <p:cNvSpPr txBox="1"/>
-          <p:nvPr/>
-        </p:nvSpPr>
-        <p:spPr>
-          <a:xfrm>
-            <a:off x="4690872" y="3611880"/>
-            <a:ext cx="2834640" cy="1463040"/>
-          </a:xfrm>
-          <a:prstGeom prst="rect">
-            <a:avLst/>
-          </a:prstGeom>
-          <a:noFill/>
-          <a:ln/>
-        </p:spPr>
-        <p:txBody>
-          <a:bodyPr wrap="square" lIns="0" tIns="0" rIns="0" bIns="0" rtlCol="0" anchor="t"/>
-          <a:lstStyle/>
-          <a:p>
-            <a:pPr indent="0" marL="0">
-              <a:buNone/>
-            </a:pPr>
-            <a:r>
-              <a:rPr lang="en-US" sz="1500" dirty="0">
-                <a:solidFill>
-                  <a:schemeClr val="accent5"/>
-                </a:solidFill>
-              </a:rPr>
-              <a:t>Each review is assembled by hand from docs, slides and chat. The work goes into collecting, not reading.</a:t>
-            </a:r>
-            <a:endParaRPr lang="en-US" sz="1500" dirty="0"/>
-          </a:p>
-        </p:txBody>
-      </p:sp>
-      <p:sp>
-        <p:nvSpPr>
-          <p:cNvPr id="11" name="Problem 3 card"/>
-          <p:cNvSpPr/>
-          <p:nvPr/>
-        </p:nvSpPr>
-        <p:spPr>
-          <a:xfrm>
             <a:off x="8193024" y="1737360"/>
-            <a:ext cx="3456432" cy="3566160"/>
+            <a:ext cx="3456432" cy="2651760"/>
           </a:xfrm>
           <a:prstGeom prst="roundRect">
             <a:avLst>
-              <a:gd name="adj" fmla="val 2116"/>
+              <a:gd name="adj" fmla="val 2759"/>
             </a:avLst>
           </a:prstGeom>
           <a:solidFill>
@@ -2538,38 +4005,13 @@
       </p:sp>
       <p:sp>
         <p:nvSpPr>
-          <p:cNvPr id="12" name="Problem 3 mark"/>
-          <p:cNvSpPr/>
-          <p:nvPr/>
-        </p:nvSpPr>
-        <p:spPr>
-          <a:xfrm>
-            <a:off x="8513064" y="2103120"/>
-            <a:ext cx="384048" cy="384048"/>
-          </a:xfrm>
-          <a:prstGeom prst="rect">
-            <a:avLst/>
-          </a:prstGeom>
-          <a:solidFill>
-            <a:schemeClr val="accent2"/>
-          </a:solidFill>
-          <a:ln w="12700">
-            <a:solidFill>
-              <a:schemeClr val="accent2"/>
-            </a:solidFill>
-            <a:prstDash val="solid"/>
-          </a:ln>
-        </p:spPr>
-      </p:sp>
-      <p:sp>
-        <p:nvSpPr>
-          <p:cNvPr id="13" name="Problem 3 heading"/>
-          <p:cNvSpPr txBox="1"/>
-          <p:nvPr/>
-        </p:nvSpPr>
-        <p:spPr>
-          <a:xfrm>
-            <a:off x="8513064" y="2788920"/>
+          <p:cNvPr id="10" name="Ask 3 heading"/>
+          <p:cNvSpPr txBox="1"/>
+          <p:nvPr/>
+        </p:nvSpPr>
+        <p:spPr>
+          <a:xfrm>
+            <a:off x="8513064" y="2057400"/>
             <a:ext cx="2834640" cy="731520"/>
           </a:xfrm>
           <a:prstGeom prst="rect">
@@ -2586,27 +4028,63 @@
               <a:buNone/>
             </a:pPr>
             <a:r>
-              <a:rPr lang="en-US" sz="2200" b="1" dirty="0">
+              <a:rPr lang="en-US" sz="3000" b="1" dirty="0">
+                <a:solidFill>
+                  <a:schemeClr val="accent1"/>
+                </a:solidFill>
+              </a:rPr>
+              <a:t>One decision</a:t>
+            </a:r>
+            <a:endParaRPr lang="en-US" sz="3000" dirty="0"/>
+          </a:p>
+        </p:txBody>
+      </p:sp>
+      <p:sp>
+        <p:nvSpPr>
+          <p:cNvPr id="11" name="Ask 3 text"/>
+          <p:cNvSpPr txBox="1"/>
+          <p:nvPr/>
+        </p:nvSpPr>
+        <p:spPr>
+          <a:xfrm>
+            <a:off x="8513064" y="2880360"/>
+            <a:ext cx="2834640" cy="1280160"/>
+          </a:xfrm>
+          <a:prstGeom prst="rect">
+            <a:avLst/>
+          </a:prstGeom>
+          <a:noFill/>
+          <a:ln/>
+        </p:spPr>
+        <p:txBody>
+          <a:bodyPr wrap="square" lIns="0" tIns="0" rIns="0" bIns="0" rtlCol="0" anchor="t"/>
+          <a:lstStyle/>
+          <a:p>
+            <a:pPr indent="0" marL="0">
+              <a:buNone/>
+            </a:pPr>
+            <a:r>
+              <a:rPr lang="en-US" sz="1600" dirty="0">
                 <a:solidFill>
                   <a:schemeClr val="tx1"/>
                 </a:solidFill>
               </a:rPr>
-              <a:t>Bad news arrives without a plan</a:t>
-            </a:r>
-            <a:endParaRPr lang="en-US" sz="2200" dirty="0"/>
-          </a:p>
-        </p:txBody>
-      </p:sp>
-      <p:sp>
-        <p:nvSpPr>
-          <p:cNvPr id="14" name="Problem 3 text"/>
-          <p:cNvSpPr txBox="1"/>
-          <p:nvPr/>
-        </p:nvSpPr>
-        <p:spPr>
-          <a:xfrm>
-            <a:off x="8513064" y="3611880"/>
-            <a:ext cx="2834640" cy="1463040"/>
+              <a:t>At the end we expand it, extend the pilot, or stop.</a:t>
+            </a:r>
+            <a:endParaRPr lang="en-US" sz="1600" dirty="0"/>
+          </a:p>
+        </p:txBody>
+      </p:sp>
+      <p:sp>
+        <p:nvSpPr>
+          <p:cNvPr id="12" name="Roadmap"/>
+          <p:cNvSpPr txBox="1"/>
+          <p:nvPr/>
+        </p:nvSpPr>
+        <p:spPr>
+          <a:xfrm>
+            <a:off x="548640" y="4846320"/>
+            <a:ext cx="11064240" cy="731520"/>
           </a:xfrm>
           <a:prstGeom prst="rect">
             <a:avLst/>
@@ -2622,48 +4100,12 @@
               <a:buNone/>
             </a:pPr>
             <a:r>
-              <a:rPr lang="en-US" sz="1500" dirty="0">
-                <a:solidFill>
-                  <a:schemeClr val="accent5"/>
-                </a:solidFill>
-              </a:rPr>
-              <a:t>A Red status says something is wrong. It rarely says what the owner will do, or by when.</a:t>
-            </a:r>
-            <a:endParaRPr lang="en-US" sz="1500" dirty="0"/>
-          </a:p>
-        </p:txBody>
-      </p:sp>
-      <p:sp>
-        <p:nvSpPr>
-          <p:cNvPr id="15" name="Takeaway"/>
-          <p:cNvSpPr txBox="1"/>
-          <p:nvPr/>
-        </p:nvSpPr>
-        <p:spPr>
-          <a:xfrm>
-            <a:off x="548640" y="5532120"/>
-            <a:ext cx="11064240" cy="457200"/>
-          </a:xfrm>
-          <a:prstGeom prst="rect">
-            <a:avLst/>
-          </a:prstGeom>
-          <a:noFill/>
-          <a:ln/>
-        </p:spPr>
-        <p:txBody>
-          <a:bodyPr wrap="square" lIns="0" tIns="0" rIns="0" bIns="0" rtlCol="0" anchor="ctr"/>
-          <a:lstStyle/>
-          <a:p>
-            <a:pPr indent="0" marL="0">
-              <a:buNone/>
-            </a:pPr>
-            <a:r>
               <a:rPr lang="en-US" sz="1600" i="1" dirty="0">
                 <a:solidFill>
                   <a:schemeClr val="tx2"/>
                 </a:solidFill>
               </a:rPr>
-              <a:t>Goal Tracker is built around one question: does this make trouble easier to find, or harder to hide?</a:t>
+              <a:t>The rest of this deck: why the status deck falls short, what the product does, what is ready, and how we would judge the pilot.</a:t>
             </a:r>
             <a:endParaRPr lang="en-US" sz="1600" dirty="0"/>
           </a:p>
@@ -2771,7 +4213,7 @@
                   <a:schemeClr val="tx2"/>
                 </a:solidFill>
               </a:rPr>
-              <a:t>One mechanism, from weekly update to review</a:t>
+              <a:t>Trouble surfaces at the review, or after it</a:t>
             </a:r>
             <a:endParaRPr lang="en-US" sz="3600" dirty="0"/>
           </a:p>
@@ -2779,465 +4221,18 @@
       </p:sp>
       <p:sp>
         <p:nvSpPr>
-          <p:cNvPr id="3" name="Step 1 circle"/>
+          <p:cNvPr id="3" name="Problem 1 card"/>
           <p:cNvSpPr/>
           <p:nvPr/>
         </p:nvSpPr>
         <p:spPr>
           <a:xfrm>
-            <a:off x="548640" y="1783080"/>
-            <a:ext cx="731520" cy="731520"/>
-          </a:xfrm>
-          <a:prstGeom prst="ellipse">
-            <a:avLst/>
-          </a:prstGeom>
-          <a:solidFill>
-            <a:schemeClr val="accent1"/>
-          </a:solidFill>
-          <a:ln w="12700">
-            <a:solidFill>
-              <a:schemeClr val="accent1"/>
-            </a:solidFill>
-            <a:prstDash val="solid"/>
-          </a:ln>
-        </p:spPr>
-      </p:sp>
-      <p:sp>
-        <p:nvSpPr>
-          <p:cNvPr id="4" name="Step 1 number"/>
-          <p:cNvSpPr txBox="1"/>
-          <p:nvPr/>
-        </p:nvSpPr>
-        <p:spPr>
-          <a:xfrm>
-            <a:off x="548640" y="1783080"/>
-            <a:ext cx="731520" cy="731520"/>
-          </a:xfrm>
-          <a:prstGeom prst="rect">
-            <a:avLst/>
-          </a:prstGeom>
-          <a:noFill/>
-          <a:ln/>
-        </p:spPr>
-        <p:txBody>
-          <a:bodyPr wrap="square" lIns="0" tIns="0" rIns="0" bIns="0" rtlCol="0" anchor="ctr"/>
-          <a:lstStyle/>
-          <a:p>
-            <a:pPr algn="ctr" indent="0" marL="0">
-              <a:buNone/>
-            </a:pPr>
-            <a:r>
-              <a:rPr lang="en-US" sz="2800" b="1" dirty="0">
-                <a:solidFill>
-                  <a:schemeClr val="bg1"/>
-                </a:solidFill>
-              </a:rPr>
-              <a:t>1</a:t>
-            </a:r>
-            <a:endParaRPr lang="en-US" sz="2800" dirty="0"/>
-          </a:p>
-        </p:txBody>
-      </p:sp>
-      <p:sp>
-        <p:nvSpPr>
-          <p:cNvPr id="5" name="Arrow 1"/>
-          <p:cNvSpPr/>
-          <p:nvPr/>
-        </p:nvSpPr>
-        <p:spPr>
-          <a:xfrm>
-            <a:off x="1463040" y="2148840"/>
-            <a:ext cx="2724912" cy="0"/>
-          </a:xfrm>
-          <a:prstGeom prst="line">
-            <a:avLst/>
-          </a:prstGeom>
-          <a:noFill/>
-          <a:ln w="25400">
-            <a:solidFill>
-              <a:schemeClr val="accent6"/>
-            </a:solidFill>
-            <a:prstDash val="solid"/>
-            <a:tailEnd type="triangle"/>
-          </a:ln>
-        </p:spPr>
-      </p:sp>
-      <p:sp>
-        <p:nvSpPr>
-          <p:cNvPr id="6" name="Step 1 heading"/>
-          <p:cNvSpPr txBox="1"/>
-          <p:nvPr/>
-        </p:nvSpPr>
-        <p:spPr>
-          <a:xfrm>
-            <a:off x="548640" y="2743200"/>
-            <a:ext cx="3291840" cy="731520"/>
-          </a:xfrm>
-          <a:prstGeom prst="rect">
-            <a:avLst/>
-          </a:prstGeom>
-          <a:noFill/>
-          <a:ln/>
-        </p:spPr>
-        <p:txBody>
-          <a:bodyPr wrap="square" lIns="0" tIns="0" rIns="0" bIns="0" rtlCol="0" anchor="t"/>
-          <a:lstStyle/>
-          <a:p>
-            <a:pPr indent="0" marL="0">
-              <a:buNone/>
-            </a:pPr>
-            <a:r>
-              <a:rPr lang="en-US" sz="2200" b="1" dirty="0">
-                <a:solidFill>
-                  <a:schemeClr val="tx1"/>
-                </a:solidFill>
-              </a:rPr>
-              <a:t>Owners check in weekly</a:t>
-            </a:r>
-            <a:endParaRPr lang="en-US" sz="2200" dirty="0"/>
-          </a:p>
-        </p:txBody>
-      </p:sp>
-      <p:sp>
-        <p:nvSpPr>
-          <p:cNvPr id="7" name="Step 1 text"/>
-          <p:cNvSpPr txBox="1"/>
-          <p:nvPr/>
-        </p:nvSpPr>
-        <p:spPr>
-          <a:xfrm>
-            <a:off x="548640" y="3520440"/>
-            <a:ext cx="3291840" cy="1188720"/>
-          </a:xfrm>
-          <a:prstGeom prst="rect">
-            <a:avLst/>
-          </a:prstGeom>
-          <a:noFill/>
-          <a:ln/>
-        </p:spPr>
-        <p:txBody>
-          <a:bodyPr wrap="square" lIns="0" tIns="0" rIns="0" bIns="0" rtlCol="0" anchor="t"/>
-          <a:lstStyle/>
-          <a:p>
-            <a:pPr indent="0" marL="0">
-              <a:buNone/>
-            </a:pPr>
-            <a:r>
-              <a:rPr lang="en-US" sz="1500" dirty="0">
-                <a:solidFill>
-                  <a:schemeClr val="accent5"/>
-                </a:solidFill>
-              </a:rPr>
-              <a:t>Health, a short status, and any date changes. A routine week is one click: No change.</a:t>
-            </a:r>
-            <a:endParaRPr lang="en-US" sz="1500" dirty="0"/>
-          </a:p>
-        </p:txBody>
-      </p:sp>
-      <p:sp>
-        <p:nvSpPr>
-          <p:cNvPr id="8" name="Step 2 circle"/>
-          <p:cNvSpPr/>
-          <p:nvPr/>
-        </p:nvSpPr>
-        <p:spPr>
-          <a:xfrm>
-            <a:off x="4370832" y="1783080"/>
-            <a:ext cx="731520" cy="731520"/>
-          </a:xfrm>
-          <a:prstGeom prst="ellipse">
-            <a:avLst/>
-          </a:prstGeom>
-          <a:solidFill>
-            <a:schemeClr val="accent1"/>
-          </a:solidFill>
-          <a:ln w="12700">
-            <a:solidFill>
-              <a:schemeClr val="accent1"/>
-            </a:solidFill>
-            <a:prstDash val="solid"/>
-          </a:ln>
-        </p:spPr>
-      </p:sp>
-      <p:sp>
-        <p:nvSpPr>
-          <p:cNvPr id="9" name="Step 2 number"/>
-          <p:cNvSpPr txBox="1"/>
-          <p:nvPr/>
-        </p:nvSpPr>
-        <p:spPr>
-          <a:xfrm>
-            <a:off x="4370832" y="1783080"/>
-            <a:ext cx="731520" cy="731520"/>
-          </a:xfrm>
-          <a:prstGeom prst="rect">
-            <a:avLst/>
-          </a:prstGeom>
-          <a:noFill/>
-          <a:ln/>
-        </p:spPr>
-        <p:txBody>
-          <a:bodyPr wrap="square" lIns="0" tIns="0" rIns="0" bIns="0" rtlCol="0" anchor="ctr"/>
-          <a:lstStyle/>
-          <a:p>
-            <a:pPr algn="ctr" indent="0" marL="0">
-              <a:buNone/>
-            </a:pPr>
-            <a:r>
-              <a:rPr lang="en-US" sz="2800" b="1" dirty="0">
-                <a:solidFill>
-                  <a:schemeClr val="bg1"/>
-                </a:solidFill>
-              </a:rPr>
-              <a:t>2</a:t>
-            </a:r>
-            <a:endParaRPr lang="en-US" sz="2800" dirty="0"/>
-          </a:p>
-        </p:txBody>
-      </p:sp>
-      <p:sp>
-        <p:nvSpPr>
-          <p:cNvPr id="10" name="Arrow 2"/>
-          <p:cNvSpPr/>
-          <p:nvPr/>
-        </p:nvSpPr>
-        <p:spPr>
-          <a:xfrm>
-            <a:off x="5285232" y="2148840"/>
-            <a:ext cx="2724912" cy="0"/>
-          </a:xfrm>
-          <a:prstGeom prst="line">
-            <a:avLst/>
-          </a:prstGeom>
-          <a:noFill/>
-          <a:ln w="25400">
-            <a:solidFill>
-              <a:schemeClr val="accent6"/>
-            </a:solidFill>
-            <a:prstDash val="solid"/>
-            <a:tailEnd type="triangle"/>
-          </a:ln>
-        </p:spPr>
-      </p:sp>
-      <p:sp>
-        <p:nvSpPr>
-          <p:cNvPr id="11" name="Step 2 heading"/>
-          <p:cNvSpPr txBox="1"/>
-          <p:nvPr/>
-        </p:nvSpPr>
-        <p:spPr>
-          <a:xfrm>
-            <a:off x="4370832" y="2743200"/>
-            <a:ext cx="3291840" cy="731520"/>
-          </a:xfrm>
-          <a:prstGeom prst="rect">
-            <a:avLst/>
-          </a:prstGeom>
-          <a:noFill/>
-          <a:ln/>
-        </p:spPr>
-        <p:txBody>
-          <a:bodyPr wrap="square" lIns="0" tIns="0" rIns="0" bIns="0" rtlCol="0" anchor="t"/>
-          <a:lstStyle/>
-          <a:p>
-            <a:pPr indent="0" marL="0">
-              <a:buNone/>
-            </a:pPr>
-            <a:r>
-              <a:rPr lang="en-US" sz="2200" b="1" dirty="0">
-                <a:solidFill>
-                  <a:schemeClr val="tx1"/>
-                </a:solidFill>
-              </a:rPr>
-              <a:t>Risks flags what needs attention</a:t>
-            </a:r>
-            <a:endParaRPr lang="en-US" sz="2200" dirty="0"/>
-          </a:p>
-        </p:txBody>
-      </p:sp>
-      <p:sp>
-        <p:nvSpPr>
-          <p:cNvPr id="12" name="Step 2 text"/>
-          <p:cNvSpPr txBox="1"/>
-          <p:nvPr/>
-        </p:nvSpPr>
-        <p:spPr>
-          <a:xfrm>
-            <a:off x="4370832" y="3520440"/>
-            <a:ext cx="3291840" cy="1188720"/>
-          </a:xfrm>
-          <a:prstGeom prst="rect">
-            <a:avLst/>
-          </a:prstGeom>
-          <a:noFill/>
-          <a:ln/>
-        </p:spPr>
-        <p:txBody>
-          <a:bodyPr wrap="square" lIns="0" tIns="0" rIns="0" bIns="0" rtlCol="0" anchor="t"/>
-          <a:lstStyle/>
-          <a:p>
-            <a:pPr indent="0" marL="0">
-              <a:buNone/>
-            </a:pPr>
-            <a:r>
-              <a:rPr lang="en-US" sz="1500" dirty="0">
-                <a:solidFill>
-                  <a:schemeClr val="accent5"/>
-                </a:solidFill>
-              </a:rPr>
-              <a:t>Red, Stale, unaligned and conflicting goals, grouped by who has to act, each with one fix.</a:t>
-            </a:r>
-            <a:endParaRPr lang="en-US" sz="1500" dirty="0"/>
-          </a:p>
-        </p:txBody>
-      </p:sp>
-      <p:sp>
-        <p:nvSpPr>
-          <p:cNvPr id="13" name="Step 3 circle"/>
-          <p:cNvSpPr/>
-          <p:nvPr/>
-        </p:nvSpPr>
-        <p:spPr>
-          <a:xfrm>
-            <a:off x="8193024" y="1783080"/>
-            <a:ext cx="731520" cy="731520"/>
-          </a:xfrm>
-          <a:prstGeom prst="ellipse">
-            <a:avLst/>
-          </a:prstGeom>
-          <a:solidFill>
-            <a:schemeClr val="accent1"/>
-          </a:solidFill>
-          <a:ln w="12700">
-            <a:solidFill>
-              <a:schemeClr val="accent1"/>
-            </a:solidFill>
-            <a:prstDash val="solid"/>
-          </a:ln>
-        </p:spPr>
-      </p:sp>
-      <p:sp>
-        <p:nvSpPr>
-          <p:cNvPr id="14" name="Step 3 number"/>
-          <p:cNvSpPr txBox="1"/>
-          <p:nvPr/>
-        </p:nvSpPr>
-        <p:spPr>
-          <a:xfrm>
-            <a:off x="8193024" y="1783080"/>
-            <a:ext cx="731520" cy="731520"/>
-          </a:xfrm>
-          <a:prstGeom prst="rect">
-            <a:avLst/>
-          </a:prstGeom>
-          <a:noFill/>
-          <a:ln/>
-        </p:spPr>
-        <p:txBody>
-          <a:bodyPr wrap="square" lIns="0" tIns="0" rIns="0" bIns="0" rtlCol="0" anchor="ctr"/>
-          <a:lstStyle/>
-          <a:p>
-            <a:pPr algn="ctr" indent="0" marL="0">
-              <a:buNone/>
-            </a:pPr>
-            <a:r>
-              <a:rPr lang="en-US" sz="2800" b="1" dirty="0">
-                <a:solidFill>
-                  <a:schemeClr val="bg1"/>
-                </a:solidFill>
-              </a:rPr>
-              <a:t>3</a:t>
-            </a:r>
-            <a:endParaRPr lang="en-US" sz="2800" dirty="0"/>
-          </a:p>
-        </p:txBody>
-      </p:sp>
-      <p:sp>
-        <p:nvSpPr>
-          <p:cNvPr id="15" name="Step 3 heading"/>
-          <p:cNvSpPr txBox="1"/>
-          <p:nvPr/>
-        </p:nvSpPr>
-        <p:spPr>
-          <a:xfrm>
-            <a:off x="8193024" y="2743200"/>
-            <a:ext cx="3291840" cy="731520"/>
-          </a:xfrm>
-          <a:prstGeom prst="rect">
-            <a:avLst/>
-          </a:prstGeom>
-          <a:noFill/>
-          <a:ln/>
-        </p:spPr>
-        <p:txBody>
-          <a:bodyPr wrap="square" lIns="0" tIns="0" rIns="0" bIns="0" rtlCol="0" anchor="t"/>
-          <a:lstStyle/>
-          <a:p>
-            <a:pPr indent="0" marL="0">
-              <a:buNone/>
-            </a:pPr>
-            <a:r>
-              <a:rPr lang="en-US" sz="2200" b="1" dirty="0">
-                <a:solidFill>
-                  <a:schemeClr val="tx1"/>
-                </a:solidFill>
-              </a:rPr>
-              <a:t>The Report writes itself</a:t>
-            </a:r>
-            <a:endParaRPr lang="en-US" sz="2200" dirty="0"/>
-          </a:p>
-        </p:txBody>
-      </p:sp>
-      <p:sp>
-        <p:nvSpPr>
-          <p:cNvPr id="16" name="Step 3 text"/>
-          <p:cNvSpPr txBox="1"/>
-          <p:nvPr/>
-        </p:nvSpPr>
-        <p:spPr>
-          <a:xfrm>
-            <a:off x="8193024" y="3520440"/>
-            <a:ext cx="3291840" cy="1188720"/>
-          </a:xfrm>
-          <a:prstGeom prst="rect">
-            <a:avLst/>
-          </a:prstGeom>
-          <a:noFill/>
-          <a:ln/>
-        </p:spPr>
-        <p:txBody>
-          <a:bodyPr wrap="square" lIns="0" tIns="0" rIns="0" bIns="0" rtlCol="0" anchor="t"/>
-          <a:lstStyle/>
-          <a:p>
-            <a:pPr indent="0" marL="0">
-              <a:buNone/>
-            </a:pPr>
-            <a:r>
-              <a:rPr lang="en-US" sz="1500" dirty="0">
-                <a:solidFill>
-                  <a:schemeClr val="accent5"/>
-                </a:solidFill>
-              </a:rPr>
-              <a:t>Exceptions in full, on-track goals in one line each, with what changed since the last review.</a:t>
-            </a:r>
-            <a:endParaRPr lang="en-US" sz="1500" dirty="0"/>
-          </a:p>
-        </p:txBody>
-      </p:sp>
-      <p:sp>
-        <p:nvSpPr>
-          <p:cNvPr id="17" name="Positioning band"/>
-          <p:cNvSpPr/>
-          <p:nvPr/>
-        </p:nvSpPr>
-        <p:spPr>
-          <a:xfrm>
-            <a:off x="548640" y="4983480"/>
-            <a:ext cx="11091672" cy="1005840"/>
+            <a:off x="548640" y="1737360"/>
+            <a:ext cx="3456432" cy="3566160"/>
           </a:xfrm>
           <a:prstGeom prst="roundRect">
             <a:avLst>
-              <a:gd name="adj" fmla="val 7273"/>
+              <a:gd name="adj" fmla="val 2116"/>
             </a:avLst>
           </a:prstGeom>
           <a:solidFill>
@@ -3253,14 +4248,359 @@
       </p:sp>
       <p:sp>
         <p:nvSpPr>
-          <p:cNvPr id="18" name="Positioning text"/>
-          <p:cNvSpPr txBox="1"/>
-          <p:nvPr/>
-        </p:nvSpPr>
-        <p:spPr>
-          <a:xfrm>
-            <a:off x="822960" y="4983480"/>
-            <a:ext cx="10515600" cy="1005840"/>
+          <p:cNvPr id="4" name="Problem 1 mark"/>
+          <p:cNvSpPr/>
+          <p:nvPr/>
+        </p:nvSpPr>
+        <p:spPr>
+          <a:xfrm>
+            <a:off x="868680" y="2103120"/>
+            <a:ext cx="384048" cy="384048"/>
+          </a:xfrm>
+          <a:prstGeom prst="rect">
+            <a:avLst/>
+          </a:prstGeom>
+          <a:solidFill>
+            <a:schemeClr val="accent5"/>
+          </a:solidFill>
+          <a:ln w="12700">
+            <a:solidFill>
+              <a:schemeClr val="accent5"/>
+            </a:solidFill>
+            <a:prstDash val="solid"/>
+          </a:ln>
+        </p:spPr>
+      </p:sp>
+      <p:sp>
+        <p:nvSpPr>
+          <p:cNvPr id="5" name="Problem 1 heading"/>
+          <p:cNvSpPr txBox="1"/>
+          <p:nvPr/>
+        </p:nvSpPr>
+        <p:spPr>
+          <a:xfrm>
+            <a:off x="868680" y="2788920"/>
+            <a:ext cx="2834640" cy="731520"/>
+          </a:xfrm>
+          <a:prstGeom prst="rect">
+            <a:avLst/>
+          </a:prstGeom>
+          <a:noFill/>
+          <a:ln/>
+        </p:spPr>
+        <p:txBody>
+          <a:bodyPr wrap="square" lIns="0" tIns="0" rIns="0" bIns="0" rtlCol="0" anchor="t"/>
+          <a:lstStyle/>
+          <a:p>
+            <a:pPr indent="0" marL="0">
+              <a:buNone/>
+            </a:pPr>
+            <a:r>
+              <a:rPr lang="en-US" sz="2200" b="1" dirty="0">
+                <a:solidFill>
+                  <a:schemeClr val="tx1"/>
+                </a:solidFill>
+              </a:rPr>
+              <a:t>Silence looks like Green</a:t>
+            </a:r>
+            <a:endParaRPr lang="en-US" sz="2200" dirty="0"/>
+          </a:p>
+        </p:txBody>
+      </p:sp>
+      <p:sp>
+        <p:nvSpPr>
+          <p:cNvPr id="6" name="Problem 1 text"/>
+          <p:cNvSpPr txBox="1"/>
+          <p:nvPr/>
+        </p:nvSpPr>
+        <p:spPr>
+          <a:xfrm>
+            <a:off x="868680" y="3611880"/>
+            <a:ext cx="2834640" cy="1463040"/>
+          </a:xfrm>
+          <a:prstGeom prst="rect">
+            <a:avLst/>
+          </a:prstGeom>
+          <a:noFill/>
+          <a:ln/>
+        </p:spPr>
+        <p:txBody>
+          <a:bodyPr wrap="square" lIns="0" tIns="0" rIns="0" bIns="0" rtlCol="0" anchor="t"/>
+          <a:lstStyle/>
+          <a:p>
+            <a:pPr indent="0" marL="0">
+              <a:buNone/>
+            </a:pPr>
+            <a:r>
+              <a:rPr lang="en-US" sz="1500" dirty="0">
+                <a:solidFill>
+                  <a:schemeClr val="accent5"/>
+                </a:solidFill>
+              </a:rPr>
+              <a:t>A goal nobody has updated keeps the colour it had last time. Nothing flags it.</a:t>
+            </a:r>
+            <a:endParaRPr lang="en-US" sz="1500" dirty="0"/>
+          </a:p>
+        </p:txBody>
+      </p:sp>
+      <p:sp>
+        <p:nvSpPr>
+          <p:cNvPr id="7" name="Problem 2 card"/>
+          <p:cNvSpPr/>
+          <p:nvPr/>
+        </p:nvSpPr>
+        <p:spPr>
+          <a:xfrm>
+            <a:off x="4370832" y="1737360"/>
+            <a:ext cx="3456432" cy="3566160"/>
+          </a:xfrm>
+          <a:prstGeom prst="roundRect">
+            <a:avLst>
+              <a:gd name="adj" fmla="val 2116"/>
+            </a:avLst>
+          </a:prstGeom>
+          <a:solidFill>
+            <a:schemeClr val="bg2"/>
+          </a:solidFill>
+          <a:ln w="12700">
+            <a:solidFill>
+              <a:schemeClr val="bg2"/>
+            </a:solidFill>
+            <a:prstDash val="solid"/>
+          </a:ln>
+        </p:spPr>
+      </p:sp>
+      <p:sp>
+        <p:nvSpPr>
+          <p:cNvPr id="8" name="Problem 2 mark"/>
+          <p:cNvSpPr/>
+          <p:nvPr/>
+        </p:nvSpPr>
+        <p:spPr>
+          <a:xfrm>
+            <a:off x="4690872" y="2103120"/>
+            <a:ext cx="384048" cy="384048"/>
+          </a:xfrm>
+          <a:prstGeom prst="triangle">
+            <a:avLst/>
+          </a:prstGeom>
+          <a:solidFill>
+            <a:schemeClr val="accent3"/>
+          </a:solidFill>
+          <a:ln w="12700">
+            <a:solidFill>
+              <a:schemeClr val="accent3"/>
+            </a:solidFill>
+            <a:prstDash val="solid"/>
+          </a:ln>
+        </p:spPr>
+      </p:sp>
+      <p:sp>
+        <p:nvSpPr>
+          <p:cNvPr id="9" name="Problem 2 heading"/>
+          <p:cNvSpPr txBox="1"/>
+          <p:nvPr/>
+        </p:nvSpPr>
+        <p:spPr>
+          <a:xfrm>
+            <a:off x="4690872" y="2788920"/>
+            <a:ext cx="2834640" cy="731520"/>
+          </a:xfrm>
+          <a:prstGeom prst="rect">
+            <a:avLst/>
+          </a:prstGeom>
+          <a:noFill/>
+          <a:ln/>
+        </p:spPr>
+        <p:txBody>
+          <a:bodyPr wrap="square" lIns="0" tIns="0" rIns="0" bIns="0" rtlCol="0" anchor="t"/>
+          <a:lstStyle/>
+          <a:p>
+            <a:pPr indent="0" marL="0">
+              <a:buNone/>
+            </a:pPr>
+            <a:r>
+              <a:rPr lang="en-US" sz="2200" b="1" dirty="0">
+                <a:solidFill>
+                  <a:schemeClr val="tx1"/>
+                </a:solidFill>
+              </a:rPr>
+              <a:t>The deck is rebuilt by hand</a:t>
+            </a:r>
+            <a:endParaRPr lang="en-US" sz="2200" dirty="0"/>
+          </a:p>
+        </p:txBody>
+      </p:sp>
+      <p:sp>
+        <p:nvSpPr>
+          <p:cNvPr id="10" name="Problem 2 text"/>
+          <p:cNvSpPr txBox="1"/>
+          <p:nvPr/>
+        </p:nvSpPr>
+        <p:spPr>
+          <a:xfrm>
+            <a:off x="4690872" y="3611880"/>
+            <a:ext cx="2834640" cy="1463040"/>
+          </a:xfrm>
+          <a:prstGeom prst="rect">
+            <a:avLst/>
+          </a:prstGeom>
+          <a:noFill/>
+          <a:ln/>
+        </p:spPr>
+        <p:txBody>
+          <a:bodyPr wrap="square" lIns="0" tIns="0" rIns="0" bIns="0" rtlCol="0" anchor="t"/>
+          <a:lstStyle/>
+          <a:p>
+            <a:pPr indent="0" marL="0">
+              <a:buNone/>
+            </a:pPr>
+            <a:r>
+              <a:rPr lang="en-US" sz="1500" dirty="0">
+                <a:solidFill>
+                  <a:schemeClr val="accent5"/>
+                </a:solidFill>
+              </a:rPr>
+              <a:t>Each review, status is collected and retyped into slides. The work goes into assembling, not reading.</a:t>
+            </a:r>
+            <a:endParaRPr lang="en-US" sz="1500" dirty="0"/>
+          </a:p>
+        </p:txBody>
+      </p:sp>
+      <p:sp>
+        <p:nvSpPr>
+          <p:cNvPr id="11" name="Problem 3 card"/>
+          <p:cNvSpPr/>
+          <p:nvPr/>
+        </p:nvSpPr>
+        <p:spPr>
+          <a:xfrm>
+            <a:off x="8193024" y="1737360"/>
+            <a:ext cx="3456432" cy="3566160"/>
+          </a:xfrm>
+          <a:prstGeom prst="roundRect">
+            <a:avLst>
+              <a:gd name="adj" fmla="val 2116"/>
+            </a:avLst>
+          </a:prstGeom>
+          <a:solidFill>
+            <a:schemeClr val="bg2"/>
+          </a:solidFill>
+          <a:ln w="12700">
+            <a:solidFill>
+              <a:schemeClr val="bg2"/>
+            </a:solidFill>
+            <a:prstDash val="solid"/>
+          </a:ln>
+        </p:spPr>
+      </p:sp>
+      <p:sp>
+        <p:nvSpPr>
+          <p:cNvPr id="12" name="Problem 3 mark"/>
+          <p:cNvSpPr/>
+          <p:nvPr/>
+        </p:nvSpPr>
+        <p:spPr>
+          <a:xfrm>
+            <a:off x="8513064" y="2103120"/>
+            <a:ext cx="384048" cy="384048"/>
+          </a:xfrm>
+          <a:prstGeom prst="rect">
+            <a:avLst/>
+          </a:prstGeom>
+          <a:solidFill>
+            <a:schemeClr val="accent2"/>
+          </a:solidFill>
+          <a:ln w="12700">
+            <a:solidFill>
+              <a:schemeClr val="accent2"/>
+            </a:solidFill>
+            <a:prstDash val="solid"/>
+          </a:ln>
+        </p:spPr>
+      </p:sp>
+      <p:sp>
+        <p:nvSpPr>
+          <p:cNvPr id="13" name="Problem 3 heading"/>
+          <p:cNvSpPr txBox="1"/>
+          <p:nvPr/>
+        </p:nvSpPr>
+        <p:spPr>
+          <a:xfrm>
+            <a:off x="8513064" y="2788920"/>
+            <a:ext cx="2834640" cy="731520"/>
+          </a:xfrm>
+          <a:prstGeom prst="rect">
+            <a:avLst/>
+          </a:prstGeom>
+          <a:noFill/>
+          <a:ln/>
+        </p:spPr>
+        <p:txBody>
+          <a:bodyPr wrap="square" lIns="0" tIns="0" rIns="0" bIns="0" rtlCol="0" anchor="t"/>
+          <a:lstStyle/>
+          <a:p>
+            <a:pPr indent="0" marL="0">
+              <a:buNone/>
+            </a:pPr>
+            <a:r>
+              <a:rPr lang="en-US" sz="2200" b="1" dirty="0">
+                <a:solidFill>
+                  <a:schemeClr val="tx1"/>
+                </a:solidFill>
+              </a:rPr>
+              <a:t>Bad news arrives without a plan</a:t>
+            </a:r>
+            <a:endParaRPr lang="en-US" sz="2200" dirty="0"/>
+          </a:p>
+        </p:txBody>
+      </p:sp>
+      <p:sp>
+        <p:nvSpPr>
+          <p:cNvPr id="14" name="Problem 3 text"/>
+          <p:cNvSpPr txBox="1"/>
+          <p:nvPr/>
+        </p:nvSpPr>
+        <p:spPr>
+          <a:xfrm>
+            <a:off x="8513064" y="3611880"/>
+            <a:ext cx="2834640" cy="1463040"/>
+          </a:xfrm>
+          <a:prstGeom prst="rect">
+            <a:avLst/>
+          </a:prstGeom>
+          <a:noFill/>
+          <a:ln/>
+        </p:spPr>
+        <p:txBody>
+          <a:bodyPr wrap="square" lIns="0" tIns="0" rIns="0" bIns="0" rtlCol="0" anchor="t"/>
+          <a:lstStyle/>
+          <a:p>
+            <a:pPr indent="0" marL="0">
+              <a:buNone/>
+            </a:pPr>
+            <a:r>
+              <a:rPr lang="en-US" sz="1500" dirty="0">
+                <a:solidFill>
+                  <a:schemeClr val="accent5"/>
+                </a:solidFill>
+              </a:rPr>
+              <a:t>A Red status says something is wrong. It rarely says what the owner will do, or by when.</a:t>
+            </a:r>
+            <a:endParaRPr lang="en-US" sz="1500" dirty="0"/>
+          </a:p>
+        </p:txBody>
+      </p:sp>
+      <p:sp>
+        <p:nvSpPr>
+          <p:cNvPr id="15" name="Takeaway"/>
+          <p:cNvSpPr txBox="1"/>
+          <p:nvPr/>
+        </p:nvSpPr>
+        <p:spPr>
+          <a:xfrm>
+            <a:off x="548640" y="5532120"/>
+            <a:ext cx="11064240" cy="457200"/>
           </a:xfrm>
           <a:prstGeom prst="rect">
             <a:avLst/>
@@ -3276,25 +4616,14 @@
               <a:buNone/>
             </a:pPr>
             <a:r>
-              <a:rPr lang="en-US" sz="1700" b="1" dirty="0">
+              <a:rPr lang="en-US" sz="1600" i="1" dirty="0">
                 <a:solidFill>
                   <a:schemeClr val="tx2"/>
                 </a:solidFill>
               </a:rPr>
-              <a:t>The rigor of an MBR, the ease of a 5-15, the org-wide view of OKRs.</a:t>
-            </a:r>
-            <a:pPr indent="0" marL="0">
-              <a:buNone/>
-            </a:pPr>
-            <a:r>
-              <a:rPr lang="en-US" sz="1700" dirty="0">
-                <a:solidFill>
-                  <a:schemeClr val="accent5"/>
-                </a:solidFill>
-              </a:rPr>
-              <a:t>  Managers supply the data cheaply; leaders read it easily.</a:t>
-            </a:r>
-            <a:endParaRPr lang="en-US" sz="1700" dirty="0"/>
+              <a:t>Goal Tracker is built around one question: does this make trouble easier to find, or harder to hide?</a:t>
+            </a:r>
+            <a:endParaRPr lang="en-US" sz="1600" dirty="0"/>
           </a:p>
         </p:txBody>
       </p:sp>
@@ -3400,7 +4729,7 @@
                   <a:schemeClr val="tx2"/>
                 </a:solidFill>
               </a:rPr>
-              <a:t>Every goal in one list, problems first</a:t>
+              <a:t>What PowerPoint can't do for us</a:t>
             </a:r>
             <a:endParaRPr lang="en-US" sz="3600" dirty="0"/>
           </a:p>
@@ -3408,70 +4737,149 @@
       </p:sp>
       <p:sp>
         <p:nvSpPr>
-          <p:cNvPr id="3" name="Goals page frame"/>
+          <p:cNvPr id="3" name="Today heading"/>
+          <p:cNvSpPr txBox="1"/>
+          <p:nvPr/>
+        </p:nvSpPr>
+        <p:spPr>
+          <a:xfrm>
+            <a:off x="3063240" y="1463040"/>
+            <a:ext cx="4114800" cy="457200"/>
+          </a:xfrm>
+          <a:prstGeom prst="rect">
+            <a:avLst/>
+          </a:prstGeom>
+          <a:noFill/>
+          <a:ln/>
+        </p:spPr>
+        <p:txBody>
+          <a:bodyPr wrap="square" lIns="0" tIns="0" rIns="0" bIns="0" rtlCol="0" anchor="ctr"/>
+          <a:lstStyle/>
+          <a:p>
+            <a:pPr indent="0" marL="0">
+              <a:buNone/>
+            </a:pPr>
+            <a:r>
+              <a:rPr lang="en-US" sz="1600" b="1" dirty="0">
+                <a:solidFill>
+                  <a:schemeClr val="accent5"/>
+                </a:solidFill>
+              </a:rPr>
+              <a:t>PowerPoint status deck</a:t>
+            </a:r>
+            <a:endParaRPr lang="en-US" sz="1600" dirty="0"/>
+          </a:p>
+        </p:txBody>
+      </p:sp>
+      <p:sp>
+        <p:nvSpPr>
+          <p:cNvPr id="4" name="Goal Tracker heading"/>
+          <p:cNvSpPr txBox="1"/>
+          <p:nvPr/>
+        </p:nvSpPr>
+        <p:spPr>
+          <a:xfrm>
+            <a:off x="7360920" y="1463040"/>
+            <a:ext cx="4279392" cy="457200"/>
+          </a:xfrm>
+          <a:prstGeom prst="rect">
+            <a:avLst/>
+          </a:prstGeom>
+          <a:noFill/>
+          <a:ln/>
+        </p:spPr>
+        <p:txBody>
+          <a:bodyPr wrap="square" lIns="0" tIns="0" rIns="0" bIns="0" rtlCol="0" anchor="ctr"/>
+          <a:lstStyle/>
+          <a:p>
+            <a:pPr indent="0" marL="0">
+              <a:buNone/>
+            </a:pPr>
+            <a:r>
+              <a:rPr lang="en-US" sz="1600" b="1" dirty="0">
+                <a:solidFill>
+                  <a:schemeClr val="accent1"/>
+                </a:solidFill>
+              </a:rPr>
+              <a:t>Goal Tracker</a:t>
+            </a:r>
+            <a:endParaRPr lang="en-US" sz="1600" dirty="0"/>
+          </a:p>
+        </p:txBody>
+      </p:sp>
+      <p:sp>
+        <p:nvSpPr>
+          <p:cNvPr id="5" name="Row 1 label"/>
+          <p:cNvSpPr txBox="1"/>
+          <p:nvPr/>
+        </p:nvSpPr>
+        <p:spPr>
+          <a:xfrm>
+            <a:off x="548640" y="2011680"/>
+            <a:ext cx="2331720" cy="850392"/>
+          </a:xfrm>
+          <a:prstGeom prst="rect">
+            <a:avLst/>
+          </a:prstGeom>
+          <a:noFill/>
+          <a:ln/>
+        </p:spPr>
+        <p:txBody>
+          <a:bodyPr wrap="square" lIns="0" tIns="0" rIns="0" bIns="0" rtlCol="0" anchor="ctr"/>
+          <a:lstStyle/>
+          <a:p>
+            <a:pPr indent="0" marL="0">
+              <a:buNone/>
+            </a:pPr>
+            <a:r>
+              <a:rPr lang="en-US" sz="1600" b="1" dirty="0">
+                <a:solidFill>
+                  <a:schemeClr val="tx1"/>
+                </a:solidFill>
+              </a:rPr>
+              <a:t>A goal nobody updated</a:t>
+            </a:r>
+            <a:endParaRPr lang="en-US" sz="1600" dirty="0"/>
+          </a:p>
+        </p:txBody>
+      </p:sp>
+      <p:sp>
+        <p:nvSpPr>
+          <p:cNvPr id="6" name="Row 1 today card"/>
           <p:cNvSpPr/>
           <p:nvPr/>
         </p:nvSpPr>
         <p:spPr>
           <a:xfrm>
-            <a:off x="548640" y="1463040"/>
-            <a:ext cx="7223760" cy="4514850"/>
-          </a:xfrm>
-          <a:prstGeom prst="rect">
-            <a:avLst/>
+            <a:off x="3063240" y="2011680"/>
+            <a:ext cx="4114800" cy="850392"/>
+          </a:xfrm>
+          <a:prstGeom prst="roundRect">
+            <a:avLst>
+              <a:gd name="adj" fmla="val 6452"/>
+            </a:avLst>
           </a:prstGeom>
           <a:solidFill>
-            <a:schemeClr val="bg1"/>
+            <a:schemeClr val="bg2"/>
           </a:solidFill>
           <a:ln w="12700">
             <a:solidFill>
-              <a:schemeClr val="accent6"/>
+              <a:schemeClr val="bg2"/>
             </a:solidFill>
             <a:prstDash val="solid"/>
           </a:ln>
-          <a:effectLst>
-            <a:outerShdw sx="100000" sy="100000" kx="0" ky="0" algn="bl" rotWithShape="0" blurRad="152400" dist="50800" dir="5400000">
-              <a:srgbClr val="134E4A">
-                <a:alpha val="18000"/>
-              </a:srgbClr>
-            </a:outerShdw>
-          </a:effectLst>
-        </p:spPr>
-      </p:sp>
-      <p:pic>
-        <p:nvPicPr>
-          <p:cNvPr id="4" name="Goals page" descr="The Goals list sorted with Red goals at the top">    </p:cNvPr>
-          <p:cNvPicPr>
-            <a:picLocks noChangeAspect="1"/>
-          </p:cNvPicPr>
-          <p:nvPr/>
-        </p:nvPicPr>
-        <p:blipFill>
-          <a:blip r:embed="rId1"/>
-          <a:stretch>
-            <a:fillRect/>
-          </a:stretch>
-        </p:blipFill>
-        <p:spPr>
-          <a:xfrm>
-            <a:off x="548640" y="1463040"/>
-            <a:ext cx="7223760" cy="4514850"/>
-          </a:xfrm>
-          <a:prstGeom prst="rect">
-            <a:avLst/>
-          </a:prstGeom>
-        </p:spPr>
-      </p:pic>
-      <p:sp>
-        <p:nvSpPr>
-          <p:cNvPr id="5" name="Caption"/>
-          <p:cNvSpPr txBox="1"/>
-          <p:nvPr/>
-        </p:nvSpPr>
-        <p:spPr>
-          <a:xfrm>
-            <a:off x="548640" y="6053328"/>
-            <a:ext cx="6949440" cy="256032"/>
+        </p:spPr>
+      </p:sp>
+      <p:sp>
+        <p:nvSpPr>
+          <p:cNvPr id="7" name="Row 1 today"/>
+          <p:cNvSpPr txBox="1"/>
+          <p:nvPr/>
+        </p:nvSpPr>
+        <p:spPr>
+          <a:xfrm>
+            <a:off x="3291840" y="2011680"/>
+            <a:ext cx="3657600" cy="850392"/>
           </a:xfrm>
           <a:prstGeom prst="rect">
             <a:avLst/>
@@ -3487,37 +4895,39 @@
               <a:buNone/>
             </a:pPr>
             <a:r>
-              <a:rPr lang="en-US" sz="1000" i="1" dirty="0">
+              <a:rPr lang="en-US" sz="1500" dirty="0">
                 <a:solidFill>
                   <a:schemeClr val="accent5"/>
                 </a:solidFill>
               </a:rPr>
-              <a:t>Screenshot from the product, on a seeded 50-goal demo org</a:t>
-            </a:r>
-            <a:endParaRPr lang="en-US" sz="1000" dirty="0"/>
-          </a:p>
-        </p:txBody>
-      </p:sp>
-      <p:sp>
-        <p:nvSpPr>
-          <p:cNvPr id="6" name="Point 1 mark"/>
+              <a:t>Keeps its last colour. Nobody is told.</a:t>
+            </a:r>
+            <a:endParaRPr lang="en-US" sz="1500" dirty="0"/>
+          </a:p>
+        </p:txBody>
+      </p:sp>
+      <p:sp>
+        <p:nvSpPr>
+          <p:cNvPr id="8" name="Row 1 Goal Tracker card"/>
           <p:cNvSpPr/>
           <p:nvPr/>
         </p:nvSpPr>
         <p:spPr>
           <a:xfrm>
-            <a:off x="8229600" y="1664208"/>
-            <a:ext cx="182880" cy="182880"/>
-          </a:xfrm>
-          <a:prstGeom prst="rect">
-            <a:avLst/>
+            <a:off x="7360920" y="2011680"/>
+            <a:ext cx="4279392" cy="850392"/>
+          </a:xfrm>
+          <a:prstGeom prst="roundRect">
+            <a:avLst>
+              <a:gd name="adj" fmla="val 6452"/>
+            </a:avLst>
           </a:prstGeom>
           <a:solidFill>
-            <a:schemeClr val="accent2"/>
+            <a:schemeClr val="accent1"/>
           </a:solidFill>
           <a:ln w="12700">
             <a:solidFill>
-              <a:schemeClr val="accent2"/>
+              <a:schemeClr val="accent1"/>
             </a:solidFill>
             <a:prstDash val="solid"/>
           </a:ln>
@@ -3525,96 +4935,98 @@
       </p:sp>
       <p:sp>
         <p:nvSpPr>
-          <p:cNvPr id="7" name="Point 1 heading"/>
-          <p:cNvSpPr txBox="1"/>
-          <p:nvPr/>
-        </p:nvSpPr>
-        <p:spPr>
-          <a:xfrm>
-            <a:off x="8577072" y="1600200"/>
-            <a:ext cx="3063240" cy="329184"/>
-          </a:xfrm>
-          <a:prstGeom prst="rect">
-            <a:avLst/>
-          </a:prstGeom>
-          <a:noFill/>
-          <a:ln/>
-        </p:spPr>
-        <p:txBody>
-          <a:bodyPr wrap="square" lIns="0" tIns="0" rIns="0" bIns="0" rtlCol="0" anchor="t"/>
-          <a:lstStyle/>
-          <a:p>
-            <a:pPr indent="0" marL="0">
-              <a:buNone/>
-            </a:pPr>
-            <a:r>
-              <a:rPr lang="en-US" sz="1800" b="1" dirty="0">
+          <p:cNvPr id="9" name="Row 1 Goal Tracker"/>
+          <p:cNvSpPr txBox="1"/>
+          <p:nvPr/>
+        </p:nvSpPr>
+        <p:spPr>
+          <a:xfrm>
+            <a:off x="7589520" y="2011680"/>
+            <a:ext cx="3822192" cy="850392"/>
+          </a:xfrm>
+          <a:prstGeom prst="rect">
+            <a:avLst/>
+          </a:prstGeom>
+          <a:noFill/>
+          <a:ln/>
+        </p:spPr>
+        <p:txBody>
+          <a:bodyPr wrap="square" lIns="0" tIns="0" rIns="0" bIns="0" rtlCol="0" anchor="ctr"/>
+          <a:lstStyle/>
+          <a:p>
+            <a:pPr indent="0" marL="0">
+              <a:buNone/>
+            </a:pPr>
+            <a:r>
+              <a:rPr lang="en-US" sz="1500" b="1" dirty="0">
+                <a:solidFill>
+                  <a:schemeClr val="bg1"/>
+                </a:solidFill>
+              </a:rPr>
+              <a:t>Flagged Stale, as prominently as Red.</a:t>
+            </a:r>
+            <a:endParaRPr lang="en-US" sz="1500" dirty="0"/>
+          </a:p>
+        </p:txBody>
+      </p:sp>
+      <p:sp>
+        <p:nvSpPr>
+          <p:cNvPr id="10" name="Row 2 label"/>
+          <p:cNvSpPr txBox="1"/>
+          <p:nvPr/>
+        </p:nvSpPr>
+        <p:spPr>
+          <a:xfrm>
+            <a:off x="548640" y="2999232"/>
+            <a:ext cx="2331720" cy="850392"/>
+          </a:xfrm>
+          <a:prstGeom prst="rect">
+            <a:avLst/>
+          </a:prstGeom>
+          <a:noFill/>
+          <a:ln/>
+        </p:spPr>
+        <p:txBody>
+          <a:bodyPr wrap="square" lIns="0" tIns="0" rIns="0" bIns="0" rtlCol="0" anchor="ctr"/>
+          <a:lstStyle/>
+          <a:p>
+            <a:pPr indent="0" marL="0">
+              <a:buNone/>
+            </a:pPr>
+            <a:r>
+              <a:rPr lang="en-US" sz="1600" b="1" dirty="0">
                 <a:solidFill>
                   <a:schemeClr val="tx1"/>
                 </a:solidFill>
               </a:rPr>
-              <a:t>Sorted by Health</a:t>
-            </a:r>
-            <a:endParaRPr lang="en-US" sz="1800" dirty="0"/>
-          </a:p>
-        </p:txBody>
-      </p:sp>
-      <p:sp>
-        <p:nvSpPr>
-          <p:cNvPr id="8" name="Point 1 text"/>
-          <p:cNvSpPr txBox="1"/>
-          <p:nvPr/>
-        </p:nvSpPr>
-        <p:spPr>
-          <a:xfrm>
-            <a:off x="8577072" y="1965960"/>
-            <a:ext cx="3063240" cy="914400"/>
-          </a:xfrm>
-          <a:prstGeom prst="rect">
-            <a:avLst/>
-          </a:prstGeom>
-          <a:noFill/>
-          <a:ln/>
-        </p:spPr>
-        <p:txBody>
-          <a:bodyPr wrap="square" lIns="0" tIns="0" rIns="0" bIns="0" rtlCol="0" anchor="t"/>
-          <a:lstStyle/>
-          <a:p>
-            <a:pPr indent="0" marL="0">
-              <a:buNone/>
-            </a:pPr>
-            <a:r>
-              <a:rPr lang="en-US" sz="1400" dirty="0">
-                <a:solidFill>
-                  <a:schemeClr val="accent5"/>
-                </a:solidFill>
-              </a:rPr>
-              <a:t>Red first, then Stale, then Yellow. The shape of the org reads in one screen.</a:t>
-            </a:r>
-            <a:endParaRPr lang="en-US" sz="1400" dirty="0"/>
-          </a:p>
-        </p:txBody>
-      </p:sp>
-      <p:sp>
-        <p:nvSpPr>
-          <p:cNvPr id="9" name="Point 2 mark"/>
+              <a:t>Bad news</a:t>
+            </a:r>
+            <a:endParaRPr lang="en-US" sz="1600" dirty="0"/>
+          </a:p>
+        </p:txBody>
+      </p:sp>
+      <p:sp>
+        <p:nvSpPr>
+          <p:cNvPr id="11" name="Row 2 today card"/>
           <p:cNvSpPr/>
           <p:nvPr/>
         </p:nvSpPr>
         <p:spPr>
           <a:xfrm>
-            <a:off x="8229600" y="3081528"/>
-            <a:ext cx="182880" cy="182880"/>
-          </a:xfrm>
-          <a:prstGeom prst="triangle">
-            <a:avLst/>
+            <a:off x="3063240" y="2999232"/>
+            <a:ext cx="4114800" cy="850392"/>
+          </a:xfrm>
+          <a:prstGeom prst="roundRect">
+            <a:avLst>
+              <a:gd name="adj" fmla="val 6452"/>
+            </a:avLst>
           </a:prstGeom>
           <a:solidFill>
-            <a:schemeClr val="accent3"/>
+            <a:schemeClr val="bg2"/>
           </a:solidFill>
           <a:ln w="12700">
             <a:solidFill>
-              <a:schemeClr val="accent3"/>
+              <a:schemeClr val="bg2"/>
             </a:solidFill>
             <a:prstDash val="solid"/>
           </a:ln>
@@ -3622,96 +5034,62 @@
       </p:sp>
       <p:sp>
         <p:nvSpPr>
-          <p:cNvPr id="10" name="Point 2 heading"/>
-          <p:cNvSpPr txBox="1"/>
-          <p:nvPr/>
-        </p:nvSpPr>
-        <p:spPr>
-          <a:xfrm>
-            <a:off x="8577072" y="3017520"/>
-            <a:ext cx="3063240" cy="329184"/>
-          </a:xfrm>
-          <a:prstGeom prst="rect">
-            <a:avLst/>
-          </a:prstGeom>
-          <a:noFill/>
-          <a:ln/>
-        </p:spPr>
-        <p:txBody>
-          <a:bodyPr wrap="square" lIns="0" tIns="0" rIns="0" bIns="0" rtlCol="0" anchor="t"/>
-          <a:lstStyle/>
-          <a:p>
-            <a:pPr indent="0" marL="0">
-              <a:buNone/>
-            </a:pPr>
-            <a:r>
-              <a:rPr lang="en-US" sz="1800" b="1" dirty="0">
-                <a:solidFill>
-                  <a:schemeClr val="tx1"/>
-                </a:solidFill>
-              </a:rPr>
-              <a:t>Slips stay visible</a:t>
-            </a:r>
-            <a:endParaRPr lang="en-US" sz="1800" dirty="0"/>
-          </a:p>
-        </p:txBody>
-      </p:sp>
-      <p:sp>
-        <p:nvSpPr>
-          <p:cNvPr id="11" name="Point 2 text"/>
-          <p:cNvSpPr txBox="1"/>
-          <p:nvPr/>
-        </p:nvSpPr>
-        <p:spPr>
-          <a:xfrm>
-            <a:off x="8577072" y="3383280"/>
-            <a:ext cx="3063240" cy="914400"/>
-          </a:xfrm>
-          <a:prstGeom prst="rect">
-            <a:avLst/>
-          </a:prstGeom>
-          <a:noFill/>
-          <a:ln/>
-        </p:spPr>
-        <p:txBody>
-          <a:bodyPr wrap="square" lIns="0" tIns="0" rIns="0" bIns="0" rtlCol="0" anchor="t"/>
-          <a:lstStyle/>
-          <a:p>
-            <a:pPr indent="0" marL="0">
-              <a:buNone/>
-            </a:pPr>
-            <a:r>
-              <a:rPr lang="en-US" sz="1400" dirty="0">
+          <p:cNvPr id="12" name="Row 2 today"/>
+          <p:cNvSpPr txBox="1"/>
+          <p:nvPr/>
+        </p:nvSpPr>
+        <p:spPr>
+          <a:xfrm>
+            <a:off x="3291840" y="2999232"/>
+            <a:ext cx="3657600" cy="850392"/>
+          </a:xfrm>
+          <a:prstGeom prst="rect">
+            <a:avLst/>
+          </a:prstGeom>
+          <a:noFill/>
+          <a:ln/>
+        </p:spPr>
+        <p:txBody>
+          <a:bodyPr wrap="square" lIns="0" tIns="0" rIns="0" bIns="0" rtlCol="0" anchor="ctr"/>
+          <a:lstStyle/>
+          <a:p>
+            <a:pPr indent="0" marL="0">
+              <a:buNone/>
+            </a:pPr>
+            <a:r>
+              <a:rPr lang="en-US" sz="1500" dirty="0">
                 <a:solidFill>
                   <a:schemeClr val="accent5"/>
                 </a:solidFill>
               </a:rPr>
-              <a:t>A moved date shows the old date struck through beside the new one.</a:t>
-            </a:r>
-            <a:endParaRPr lang="en-US" sz="1400" dirty="0"/>
-          </a:p>
-        </p:txBody>
-      </p:sp>
-      <p:sp>
-        <p:nvSpPr>
-          <p:cNvPr id="12" name="Point 3 mark"/>
+              <a:t>A red box. A plan is optional.</a:t>
+            </a:r>
+            <a:endParaRPr lang="en-US" sz="1500" dirty="0"/>
+          </a:p>
+        </p:txBody>
+      </p:sp>
+      <p:sp>
+        <p:nvSpPr>
+          <p:cNvPr id="13" name="Row 2 Goal Tracker card"/>
           <p:cNvSpPr/>
           <p:nvPr/>
         </p:nvSpPr>
         <p:spPr>
           <a:xfrm>
-            <a:off x="8229600" y="4498848"/>
-            <a:ext cx="182880" cy="182880"/>
-          </a:xfrm>
-          <a:prstGeom prst="ellipse">
-            <a:avLst/>
+            <a:off x="7360920" y="2999232"/>
+            <a:ext cx="4279392" cy="850392"/>
+          </a:xfrm>
+          <a:prstGeom prst="roundRect">
+            <a:avLst>
+              <a:gd name="adj" fmla="val 6452"/>
+            </a:avLst>
           </a:prstGeom>
           <a:solidFill>
-            <a:schemeClr val="accent4"/>
+            <a:schemeClr val="accent1"/>
           </a:solidFill>
           <a:ln w="12700">
             <a:solidFill>
-              <a:schemeClr val="accent4"/>
+              <a:schemeClr val="accent1"/>
             </a:solidFill>
             <a:prstDash val="solid"/>
           </a:ln>
@@ -3719,73 +5097,361 @@
       </p:sp>
       <p:sp>
         <p:nvSpPr>
-          <p:cNvPr id="13" name="Point 3 heading"/>
-          <p:cNvSpPr txBox="1"/>
-          <p:nvPr/>
-        </p:nvSpPr>
-        <p:spPr>
-          <a:xfrm>
-            <a:off x="8577072" y="4434840"/>
-            <a:ext cx="3063240" cy="329184"/>
-          </a:xfrm>
-          <a:prstGeom prst="rect">
-            <a:avLst/>
-          </a:prstGeom>
-          <a:noFill/>
-          <a:ln/>
-        </p:spPr>
-        <p:txBody>
-          <a:bodyPr wrap="square" lIns="0" tIns="0" rIns="0" bIns="0" rtlCol="0" anchor="t"/>
-          <a:lstStyle/>
-          <a:p>
-            <a:pPr indent="0" marL="0">
-              <a:buNone/>
-            </a:pPr>
-            <a:r>
-              <a:rPr lang="en-US" sz="1800" b="1" dirty="0">
+          <p:cNvPr id="14" name="Row 2 Goal Tracker"/>
+          <p:cNvSpPr txBox="1"/>
+          <p:nvPr/>
+        </p:nvSpPr>
+        <p:spPr>
+          <a:xfrm>
+            <a:off x="7589520" y="2999232"/>
+            <a:ext cx="3822192" cy="850392"/>
+          </a:xfrm>
+          <a:prstGeom prst="rect">
+            <a:avLst/>
+          </a:prstGeom>
+          <a:noFill/>
+          <a:ln/>
+        </p:spPr>
+        <p:txBody>
+          <a:bodyPr wrap="square" lIns="0" tIns="0" rIns="0" bIns="0" rtlCol="0" anchor="ctr"/>
+          <a:lstStyle/>
+          <a:p>
+            <a:pPr indent="0" marL="0">
+              <a:buNone/>
+            </a:pPr>
+            <a:r>
+              <a:rPr lang="en-US" sz="1500" b="1" dirty="0">
+                <a:solidFill>
+                  <a:schemeClr val="bg1"/>
+                </a:solidFill>
+              </a:rPr>
+              <a:t>Needs a Path to Green and a back-to-Green date.</a:t>
+            </a:r>
+            <a:endParaRPr lang="en-US" sz="1500" dirty="0"/>
+          </a:p>
+        </p:txBody>
+      </p:sp>
+      <p:sp>
+        <p:nvSpPr>
+          <p:cNvPr id="15" name="Row 3 label"/>
+          <p:cNvSpPr txBox="1"/>
+          <p:nvPr/>
+        </p:nvSpPr>
+        <p:spPr>
+          <a:xfrm>
+            <a:off x="548640" y="3986784"/>
+            <a:ext cx="2331720" cy="850392"/>
+          </a:xfrm>
+          <a:prstGeom prst="rect">
+            <a:avLst/>
+          </a:prstGeom>
+          <a:noFill/>
+          <a:ln/>
+        </p:spPr>
+        <p:txBody>
+          <a:bodyPr wrap="square" lIns="0" tIns="0" rIns="0" bIns="0" rtlCol="0" anchor="ctr"/>
+          <a:lstStyle/>
+          <a:p>
+            <a:pPr indent="0" marL="0">
+              <a:buNone/>
+            </a:pPr>
+            <a:r>
+              <a:rPr lang="en-US" sz="1600" b="1" dirty="0">
                 <a:solidFill>
                   <a:schemeClr val="tx1"/>
                 </a:solidFill>
               </a:rPr>
-              <a:t>Slice it your way</a:t>
-            </a:r>
-            <a:endParaRPr lang="en-US" sz="1800" dirty="0"/>
-          </a:p>
-        </p:txBody>
-      </p:sp>
-      <p:sp>
-        <p:nvSpPr>
-          <p:cNvPr id="14" name="Point 3 text"/>
-          <p:cNvSpPr txBox="1"/>
-          <p:nvPr/>
-        </p:nvSpPr>
-        <p:spPr>
-          <a:xfrm>
-            <a:off x="8577072" y="4800600"/>
-            <a:ext cx="3063240" cy="914400"/>
-          </a:xfrm>
-          <a:prstGeom prst="rect">
-            <a:avLst/>
-          </a:prstGeom>
-          <a:noFill/>
-          <a:ln/>
-        </p:spPr>
-        <p:txBody>
-          <a:bodyPr wrap="square" lIns="0" tIns="0" rIns="0" bIns="0" rtlCol="0" anchor="t"/>
-          <a:lstStyle/>
-          <a:p>
-            <a:pPr indent="0" marL="0">
-              <a:buNone/>
-            </a:pPr>
-            <a:r>
-              <a:rPr lang="en-US" sz="1400" dirty="0">
+              <a:t>The review document</a:t>
+            </a:r>
+            <a:endParaRPr lang="en-US" sz="1600" dirty="0"/>
+          </a:p>
+        </p:txBody>
+      </p:sp>
+      <p:sp>
+        <p:nvSpPr>
+          <p:cNvPr id="16" name="Row 3 today card"/>
+          <p:cNvSpPr/>
+          <p:nvPr/>
+        </p:nvSpPr>
+        <p:spPr>
+          <a:xfrm>
+            <a:off x="3063240" y="3986784"/>
+            <a:ext cx="4114800" cy="850392"/>
+          </a:xfrm>
+          <a:prstGeom prst="roundRect">
+            <a:avLst>
+              <a:gd name="adj" fmla="val 6452"/>
+            </a:avLst>
+          </a:prstGeom>
+          <a:solidFill>
+            <a:schemeClr val="bg2"/>
+          </a:solidFill>
+          <a:ln w="12700">
+            <a:solidFill>
+              <a:schemeClr val="bg2"/>
+            </a:solidFill>
+            <a:prstDash val="solid"/>
+          </a:ln>
+        </p:spPr>
+      </p:sp>
+      <p:sp>
+        <p:nvSpPr>
+          <p:cNvPr id="17" name="Row 3 today"/>
+          <p:cNvSpPr txBox="1"/>
+          <p:nvPr/>
+        </p:nvSpPr>
+        <p:spPr>
+          <a:xfrm>
+            <a:off x="3291840" y="3986784"/>
+            <a:ext cx="3657600" cy="850392"/>
+          </a:xfrm>
+          <a:prstGeom prst="rect">
+            <a:avLst/>
+          </a:prstGeom>
+          <a:noFill/>
+          <a:ln/>
+        </p:spPr>
+        <p:txBody>
+          <a:bodyPr wrap="square" lIns="0" tIns="0" rIns="0" bIns="0" rtlCol="0" anchor="ctr"/>
+          <a:lstStyle/>
+          <a:p>
+            <a:pPr indent="0" marL="0">
+              <a:buNone/>
+            </a:pPr>
+            <a:r>
+              <a:rPr lang="en-US" sz="1500" dirty="0">
                 <a:solidFill>
                   <a:schemeClr val="accent5"/>
                 </a:solidFill>
               </a:rPr>
-              <a:t>Filter and group by team, pillar, quarter, or any Dimension an Admin defines.</a:t>
-            </a:r>
-            <a:endParaRPr lang="en-US" sz="1400" dirty="0"/>
+              <a:t>Assembled by hand every cycle.</a:t>
+            </a:r>
+            <a:endParaRPr lang="en-US" sz="1500" dirty="0"/>
+          </a:p>
+        </p:txBody>
+      </p:sp>
+      <p:sp>
+        <p:nvSpPr>
+          <p:cNvPr id="18" name="Row 3 Goal Tracker card"/>
+          <p:cNvSpPr/>
+          <p:nvPr/>
+        </p:nvSpPr>
+        <p:spPr>
+          <a:xfrm>
+            <a:off x="7360920" y="3986784"/>
+            <a:ext cx="4279392" cy="850392"/>
+          </a:xfrm>
+          <a:prstGeom prst="roundRect">
+            <a:avLst>
+              <a:gd name="adj" fmla="val 6452"/>
+            </a:avLst>
+          </a:prstGeom>
+          <a:solidFill>
+            <a:schemeClr val="accent1"/>
+          </a:solidFill>
+          <a:ln w="12700">
+            <a:solidFill>
+              <a:schemeClr val="accent1"/>
+            </a:solidFill>
+            <a:prstDash val="solid"/>
+          </a:ln>
+        </p:spPr>
+      </p:sp>
+      <p:sp>
+        <p:nvSpPr>
+          <p:cNvPr id="19" name="Row 3 Goal Tracker"/>
+          <p:cNvSpPr txBox="1"/>
+          <p:nvPr/>
+        </p:nvSpPr>
+        <p:spPr>
+          <a:xfrm>
+            <a:off x="7589520" y="3986784"/>
+            <a:ext cx="3822192" cy="850392"/>
+          </a:xfrm>
+          <a:prstGeom prst="rect">
+            <a:avLst/>
+          </a:prstGeom>
+          <a:noFill/>
+          <a:ln/>
+        </p:spPr>
+        <p:txBody>
+          <a:bodyPr wrap="square" lIns="0" tIns="0" rIns="0" bIns="0" rtlCol="0" anchor="ctr"/>
+          <a:lstStyle/>
+          <a:p>
+            <a:pPr indent="0" marL="0">
+              <a:buNone/>
+            </a:pPr>
+            <a:r>
+              <a:rPr lang="en-US" sz="1500" b="1" dirty="0">
+                <a:solidFill>
+                  <a:schemeClr val="bg1"/>
+                </a:solidFill>
+              </a:rPr>
+              <a:t>Generated from check-ins, marking what changed.</a:t>
+            </a:r>
+            <a:endParaRPr lang="en-US" sz="1500" dirty="0"/>
+          </a:p>
+        </p:txBody>
+      </p:sp>
+      <p:sp>
+        <p:nvSpPr>
+          <p:cNvPr id="20" name="Row 4 label"/>
+          <p:cNvSpPr txBox="1"/>
+          <p:nvPr/>
+        </p:nvSpPr>
+        <p:spPr>
+          <a:xfrm>
+            <a:off x="548640" y="4974336"/>
+            <a:ext cx="2331720" cy="850392"/>
+          </a:xfrm>
+          <a:prstGeom prst="rect">
+            <a:avLst/>
+          </a:prstGeom>
+          <a:noFill/>
+          <a:ln/>
+        </p:spPr>
+        <p:txBody>
+          <a:bodyPr wrap="square" lIns="0" tIns="0" rIns="0" bIns="0" rtlCol="0" anchor="ctr"/>
+          <a:lstStyle/>
+          <a:p>
+            <a:pPr indent="0" marL="0">
+              <a:buNone/>
+            </a:pPr>
+            <a:r>
+              <a:rPr lang="en-US" sz="1600" b="1" dirty="0">
+                <a:solidFill>
+                  <a:schemeClr val="tx1"/>
+                </a:solidFill>
+              </a:rPr>
+              <a:t>History and follow-ups</a:t>
+            </a:r>
+            <a:endParaRPr lang="en-US" sz="1600" dirty="0"/>
+          </a:p>
+        </p:txBody>
+      </p:sp>
+      <p:sp>
+        <p:nvSpPr>
+          <p:cNvPr id="21" name="Row 4 today card"/>
+          <p:cNvSpPr/>
+          <p:nvPr/>
+        </p:nvSpPr>
+        <p:spPr>
+          <a:xfrm>
+            <a:off x="3063240" y="4974336"/>
+            <a:ext cx="4114800" cy="850392"/>
+          </a:xfrm>
+          <a:prstGeom prst="roundRect">
+            <a:avLst>
+              <a:gd name="adj" fmla="val 6452"/>
+            </a:avLst>
+          </a:prstGeom>
+          <a:solidFill>
+            <a:schemeClr val="bg2"/>
+          </a:solidFill>
+          <a:ln w="12700">
+            <a:solidFill>
+              <a:schemeClr val="bg2"/>
+            </a:solidFill>
+            <a:prstDash val="solid"/>
+          </a:ln>
+        </p:spPr>
+      </p:sp>
+      <p:sp>
+        <p:nvSpPr>
+          <p:cNvPr id="22" name="Row 4 today"/>
+          <p:cNvSpPr txBox="1"/>
+          <p:nvPr/>
+        </p:nvSpPr>
+        <p:spPr>
+          <a:xfrm>
+            <a:off x="3291840" y="4974336"/>
+            <a:ext cx="3657600" cy="850392"/>
+          </a:xfrm>
+          <a:prstGeom prst="rect">
+            <a:avLst/>
+          </a:prstGeom>
+          <a:noFill/>
+          <a:ln/>
+        </p:spPr>
+        <p:txBody>
+          <a:bodyPr wrap="square" lIns="0" tIns="0" rIns="0" bIns="0" rtlCol="0" anchor="ctr"/>
+          <a:lstStyle/>
+          <a:p>
+            <a:pPr indent="0" marL="0">
+              <a:buNone/>
+            </a:pPr>
+            <a:r>
+              <a:rPr lang="en-US" sz="1500" dirty="0">
+                <a:solidFill>
+                  <a:schemeClr val="accent5"/>
+                </a:solidFill>
+              </a:rPr>
+              <a:t>Spread across old decks and notes.</a:t>
+            </a:r>
+            <a:endParaRPr lang="en-US" sz="1500" dirty="0"/>
+          </a:p>
+        </p:txBody>
+      </p:sp>
+      <p:sp>
+        <p:nvSpPr>
+          <p:cNvPr id="23" name="Row 4 Goal Tracker card"/>
+          <p:cNvSpPr/>
+          <p:nvPr/>
+        </p:nvSpPr>
+        <p:spPr>
+          <a:xfrm>
+            <a:off x="7360920" y="4974336"/>
+            <a:ext cx="4279392" cy="850392"/>
+          </a:xfrm>
+          <a:prstGeom prst="roundRect">
+            <a:avLst>
+              <a:gd name="adj" fmla="val 6452"/>
+            </a:avLst>
+          </a:prstGeom>
+          <a:solidFill>
+            <a:schemeClr val="accent1"/>
+          </a:solidFill>
+          <a:ln w="12700">
+            <a:solidFill>
+              <a:schemeClr val="accent1"/>
+            </a:solidFill>
+            <a:prstDash val="solid"/>
+          </a:ln>
+        </p:spPr>
+      </p:sp>
+      <p:sp>
+        <p:nvSpPr>
+          <p:cNvPr id="24" name="Row 4 Goal Tracker"/>
+          <p:cNvSpPr txBox="1"/>
+          <p:nvPr/>
+        </p:nvSpPr>
+        <p:spPr>
+          <a:xfrm>
+            <a:off x="7589520" y="4974336"/>
+            <a:ext cx="3822192" cy="850392"/>
+          </a:xfrm>
+          <a:prstGeom prst="rect">
+            <a:avLst/>
+          </a:prstGeom>
+          <a:noFill/>
+          <a:ln/>
+        </p:spPr>
+        <p:txBody>
+          <a:bodyPr wrap="square" lIns="0" tIns="0" rIns="0" bIns="0" rtlCol="0" anchor="ctr"/>
+          <a:lstStyle/>
+          <a:p>
+            <a:pPr indent="0" marL="0">
+              <a:buNone/>
+            </a:pPr>
+            <a:r>
+              <a:rPr lang="en-US" sz="1500" b="1" dirty="0">
+                <a:solidFill>
+                  <a:schemeClr val="bg1"/>
+                </a:solidFill>
+              </a:rPr>
+              <a:t>Kept on the goal. Action Items carry forward.</a:t>
+            </a:r>
+            <a:endParaRPr lang="en-US" sz="1500" dirty="0"/>
           </a:p>
         </p:txBody>
       </p:sp>
@@ -3891,7 +5557,7 @@
                   <a:schemeClr val="tx2"/>
                 </a:solidFill>
               </a:rPr>
-              <a:t>A silent goal is as loud as a Red one</a:t>
+              <a:t>One mechanism, from weekly update to review</a:t>
             </a:r>
             <a:endParaRPr lang="en-US" sz="3600" dirty="0"/>
           </a:p>
@@ -3899,116 +5565,181 @@
       </p:sp>
       <p:sp>
         <p:nvSpPr>
-          <p:cNvPr id="3" name="Risks page frame"/>
+          <p:cNvPr id="3" name="Step 1 circle"/>
           <p:cNvSpPr/>
           <p:nvPr/>
         </p:nvSpPr>
         <p:spPr>
           <a:xfrm>
-            <a:off x="4416552" y="1463040"/>
-            <a:ext cx="7223760" cy="4514850"/>
-          </a:xfrm>
-          <a:prstGeom prst="rect">
+            <a:off x="548640" y="1783080"/>
+            <a:ext cx="731520" cy="731520"/>
+          </a:xfrm>
+          <a:prstGeom prst="ellipse">
             <a:avLst/>
           </a:prstGeom>
           <a:solidFill>
-            <a:schemeClr val="bg1"/>
+            <a:schemeClr val="accent1"/>
           </a:solidFill>
           <a:ln w="12700">
+            <a:solidFill>
+              <a:schemeClr val="accent1"/>
+            </a:solidFill>
+            <a:prstDash val="solid"/>
+          </a:ln>
+        </p:spPr>
+      </p:sp>
+      <p:sp>
+        <p:nvSpPr>
+          <p:cNvPr id="4" name="Step 1 number"/>
+          <p:cNvSpPr txBox="1"/>
+          <p:nvPr/>
+        </p:nvSpPr>
+        <p:spPr>
+          <a:xfrm>
+            <a:off x="548640" y="1783080"/>
+            <a:ext cx="731520" cy="731520"/>
+          </a:xfrm>
+          <a:prstGeom prst="rect">
+            <a:avLst/>
+          </a:prstGeom>
+          <a:noFill/>
+          <a:ln/>
+        </p:spPr>
+        <p:txBody>
+          <a:bodyPr wrap="square" lIns="0" tIns="0" rIns="0" bIns="0" rtlCol="0" anchor="ctr"/>
+          <a:lstStyle/>
+          <a:p>
+            <a:pPr algn="ctr" indent="0" marL="0">
+              <a:buNone/>
+            </a:pPr>
+            <a:r>
+              <a:rPr lang="en-US" sz="2800" b="1" dirty="0">
+                <a:solidFill>
+                  <a:schemeClr val="bg1"/>
+                </a:solidFill>
+              </a:rPr>
+              <a:t>1</a:t>
+            </a:r>
+            <a:endParaRPr lang="en-US" sz="2800" dirty="0"/>
+          </a:p>
+        </p:txBody>
+      </p:sp>
+      <p:sp>
+        <p:nvSpPr>
+          <p:cNvPr id="5" name="Arrow 1"/>
+          <p:cNvSpPr/>
+          <p:nvPr/>
+        </p:nvSpPr>
+        <p:spPr>
+          <a:xfrm>
+            <a:off x="1463040" y="2148840"/>
+            <a:ext cx="2724912" cy="0"/>
+          </a:xfrm>
+          <a:prstGeom prst="line">
+            <a:avLst/>
+          </a:prstGeom>
+          <a:noFill/>
+          <a:ln w="25400">
             <a:solidFill>
               <a:schemeClr val="accent6"/>
             </a:solidFill>
             <a:prstDash val="solid"/>
+            <a:tailEnd type="triangle"/>
           </a:ln>
-          <a:effectLst>
-            <a:outerShdw sx="100000" sy="100000" kx="0" ky="0" algn="bl" rotWithShape="0" blurRad="152400" dist="50800" dir="5400000">
-              <a:srgbClr val="134E4A">
-                <a:alpha val="18000"/>
-              </a:srgbClr>
-            </a:outerShdw>
-          </a:effectLst>
-        </p:spPr>
-      </p:sp>
-      <p:pic>
-        <p:nvPicPr>
-          <p:cNvPr id="4" name="Risks page" descr="The Risks page with ten flagged goals in three groups">    </p:cNvPr>
-          <p:cNvPicPr>
-            <a:picLocks noChangeAspect="1"/>
-          </p:cNvPicPr>
-          <p:nvPr/>
-        </p:nvPicPr>
-        <p:blipFill>
-          <a:blip r:embed="rId1"/>
-          <a:stretch>
-            <a:fillRect/>
-          </a:stretch>
-        </p:blipFill>
-        <p:spPr>
-          <a:xfrm>
-            <a:off x="4416552" y="1463040"/>
-            <a:ext cx="7223760" cy="4514850"/>
-          </a:xfrm>
-          <a:prstGeom prst="rect">
-            <a:avLst/>
-          </a:prstGeom>
-        </p:spPr>
-      </p:pic>
-      <p:sp>
-        <p:nvSpPr>
-          <p:cNvPr id="5" name="Caption"/>
-          <p:cNvSpPr txBox="1"/>
-          <p:nvPr/>
-        </p:nvSpPr>
-        <p:spPr>
-          <a:xfrm>
-            <a:off x="4416552" y="6053328"/>
-            <a:ext cx="6949440" cy="256032"/>
-          </a:xfrm>
-          <a:prstGeom prst="rect">
-            <a:avLst/>
-          </a:prstGeom>
-          <a:noFill/>
-          <a:ln/>
-        </p:spPr>
-        <p:txBody>
-          <a:bodyPr wrap="square" lIns="0" tIns="0" rIns="0" bIns="0" rtlCol="0" anchor="ctr"/>
-          <a:lstStyle/>
-          <a:p>
-            <a:pPr indent="0" marL="0">
-              <a:buNone/>
-            </a:pPr>
-            <a:r>
-              <a:rPr lang="en-US" sz="1000" i="1" dirty="0">
+        </p:spPr>
+      </p:sp>
+      <p:sp>
+        <p:nvSpPr>
+          <p:cNvPr id="6" name="Step 1 heading"/>
+          <p:cNvSpPr txBox="1"/>
+          <p:nvPr/>
+        </p:nvSpPr>
+        <p:spPr>
+          <a:xfrm>
+            <a:off x="548640" y="2743200"/>
+            <a:ext cx="3291840" cy="731520"/>
+          </a:xfrm>
+          <a:prstGeom prst="rect">
+            <a:avLst/>
+          </a:prstGeom>
+          <a:noFill/>
+          <a:ln/>
+        </p:spPr>
+        <p:txBody>
+          <a:bodyPr wrap="square" lIns="0" tIns="0" rIns="0" bIns="0" rtlCol="0" anchor="t"/>
+          <a:lstStyle/>
+          <a:p>
+            <a:pPr indent="0" marL="0">
+              <a:buNone/>
+            </a:pPr>
+            <a:r>
+              <a:rPr lang="en-US" sz="2200" b="1" dirty="0">
+                <a:solidFill>
+                  <a:schemeClr val="tx1"/>
+                </a:solidFill>
+              </a:rPr>
+              <a:t>Owners check in weekly</a:t>
+            </a:r>
+            <a:endParaRPr lang="en-US" sz="2200" dirty="0"/>
+          </a:p>
+        </p:txBody>
+      </p:sp>
+      <p:sp>
+        <p:nvSpPr>
+          <p:cNvPr id="7" name="Step 1 text"/>
+          <p:cNvSpPr txBox="1"/>
+          <p:nvPr/>
+        </p:nvSpPr>
+        <p:spPr>
+          <a:xfrm>
+            <a:off x="548640" y="3520440"/>
+            <a:ext cx="3291840" cy="1188720"/>
+          </a:xfrm>
+          <a:prstGeom prst="rect">
+            <a:avLst/>
+          </a:prstGeom>
+          <a:noFill/>
+          <a:ln/>
+        </p:spPr>
+        <p:txBody>
+          <a:bodyPr wrap="square" lIns="0" tIns="0" rIns="0" bIns="0" rtlCol="0" anchor="t"/>
+          <a:lstStyle/>
+          <a:p>
+            <a:pPr indent="0" marL="0">
+              <a:buNone/>
+            </a:pPr>
+            <a:r>
+              <a:rPr lang="en-US" sz="1500" dirty="0">
                 <a:solidFill>
                   <a:schemeClr val="accent5"/>
                 </a:solidFill>
               </a:rPr>
-              <a:t>Screenshot from the product, on a seeded 50-goal demo org</a:t>
-            </a:r>
-            <a:endParaRPr lang="en-US" sz="1000" dirty="0"/>
-          </a:p>
-        </p:txBody>
-      </p:sp>
-      <p:sp>
-        <p:nvSpPr>
-          <p:cNvPr id="6" name="Point 1 mark"/>
+              <a:t>Health, a short status, and any date changes. A routine week is one click: No change.</a:t>
+            </a:r>
+            <a:endParaRPr lang="en-US" sz="1500" dirty="0"/>
+          </a:p>
+        </p:txBody>
+      </p:sp>
+      <p:sp>
+        <p:nvSpPr>
+          <p:cNvPr id="8" name="Step 2 circle"/>
           <p:cNvSpPr/>
           <p:nvPr/>
         </p:nvSpPr>
         <p:spPr>
           <a:xfrm>
-            <a:off x="548640" y="1664208"/>
-            <a:ext cx="182880" cy="182880"/>
-          </a:xfrm>
-          <a:prstGeom prst="rect">
+            <a:off x="4370832" y="1783080"/>
+            <a:ext cx="731520" cy="731520"/>
+          </a:xfrm>
+          <a:prstGeom prst="ellipse">
             <a:avLst/>
           </a:prstGeom>
           <a:solidFill>
-            <a:schemeClr val="accent5"/>
+            <a:schemeClr val="accent1"/>
           </a:solidFill>
           <a:ln w="12700">
             <a:solidFill>
-              <a:schemeClr val="accent5"/>
+              <a:schemeClr val="accent1"/>
             </a:solidFill>
             <a:prstDash val="solid"/>
           </a:ln>
@@ -4016,14 +5747,74 @@
       </p:sp>
       <p:sp>
         <p:nvSpPr>
-          <p:cNvPr id="7" name="Point 1 heading"/>
-          <p:cNvSpPr txBox="1"/>
-          <p:nvPr/>
-        </p:nvSpPr>
-        <p:spPr>
-          <a:xfrm>
-            <a:off x="896112" y="1600200"/>
-            <a:ext cx="3172968" cy="329184"/>
+          <p:cNvPr id="9" name="Step 2 number"/>
+          <p:cNvSpPr txBox="1"/>
+          <p:nvPr/>
+        </p:nvSpPr>
+        <p:spPr>
+          <a:xfrm>
+            <a:off x="4370832" y="1783080"/>
+            <a:ext cx="731520" cy="731520"/>
+          </a:xfrm>
+          <a:prstGeom prst="rect">
+            <a:avLst/>
+          </a:prstGeom>
+          <a:noFill/>
+          <a:ln/>
+        </p:spPr>
+        <p:txBody>
+          <a:bodyPr wrap="square" lIns="0" tIns="0" rIns="0" bIns="0" rtlCol="0" anchor="ctr"/>
+          <a:lstStyle/>
+          <a:p>
+            <a:pPr algn="ctr" indent="0" marL="0">
+              <a:buNone/>
+            </a:pPr>
+            <a:r>
+              <a:rPr lang="en-US" sz="2800" b="1" dirty="0">
+                <a:solidFill>
+                  <a:schemeClr val="bg1"/>
+                </a:solidFill>
+              </a:rPr>
+              <a:t>2</a:t>
+            </a:r>
+            <a:endParaRPr lang="en-US" sz="2800" dirty="0"/>
+          </a:p>
+        </p:txBody>
+      </p:sp>
+      <p:sp>
+        <p:nvSpPr>
+          <p:cNvPr id="10" name="Arrow 2"/>
+          <p:cNvSpPr/>
+          <p:nvPr/>
+        </p:nvSpPr>
+        <p:spPr>
+          <a:xfrm>
+            <a:off x="5285232" y="2148840"/>
+            <a:ext cx="2724912" cy="0"/>
+          </a:xfrm>
+          <a:prstGeom prst="line">
+            <a:avLst/>
+          </a:prstGeom>
+          <a:noFill/>
+          <a:ln w="25400">
+            <a:solidFill>
+              <a:schemeClr val="accent6"/>
+            </a:solidFill>
+            <a:prstDash val="solid"/>
+            <a:tailEnd type="triangle"/>
+          </a:ln>
+        </p:spPr>
+      </p:sp>
+      <p:sp>
+        <p:nvSpPr>
+          <p:cNvPr id="11" name="Step 2 heading"/>
+          <p:cNvSpPr txBox="1"/>
+          <p:nvPr/>
+        </p:nvSpPr>
+        <p:spPr>
+          <a:xfrm>
+            <a:off x="4370832" y="2743200"/>
+            <a:ext cx="3291840" cy="731520"/>
           </a:xfrm>
           <a:prstGeom prst="rect">
             <a:avLst/>
@@ -4039,27 +5830,27 @@
               <a:buNone/>
             </a:pPr>
             <a:r>
-              <a:rPr lang="en-US" sz="1800" b="1" dirty="0">
+              <a:rPr lang="en-US" sz="2200" b="1" dirty="0">
                 <a:solidFill>
                   <a:schemeClr val="tx1"/>
                 </a:solidFill>
               </a:rPr>
-              <a:t>Stale is a first-class signal</a:t>
-            </a:r>
-            <a:endParaRPr lang="en-US" sz="1800" dirty="0"/>
-          </a:p>
-        </p:txBody>
-      </p:sp>
-      <p:sp>
-        <p:nvSpPr>
-          <p:cNvPr id="8" name="Point 1 text"/>
-          <p:cNvSpPr txBox="1"/>
-          <p:nvPr/>
-        </p:nvSpPr>
-        <p:spPr>
-          <a:xfrm>
-            <a:off x="896112" y="1965960"/>
-            <a:ext cx="3172968" cy="914400"/>
+              <a:t>Risks flags what needs attention</a:t>
+            </a:r>
+            <a:endParaRPr lang="en-US" sz="2200" dirty="0"/>
+          </a:p>
+        </p:txBody>
+      </p:sp>
+      <p:sp>
+        <p:nvSpPr>
+          <p:cNvPr id="12" name="Step 2 text"/>
+          <p:cNvSpPr txBox="1"/>
+          <p:nvPr/>
+        </p:nvSpPr>
+        <p:spPr>
+          <a:xfrm>
+            <a:off x="4370832" y="3520440"/>
+            <a:ext cx="3291840" cy="1188720"/>
           </a:xfrm>
           <a:prstGeom prst="rect">
             <a:avLst/>
@@ -4075,37 +5866,37 @@
               <a:buNone/>
             </a:pPr>
             <a:r>
-              <a:rPr lang="en-US" sz="1400" dirty="0">
+              <a:rPr lang="en-US" sz="1500" dirty="0">
                 <a:solidFill>
                   <a:schemeClr val="accent5"/>
                 </a:solidFill>
               </a:rPr>
-              <a:t>A goal past its check-in cadence is flagged, even when its last status was Green.</a:t>
-            </a:r>
-            <a:endParaRPr lang="en-US" sz="1400" dirty="0"/>
-          </a:p>
-        </p:txBody>
-      </p:sp>
-      <p:sp>
-        <p:nvSpPr>
-          <p:cNvPr id="9" name="Point 2 mark"/>
+              <a:t>Red, Stale, unaligned and conflicting goals, grouped by who has to act, each with one fix.</a:t>
+            </a:r>
+            <a:endParaRPr lang="en-US" sz="1500" dirty="0"/>
+          </a:p>
+        </p:txBody>
+      </p:sp>
+      <p:sp>
+        <p:nvSpPr>
+          <p:cNvPr id="13" name="Step 3 circle"/>
           <p:cNvSpPr/>
           <p:nvPr/>
         </p:nvSpPr>
         <p:spPr>
           <a:xfrm>
-            <a:off x="548640" y="3081528"/>
-            <a:ext cx="182880" cy="182880"/>
-          </a:xfrm>
-          <a:prstGeom prst="triangle">
+            <a:off x="8193024" y="1783080"/>
+            <a:ext cx="731520" cy="731520"/>
+          </a:xfrm>
+          <a:prstGeom prst="ellipse">
             <a:avLst/>
           </a:prstGeom>
           <a:solidFill>
-            <a:schemeClr val="accent3"/>
+            <a:schemeClr val="accent1"/>
           </a:solidFill>
           <a:ln w="12700">
             <a:solidFill>
-              <a:schemeClr val="accent3"/>
+              <a:schemeClr val="accent1"/>
             </a:solidFill>
             <a:prstDash val="solid"/>
           </a:ln>
@@ -4113,14 +5904,50 @@
       </p:sp>
       <p:sp>
         <p:nvSpPr>
-          <p:cNvPr id="10" name="Point 2 heading"/>
-          <p:cNvSpPr txBox="1"/>
-          <p:nvPr/>
-        </p:nvSpPr>
-        <p:spPr>
-          <a:xfrm>
-            <a:off x="896112" y="3017520"/>
-            <a:ext cx="3172968" cy="329184"/>
+          <p:cNvPr id="14" name="Step 3 number"/>
+          <p:cNvSpPr txBox="1"/>
+          <p:nvPr/>
+        </p:nvSpPr>
+        <p:spPr>
+          <a:xfrm>
+            <a:off x="8193024" y="1783080"/>
+            <a:ext cx="731520" cy="731520"/>
+          </a:xfrm>
+          <a:prstGeom prst="rect">
+            <a:avLst/>
+          </a:prstGeom>
+          <a:noFill/>
+          <a:ln/>
+        </p:spPr>
+        <p:txBody>
+          <a:bodyPr wrap="square" lIns="0" tIns="0" rIns="0" bIns="0" rtlCol="0" anchor="ctr"/>
+          <a:lstStyle/>
+          <a:p>
+            <a:pPr algn="ctr" indent="0" marL="0">
+              <a:buNone/>
+            </a:pPr>
+            <a:r>
+              <a:rPr lang="en-US" sz="2800" b="1" dirty="0">
+                <a:solidFill>
+                  <a:schemeClr val="bg1"/>
+                </a:solidFill>
+              </a:rPr>
+              <a:t>3</a:t>
+            </a:r>
+            <a:endParaRPr lang="en-US" sz="2800" dirty="0"/>
+          </a:p>
+        </p:txBody>
+      </p:sp>
+      <p:sp>
+        <p:nvSpPr>
+          <p:cNvPr id="15" name="Step 3 heading"/>
+          <p:cNvSpPr txBox="1"/>
+          <p:nvPr/>
+        </p:nvSpPr>
+        <p:spPr>
+          <a:xfrm>
+            <a:off x="8193024" y="2743200"/>
+            <a:ext cx="3291840" cy="731520"/>
           </a:xfrm>
           <a:prstGeom prst="rect">
             <a:avLst/>
@@ -4136,27 +5963,27 @@
               <a:buNone/>
             </a:pPr>
             <a:r>
-              <a:rPr lang="en-US" sz="1800" b="1" dirty="0">
+              <a:rPr lang="en-US" sz="2200" b="1" dirty="0">
                 <a:solidFill>
                   <a:schemeClr val="tx1"/>
                 </a:solidFill>
               </a:rPr>
-              <a:t>Grouped by who must act</a:t>
-            </a:r>
-            <a:endParaRPr lang="en-US" sz="1800" dirty="0"/>
-          </a:p>
-        </p:txBody>
-      </p:sp>
-      <p:sp>
-        <p:nvSpPr>
-          <p:cNvPr id="11" name="Point 2 text"/>
-          <p:cNvSpPr txBox="1"/>
-          <p:nvPr/>
-        </p:nvSpPr>
-        <p:spPr>
-          <a:xfrm>
-            <a:off x="896112" y="3383280"/>
-            <a:ext cx="3172968" cy="914400"/>
+              <a:t>The Report writes itself</a:t>
+            </a:r>
+            <a:endParaRPr lang="en-US" sz="2200" dirty="0"/>
+          </a:p>
+        </p:txBody>
+      </p:sp>
+      <p:sp>
+        <p:nvSpPr>
+          <p:cNvPr id="16" name="Step 3 text"/>
+          <p:cNvSpPr txBox="1"/>
+          <p:nvPr/>
+        </p:nvSpPr>
+        <p:spPr>
+          <a:xfrm>
+            <a:off x="8193024" y="3520440"/>
+            <a:ext cx="3291840" cy="1188720"/>
           </a:xfrm>
           <a:prstGeom prst="rect">
             <a:avLst/>
@@ -4172,37 +5999,39 @@
               <a:buNone/>
             </a:pPr>
             <a:r>
-              <a:rPr lang="en-US" sz="1400" dirty="0">
+              <a:rPr lang="en-US" sz="1500" dirty="0">
                 <a:solidFill>
                   <a:schemeClr val="accent5"/>
                 </a:solidFill>
               </a:rPr>
-              <a:t>Owner needs to update, plan doesn't fit, or needs an Admin.</a:t>
-            </a:r>
-            <a:endParaRPr lang="en-US" sz="1400" dirty="0"/>
-          </a:p>
-        </p:txBody>
-      </p:sp>
-      <p:sp>
-        <p:nvSpPr>
-          <p:cNvPr id="12" name="Point 3 mark"/>
+              <a:t>Exceptions in full, on-track goals in one line each, with what changed since the last review.</a:t>
+            </a:r>
+            <a:endParaRPr lang="en-US" sz="1500" dirty="0"/>
+          </a:p>
+        </p:txBody>
+      </p:sp>
+      <p:sp>
+        <p:nvSpPr>
+          <p:cNvPr id="17" name="Positioning band"/>
           <p:cNvSpPr/>
           <p:nvPr/>
         </p:nvSpPr>
         <p:spPr>
           <a:xfrm>
-            <a:off x="548640" y="4498848"/>
-            <a:ext cx="182880" cy="182880"/>
-          </a:xfrm>
-          <a:prstGeom prst="ellipse">
-            <a:avLst/>
+            <a:off x="548640" y="4983480"/>
+            <a:ext cx="11091672" cy="1005840"/>
+          </a:xfrm>
+          <a:prstGeom prst="roundRect">
+            <a:avLst>
+              <a:gd name="adj" fmla="val 7273"/>
+            </a:avLst>
           </a:prstGeom>
           <a:solidFill>
-            <a:schemeClr val="accent4"/>
+            <a:schemeClr val="bg2"/>
           </a:solidFill>
           <a:ln w="12700">
             <a:solidFill>
-              <a:schemeClr val="accent4"/>
+              <a:schemeClr val="bg2"/>
             </a:solidFill>
             <a:prstDash val="solid"/>
           </a:ln>
@@ -4210,73 +6039,48 @@
       </p:sp>
       <p:sp>
         <p:nvSpPr>
-          <p:cNvPr id="13" name="Point 3 heading"/>
-          <p:cNvSpPr txBox="1"/>
-          <p:nvPr/>
-        </p:nvSpPr>
-        <p:spPr>
-          <a:xfrm>
-            <a:off x="896112" y="4434840"/>
-            <a:ext cx="3172968" cy="329184"/>
-          </a:xfrm>
-          <a:prstGeom prst="rect">
-            <a:avLst/>
-          </a:prstGeom>
-          <a:noFill/>
-          <a:ln/>
-        </p:spPr>
-        <p:txBody>
-          <a:bodyPr wrap="square" lIns="0" tIns="0" rIns="0" bIns="0" rtlCol="0" anchor="t"/>
-          <a:lstStyle/>
-          <a:p>
-            <a:pPr indent="0" marL="0">
-              <a:buNone/>
-            </a:pPr>
-            <a:r>
-              <a:rPr lang="en-US" sz="1800" b="1" dirty="0">
-                <a:solidFill>
-                  <a:schemeClr val="tx1"/>
-                </a:solidFill>
-              </a:rPr>
-              <a:t>One fix per row</a:t>
-            </a:r>
-            <a:endParaRPr lang="en-US" sz="1800" dirty="0"/>
-          </a:p>
-        </p:txBody>
-      </p:sp>
-      <p:sp>
-        <p:nvSpPr>
-          <p:cNvPr id="14" name="Point 3 text"/>
-          <p:cNvSpPr txBox="1"/>
-          <p:nvPr/>
-        </p:nvSpPr>
-        <p:spPr>
-          <a:xfrm>
-            <a:off x="896112" y="4800600"/>
-            <a:ext cx="3172968" cy="914400"/>
-          </a:xfrm>
-          <a:prstGeom prst="rect">
-            <a:avLst/>
-          </a:prstGeom>
-          <a:noFill/>
-          <a:ln/>
-        </p:spPr>
-        <p:txBody>
-          <a:bodyPr wrap="square" lIns="0" tIns="0" rIns="0" bIns="0" rtlCol="0" anchor="t"/>
-          <a:lstStyle/>
-          <a:p>
-            <a:pPr indent="0" marL="0">
-              <a:buNone/>
-            </a:pPr>
-            <a:r>
-              <a:rPr lang="en-US" sz="1400" dirty="0">
+          <p:cNvPr id="18" name="Positioning text"/>
+          <p:cNvSpPr txBox="1"/>
+          <p:nvPr/>
+        </p:nvSpPr>
+        <p:spPr>
+          <a:xfrm>
+            <a:off x="822960" y="4983480"/>
+            <a:ext cx="10515600" cy="1005840"/>
+          </a:xfrm>
+          <a:prstGeom prst="rect">
+            <a:avLst/>
+          </a:prstGeom>
+          <a:noFill/>
+          <a:ln/>
+        </p:spPr>
+        <p:txBody>
+          <a:bodyPr wrap="square" lIns="0" tIns="0" rIns="0" bIns="0" rtlCol="0" anchor="ctr"/>
+          <a:lstStyle/>
+          <a:p>
+            <a:pPr indent="0" marL="0">
+              <a:buNone/>
+            </a:pPr>
+            <a:r>
+              <a:rPr lang="en-US" sz="1700" b="1" dirty="0">
+                <a:solidFill>
+                  <a:schemeClr val="tx2"/>
+                </a:solidFill>
+              </a:rPr>
+              <a:t>The rigor of an MBR, the ease of a 5-15, the org-wide view of OKRs.</a:t>
+            </a:r>
+            <a:pPr indent="0" marL="0">
+              <a:buNone/>
+            </a:pPr>
+            <a:r>
+              <a:rPr lang="en-US" sz="1700" dirty="0">
                 <a:solidFill>
                   <a:schemeClr val="accent5"/>
                 </a:solidFill>
               </a:rPr>
-              <a:t>Nudge the owner, suggest a parent, or compare dates. No looking up who owns what.</a:t>
-            </a:r>
-            <a:endParaRPr lang="en-US" sz="1400" dirty="0"/>
+              <a:t>  Managers supply the data cheaply; leaders read it easily.</a:t>
+            </a:r>
+            <a:endParaRPr lang="en-US" sz="1700" dirty="0"/>
           </a:p>
         </p:txBody>
       </p:sp>
@@ -4382,7 +6186,7 @@
                   <a:schemeClr val="tx2"/>
                 </a:solidFill>
               </a:rPr>
-              <a:t>Bad news comes with a plan and a date</a:t>
+              <a:t>Find trouble: a silent goal is as loud as a Red one</a:t>
             </a:r>
             <a:endParaRPr lang="en-US" sz="3600" dirty="0"/>
           </a:p>
@@ -4390,13 +6194,13 @@
       </p:sp>
       <p:sp>
         <p:nvSpPr>
-          <p:cNvPr id="3" name="Goal page frame"/>
+          <p:cNvPr id="3" name="Risks page frame"/>
           <p:cNvSpPr/>
           <p:nvPr/>
         </p:nvSpPr>
         <p:spPr>
           <a:xfrm>
-            <a:off x="548640" y="1463040"/>
+            <a:off x="4416552" y="1463040"/>
             <a:ext cx="7223760" cy="4514850"/>
           </a:xfrm>
           <a:prstGeom prst="rect">
@@ -4422,7 +6226,7 @@
       </p:sp>
       <p:pic>
         <p:nvPicPr>
-          <p:cNvPr id="4" name="Goal page" descr="A Red goal page showing latest status, Path to Green and milestones">    </p:cNvPr>
+          <p:cNvPr id="4" name="Risks page" descr="The Risks page with ten flagged goals in three groups">    </p:cNvPr>
           <p:cNvPicPr>
             <a:picLocks noChangeAspect="1"/>
           </p:cNvPicPr>
@@ -4436,7 +6240,7 @@
         </p:blipFill>
         <p:spPr>
           <a:xfrm>
-            <a:off x="548640" y="1463040"/>
+            <a:off x="4416552" y="1463040"/>
             <a:ext cx="7223760" cy="4514850"/>
           </a:xfrm>
           <a:prstGeom prst="rect">
@@ -4452,7 +6256,7 @@
         </p:nvSpPr>
         <p:spPr>
           <a:xfrm>
-            <a:off x="548640" y="6053328"/>
+            <a:off x="4416552" y="6053328"/>
             <a:ext cx="6949440" cy="256032"/>
           </a:xfrm>
           <a:prstGeom prst="rect">
@@ -4474,7 +6278,7 @@
                   <a:schemeClr val="accent5"/>
                 </a:solidFill>
               </a:rPr>
-              <a:t>Screenshot from the product, on a seeded 50-goal demo org</a:t>
+              <a:t>Screenshots from the product, on a seeded 50-goal demo org</a:t>
             </a:r>
             <a:endParaRPr lang="en-US" sz="1000" dirty="0"/>
           </a:p>
@@ -4488,18 +6292,18 @@
         </p:nvSpPr>
         <p:spPr>
           <a:xfrm>
-            <a:off x="8229600" y="1664208"/>
+            <a:off x="548640" y="1664208"/>
             <a:ext cx="182880" cy="182880"/>
           </a:xfrm>
           <a:prstGeom prst="rect">
             <a:avLst/>
           </a:prstGeom>
           <a:solidFill>
-            <a:schemeClr val="accent2"/>
+            <a:schemeClr val="accent5"/>
           </a:solidFill>
           <a:ln w="12700">
             <a:solidFill>
-              <a:schemeClr val="accent2"/>
+              <a:schemeClr val="accent5"/>
             </a:solidFill>
             <a:prstDash val="solid"/>
           </a:ln>
@@ -4513,8 +6317,8 @@
         </p:nvSpPr>
         <p:spPr>
           <a:xfrm>
-            <a:off x="8577072" y="1600200"/>
-            <a:ext cx="3063240" cy="329184"/>
+            <a:off x="896112" y="1600200"/>
+            <a:ext cx="3172968" cy="329184"/>
           </a:xfrm>
           <a:prstGeom prst="rect">
             <a:avLst/>
@@ -4535,7 +6339,7 @@
                   <a:schemeClr val="tx1"/>
                 </a:solidFill>
               </a:rPr>
-              <a:t>Path to Green is required</a:t>
+              <a:t>Stale is a first-class signal</a:t>
             </a:r>
             <a:endParaRPr lang="en-US" sz="1800" dirty="0"/>
           </a:p>
@@ -4549,8 +6353,8 @@
         </p:nvSpPr>
         <p:spPr>
           <a:xfrm>
-            <a:off x="8577072" y="1965960"/>
-            <a:ext cx="3063240" cy="914400"/>
+            <a:off x="896112" y="1965960"/>
+            <a:ext cx="3172968" cy="914400"/>
           </a:xfrm>
           <a:prstGeom prst="rect">
             <a:avLst/>
@@ -4571,7 +6375,7 @@
                   <a:schemeClr val="accent5"/>
                 </a:solidFill>
               </a:rPr>
-              <a:t>A Yellow or Red check-in must state the plan, or the help needed, and a back-to-Green date.</a:t>
+              <a:t>A goal past its check-in cadence is flagged, even when its last status was Green.</a:t>
             </a:r>
             <a:endParaRPr lang="en-US" sz="1400" dirty="0"/>
           </a:p>
@@ -4585,7 +6389,7 @@
         </p:nvSpPr>
         <p:spPr>
           <a:xfrm>
-            <a:off x="8229600" y="3081528"/>
+            <a:off x="548640" y="3081528"/>
             <a:ext cx="182880" cy="182880"/>
           </a:xfrm>
           <a:prstGeom prst="triangle">
@@ -4610,8 +6414,8 @@
         </p:nvSpPr>
         <p:spPr>
           <a:xfrm>
-            <a:off x="8577072" y="3017520"/>
-            <a:ext cx="3063240" cy="329184"/>
+            <a:off x="896112" y="3017520"/>
+            <a:ext cx="3172968" cy="329184"/>
           </a:xfrm>
           <a:prstGeom prst="rect">
             <a:avLst/>
@@ -4632,7 +6436,7 @@
                   <a:schemeClr val="tx1"/>
                 </a:solidFill>
               </a:rPr>
-              <a:t>Overdue plans are flagged</a:t>
+              <a:t>Grouped by who must act</a:t>
             </a:r>
             <a:endParaRPr lang="en-US" sz="1800" dirty="0"/>
           </a:p>
@@ -4646,8 +6450,8 @@
         </p:nvSpPr>
         <p:spPr>
           <a:xfrm>
-            <a:off x="8577072" y="3383280"/>
-            <a:ext cx="3063240" cy="914400"/>
+            <a:off x="896112" y="3383280"/>
+            <a:ext cx="3172968" cy="914400"/>
           </a:xfrm>
           <a:prstGeom prst="rect">
             <a:avLst/>
@@ -4668,7 +6472,7 @@
                   <a:schemeClr val="accent5"/>
                 </a:solidFill>
               </a:rPr>
-              <a:t>If that date passes and the goal still isn't Green, it is flagged as loudly as Red.</a:t>
+              <a:t>Owner needs to update, plan doesn't fit, or needs an Admin.</a:t>
             </a:r>
             <a:endParaRPr lang="en-US" sz="1400" dirty="0"/>
           </a:p>
@@ -4682,7 +6486,7 @@
         </p:nvSpPr>
         <p:spPr>
           <a:xfrm>
-            <a:off x="8229600" y="4498848"/>
+            <a:off x="548640" y="4498848"/>
             <a:ext cx="182880" cy="182880"/>
           </a:xfrm>
           <a:prstGeom prst="ellipse">
@@ -4707,8 +6511,8 @@
         </p:nvSpPr>
         <p:spPr>
           <a:xfrm>
-            <a:off x="8577072" y="4434840"/>
-            <a:ext cx="3063240" cy="329184"/>
+            <a:off x="896112" y="4434840"/>
+            <a:ext cx="3172968" cy="329184"/>
           </a:xfrm>
           <a:prstGeom prst="rect">
             <a:avLst/>
@@ -4729,7 +6533,7 @@
                   <a:schemeClr val="tx1"/>
                 </a:solidFill>
               </a:rPr>
-              <a:t>The history is kept</a:t>
+              <a:t>One fix per row</a:t>
             </a:r>
             <a:endParaRPr lang="en-US" sz="1800" dirty="0"/>
           </a:p>
@@ -4743,8 +6547,8 @@
         </p:nvSpPr>
         <p:spPr>
           <a:xfrm>
-            <a:off x="8577072" y="4800600"/>
-            <a:ext cx="3063240" cy="914400"/>
+            <a:off x="896112" y="4800600"/>
+            <a:ext cx="3172968" cy="914400"/>
           </a:xfrm>
           <a:prstGeom prst="rect">
             <a:avLst/>
@@ -4765,7 +6569,7 @@
                   <a:schemeClr val="accent5"/>
                 </a:solidFill>
               </a:rPr>
-              <a:t>Every check-in, date slip and ownership change, week by week.</a:t>
+              <a:t>Nudge the owner, suggest a parent, or compare dates. No looking up who owns what.</a:t>
             </a:r>
             <a:endParaRPr lang="en-US" sz="1400" dirty="0"/>
           </a:p>
@@ -4873,7 +6677,7 @@
                   <a:schemeClr val="tx2"/>
                 </a:solidFill>
               </a:rPr>
-              <a:t>A check-in takes a manager about a minute</a:t>
+              <a:t>Understand it: the plan, the date, the review</a:t>
             </a:r>
             <a:endParaRPr lang="en-US" sz="3600" dirty="0"/>
           </a:p>
@@ -4881,14 +6685,14 @@
       </p:sp>
       <p:sp>
         <p:nvSpPr>
-          <p:cNvPr id="3" name="Video frame"/>
+          <p:cNvPr id="3" name="Goal page frame"/>
           <p:cNvSpPr/>
           <p:nvPr/>
         </p:nvSpPr>
         <p:spPr>
           <a:xfrm>
             <a:off x="548640" y="1463040"/>
-            <a:ext cx="7315200" cy="4114800"/>
+            <a:ext cx="5394960" cy="3371850"/>
           </a:xfrm>
           <a:prstGeom prst="rect">
             <a:avLst/>
@@ -4913,23 +6717,14 @@
       </p:sp>
       <p:pic>
         <p:nvPicPr>
-          <p:cNvPr id="3" name="Check-in video">
-            <a:hlinkClick r:id="" action="ppaction://media"/>
-          </p:cNvPr>
+          <p:cNvPr id="4" name="Goal page" descr="A Red goal's page showing its latest status and Path to Green">    </p:cNvPr>
           <p:cNvPicPr>
             <a:picLocks noChangeAspect="1"/>
           </p:cNvPicPr>
-          <p:nvPr>
-            <a:videoFile r:link="rId1"/>
-            <p:extLst>
-              <p:ext uri="{DAA4B4D4-6D71-4841-9C94-3DE7FCFB9230}">
-                <p14:media xmlns:p14="http://schemas.microsoft.com/office/powerpoint/2010/main" r:embed="rId2"/>
-              </p:ext>
-            </p:extLst>
-          </p:nvPr>
+          <p:nvPr/>
         </p:nvPicPr>
         <p:blipFill>
-          <a:blip r:embed="rId3"/>
+          <a:blip r:embed="rId1"/>
           <a:stretch>
             <a:fillRect/>
           </a:stretch>
@@ -4937,7 +6732,7 @@
         <p:spPr>
           <a:xfrm>
             <a:off x="548640" y="1463040"/>
-            <a:ext cx="7315200" cy="4114800"/>
+            <a:ext cx="5394960" cy="3371850"/>
           </a:xfrm>
           <a:prstGeom prst="rect">
             <a:avLst/>
@@ -4946,49 +6741,166 @@
       </p:pic>
       <p:sp>
         <p:nvSpPr>
-          <p:cNvPr id="5" name="Caption"/>
-          <p:cNvSpPr txBox="1"/>
-          <p:nvPr/>
-        </p:nvSpPr>
-        <p:spPr>
-          <a:xfrm>
-            <a:off x="548640" y="5715000"/>
-            <a:ext cx="7315200" cy="256032"/>
-          </a:xfrm>
-          <a:prstGeom prst="rect">
-            <a:avLst/>
-          </a:prstGeom>
-          <a:noFill/>
-          <a:ln/>
-        </p:spPr>
-        <p:txBody>
-          <a:bodyPr wrap="square" lIns="0" tIns="0" rIns="0" bIns="0" rtlCol="0" anchor="ctr"/>
-          <a:lstStyle/>
-          <a:p>
-            <a:pPr indent="0" marL="0">
-              <a:buNone/>
-            </a:pPr>
-            <a:r>
-              <a:rPr lang="en-US" sz="1000" i="1" dirty="0">
+          <p:cNvPr id="5" name="Published report frame"/>
+          <p:cNvSpPr/>
+          <p:nvPr/>
+        </p:nvSpPr>
+        <p:spPr>
+          <a:xfrm>
+            <a:off x="6245352" y="1463040"/>
+            <a:ext cx="5394960" cy="3371850"/>
+          </a:xfrm>
+          <a:prstGeom prst="rect">
+            <a:avLst/>
+          </a:prstGeom>
+          <a:solidFill>
+            <a:schemeClr val="bg1"/>
+          </a:solidFill>
+          <a:ln w="12700">
+            <a:solidFill>
+              <a:schemeClr val="accent6"/>
+            </a:solidFill>
+            <a:prstDash val="solid"/>
+          </a:ln>
+          <a:effectLst>
+            <a:outerShdw sx="100000" sy="100000" kx="0" ky="0" algn="bl" rotWithShape="0" blurRad="152400" dist="50800" dir="5400000">
+              <a:srgbClr val="134E4A">
+                <a:alpha val="18000"/>
+              </a:srgbClr>
+            </a:outerShdw>
+          </a:effectLst>
+        </p:spPr>
+      </p:sp>
+      <p:pic>
+        <p:nvPicPr>
+          <p:cNvPr id="6" name="Published report" descr="A published monthly review with a Health summary and a Red goal in full">    </p:cNvPr>
+          <p:cNvPicPr>
+            <a:picLocks noChangeAspect="1"/>
+          </p:cNvPicPr>
+          <p:nvPr/>
+        </p:nvPicPr>
+        <p:blipFill>
+          <a:blip r:embed="rId2"/>
+          <a:stretch>
+            <a:fillRect/>
+          </a:stretch>
+        </p:blipFill>
+        <p:spPr>
+          <a:xfrm>
+            <a:off x="6245352" y="1463040"/>
+            <a:ext cx="5394960" cy="3371850"/>
+          </a:xfrm>
+          <a:prstGeom prst="rect">
+            <a:avLst/>
+          </a:prstGeom>
+        </p:spPr>
+      </p:pic>
+      <p:sp>
+        <p:nvSpPr>
+          <p:cNvPr id="7" name="Caption 1 mark"/>
+          <p:cNvSpPr/>
+          <p:nvPr/>
+        </p:nvSpPr>
+        <p:spPr>
+          <a:xfrm>
+            <a:off x="548640" y="5138928"/>
+            <a:ext cx="182880" cy="182880"/>
+          </a:xfrm>
+          <a:prstGeom prst="rect">
+            <a:avLst/>
+          </a:prstGeom>
+          <a:solidFill>
+            <a:schemeClr val="accent2"/>
+          </a:solidFill>
+          <a:ln w="12700">
+            <a:solidFill>
+              <a:schemeClr val="accent2"/>
+            </a:solidFill>
+            <a:prstDash val="solid"/>
+          </a:ln>
+        </p:spPr>
+      </p:sp>
+      <p:sp>
+        <p:nvSpPr>
+          <p:cNvPr id="8" name="Caption 1 heading"/>
+          <p:cNvSpPr txBox="1"/>
+          <p:nvPr/>
+        </p:nvSpPr>
+        <p:spPr>
+          <a:xfrm>
+            <a:off x="896112" y="5074920"/>
+            <a:ext cx="5029200" cy="329184"/>
+          </a:xfrm>
+          <a:prstGeom prst="rect">
+            <a:avLst/>
+          </a:prstGeom>
+          <a:noFill/>
+          <a:ln/>
+        </p:spPr>
+        <p:txBody>
+          <a:bodyPr wrap="square" lIns="0" tIns="0" rIns="0" bIns="0" rtlCol="0" anchor="t"/>
+          <a:lstStyle/>
+          <a:p>
+            <a:pPr indent="0" marL="0">
+              <a:buNone/>
+            </a:pPr>
+            <a:r>
+              <a:rPr lang="en-US" sz="1800" b="1" dirty="0">
+                <a:solidFill>
+                  <a:schemeClr val="tx1"/>
+                </a:solidFill>
+              </a:rPr>
+              <a:t>Bad news comes with a plan</a:t>
+            </a:r>
+            <a:endParaRPr lang="en-US" sz="1800" dirty="0"/>
+          </a:p>
+        </p:txBody>
+      </p:sp>
+      <p:sp>
+        <p:nvSpPr>
+          <p:cNvPr id="9" name="Caption 1 text"/>
+          <p:cNvSpPr txBox="1"/>
+          <p:nvPr/>
+        </p:nvSpPr>
+        <p:spPr>
+          <a:xfrm>
+            <a:off x="896112" y="5422392"/>
+            <a:ext cx="5029200" cy="566928"/>
+          </a:xfrm>
+          <a:prstGeom prst="rect">
+            <a:avLst/>
+          </a:prstGeom>
+          <a:noFill/>
+          <a:ln/>
+        </p:spPr>
+        <p:txBody>
+          <a:bodyPr wrap="square" lIns="0" tIns="0" rIns="0" bIns="0" rtlCol="0" anchor="t"/>
+          <a:lstStyle/>
+          <a:p>
+            <a:pPr indent="0" marL="0">
+              <a:buNone/>
+            </a:pPr>
+            <a:r>
+              <a:rPr lang="en-US" sz="1400" dirty="0">
                 <a:solidFill>
                   <a:schemeClr val="accent5"/>
                 </a:solidFill>
               </a:rPr>
-              <a:t>20-second recording of a real check-in on the demo org. Click to play.</a:t>
-            </a:r>
-            <a:endParaRPr lang="en-US" sz="1000" dirty="0"/>
-          </a:p>
-        </p:txBody>
-      </p:sp>
-      <p:sp>
-        <p:nvSpPr>
-          <p:cNvPr id="6" name="Point 1 mark"/>
+              <a:t>A Yellow or Red check-in must state a Path to Green and a back-to-Green date. Miss that date and the goal is flagged.</a:t>
+            </a:r>
+            <a:endParaRPr lang="en-US" sz="1400" dirty="0"/>
+          </a:p>
+        </p:txBody>
+      </p:sp>
+      <p:sp>
+        <p:nvSpPr>
+          <p:cNvPr id="10" name="Caption 2 mark"/>
           <p:cNvSpPr/>
           <p:nvPr/>
         </p:nvSpPr>
         <p:spPr>
           <a:xfrm>
-            <a:off x="8321040" y="1664208"/>
+            <a:off x="6245352" y="5138928"/>
             <a:ext cx="182880" cy="182880"/>
           </a:xfrm>
           <a:prstGeom prst="ellipse">
@@ -5007,14 +6919,14 @@
       </p:sp>
       <p:sp>
         <p:nvSpPr>
-          <p:cNvPr id="7" name="Point 1 heading"/>
-          <p:cNvSpPr txBox="1"/>
-          <p:nvPr/>
-        </p:nvSpPr>
-        <p:spPr>
-          <a:xfrm>
-            <a:off x="8668512" y="1600200"/>
-            <a:ext cx="2971800" cy="329184"/>
+          <p:cNvPr id="11" name="Caption 2 heading"/>
+          <p:cNvSpPr txBox="1"/>
+          <p:nvPr/>
+        </p:nvSpPr>
+        <p:spPr>
+          <a:xfrm>
+            <a:off x="6592824" y="5074920"/>
+            <a:ext cx="5029200" cy="329184"/>
           </a:xfrm>
           <a:prstGeom prst="rect">
             <a:avLst/>
@@ -5035,7 +6947,7 @@
                   <a:schemeClr val="tx1"/>
                 </a:solidFill>
               </a:rPr>
-              <a:t>Home says what's due</a:t>
+              <a:t>The review writes itself</a:t>
             </a:r>
             <a:endParaRPr lang="en-US" sz="1800" dirty="0"/>
           </a:p>
@@ -5043,14 +6955,14 @@
       </p:sp>
       <p:sp>
         <p:nvSpPr>
-          <p:cNvPr id="8" name="Point 1 text"/>
-          <p:cNvSpPr txBox="1"/>
-          <p:nvPr/>
-        </p:nvSpPr>
-        <p:spPr>
-          <a:xfrm>
-            <a:off x="8668512" y="1965960"/>
-            <a:ext cx="2971800" cy="914400"/>
+          <p:cNvPr id="12" name="Caption 2 text"/>
+          <p:cNvSpPr txBox="1"/>
+          <p:nvPr/>
+        </p:nvSpPr>
+        <p:spPr>
+          <a:xfrm>
+            <a:off x="6592824" y="5422392"/>
+            <a:ext cx="5029200" cy="566928"/>
           </a:xfrm>
           <a:prstGeom prst="rect">
             <a:avLst/>
@@ -5071,7 +6983,7 @@
                   <a:schemeClr val="accent5"/>
                 </a:solidFill>
               </a:rPr>
-              <a:t>"Your week" lists the check-ins that need you, and why each is listed.</a:t>
+              <a:t>Exceptions in full, on-track goals in one line, and what changed since the last one. Comments reach the goal's owner.</a:t>
             </a:r>
             <a:endParaRPr lang="en-US" sz="1400" dirty="0"/>
           </a:p>
@@ -5079,195 +6991,37 @@
       </p:sp>
       <p:sp>
         <p:nvSpPr>
-          <p:cNvPr id="9" name="Point 2 mark"/>
-          <p:cNvSpPr/>
-          <p:nvPr/>
-        </p:nvSpPr>
-        <p:spPr>
-          <a:xfrm>
-            <a:off x="8321040" y="3081528"/>
-            <a:ext cx="182880" cy="182880"/>
-          </a:xfrm>
-          <a:prstGeom prst="ellipse">
-            <a:avLst/>
-          </a:prstGeom>
-          <a:solidFill>
-            <a:schemeClr val="accent4"/>
-          </a:solidFill>
-          <a:ln w="12700">
-            <a:solidFill>
-              <a:schemeClr val="accent4"/>
-            </a:solidFill>
-            <a:prstDash val="solid"/>
-          </a:ln>
-        </p:spPr>
-      </p:sp>
-      <p:sp>
-        <p:nvSpPr>
-          <p:cNvPr id="10" name="Point 2 heading"/>
-          <p:cNvSpPr txBox="1"/>
-          <p:nvPr/>
-        </p:nvSpPr>
-        <p:spPr>
-          <a:xfrm>
-            <a:off x="8668512" y="3017520"/>
-            <a:ext cx="2971800" cy="329184"/>
-          </a:xfrm>
-          <a:prstGeom prst="rect">
-            <a:avLst/>
-          </a:prstGeom>
-          <a:noFill/>
-          <a:ln/>
-        </p:spPr>
-        <p:txBody>
-          <a:bodyPr wrap="square" lIns="0" tIns="0" rIns="0" bIns="0" rtlCol="0" anchor="t"/>
-          <a:lstStyle/>
-          <a:p>
-            <a:pPr indent="0" marL="0">
-              <a:buNone/>
-            </a:pPr>
-            <a:r>
-              <a:rPr lang="en-US" sz="1800" b="1" dirty="0">
-                <a:solidFill>
-                  <a:schemeClr val="tx1"/>
-                </a:solidFill>
-              </a:rPr>
-              <a:t>No change is one click</a:t>
-            </a:r>
-            <a:endParaRPr lang="en-US" sz="1800" dirty="0"/>
-          </a:p>
-        </p:txBody>
-      </p:sp>
-      <p:sp>
-        <p:nvSpPr>
-          <p:cNvPr id="11" name="Point 2 text"/>
-          <p:cNvSpPr txBox="1"/>
-          <p:nvPr/>
-        </p:nvSpPr>
-        <p:spPr>
-          <a:xfrm>
-            <a:off x="8668512" y="3383280"/>
-            <a:ext cx="2971800" cy="914400"/>
-          </a:xfrm>
-          <a:prstGeom prst="rect">
-            <a:avLst/>
-          </a:prstGeom>
-          <a:noFill/>
-          <a:ln/>
-        </p:spPr>
-        <p:txBody>
-          <a:bodyPr wrap="square" lIns="0" tIns="0" rIns="0" bIns="0" rtlCol="0" anchor="t"/>
-          <a:lstStyle/>
-          <a:p>
-            <a:pPr indent="0" marL="0">
-              <a:buNone/>
-            </a:pPr>
-            <a:r>
-              <a:rPr lang="en-US" sz="1400" dirty="0">
+          <p:cNvPr id="13" name="Caption"/>
+          <p:cNvSpPr txBox="1"/>
+          <p:nvPr/>
+        </p:nvSpPr>
+        <p:spPr>
+          <a:xfrm>
+            <a:off x="548640" y="6053328"/>
+            <a:ext cx="6949440" cy="256032"/>
+          </a:xfrm>
+          <a:prstGeom prst="rect">
+            <a:avLst/>
+          </a:prstGeom>
+          <a:noFill/>
+          <a:ln/>
+        </p:spPr>
+        <p:txBody>
+          <a:bodyPr wrap="square" lIns="0" tIns="0" rIns="0" bIns="0" rtlCol="0" anchor="ctr"/>
+          <a:lstStyle/>
+          <a:p>
+            <a:pPr indent="0" marL="0">
+              <a:buNone/>
+            </a:pPr>
+            <a:r>
+              <a:rPr lang="en-US" sz="1000" i="1" dirty="0">
                 <a:solidFill>
                   <a:schemeClr val="accent5"/>
                 </a:solidFill>
               </a:rPr>
-              <a:t>A routine week records the same Health and status with today's date.</a:t>
-            </a:r>
-            <a:endParaRPr lang="en-US" sz="1400" dirty="0"/>
-          </a:p>
-        </p:txBody>
-      </p:sp>
-      <p:sp>
-        <p:nvSpPr>
-          <p:cNvPr id="12" name="Point 3 mark"/>
-          <p:cNvSpPr/>
-          <p:nvPr/>
-        </p:nvSpPr>
-        <p:spPr>
-          <a:xfrm>
-            <a:off x="8321040" y="4498848"/>
-            <a:ext cx="182880" cy="182880"/>
-          </a:xfrm>
-          <a:prstGeom prst="triangle">
-            <a:avLst/>
-          </a:prstGeom>
-          <a:solidFill>
-            <a:schemeClr val="accent3"/>
-          </a:solidFill>
-          <a:ln w="12700">
-            <a:solidFill>
-              <a:schemeClr val="accent3"/>
-            </a:solidFill>
-            <a:prstDash val="solid"/>
-          </a:ln>
-        </p:spPr>
-      </p:sp>
-      <p:sp>
-        <p:nvSpPr>
-          <p:cNvPr id="13" name="Point 3 heading"/>
-          <p:cNvSpPr txBox="1"/>
-          <p:nvPr/>
-        </p:nvSpPr>
-        <p:spPr>
-          <a:xfrm>
-            <a:off x="8668512" y="4434840"/>
-            <a:ext cx="2971800" cy="329184"/>
-          </a:xfrm>
-          <a:prstGeom prst="rect">
-            <a:avLst/>
-          </a:prstGeom>
-          <a:noFill/>
-          <a:ln/>
-        </p:spPr>
-        <p:txBody>
-          <a:bodyPr wrap="square" lIns="0" tIns="0" rIns="0" bIns="0" rtlCol="0" anchor="t"/>
-          <a:lstStyle/>
-          <a:p>
-            <a:pPr indent="0" marL="0">
-              <a:buNone/>
-            </a:pPr>
-            <a:r>
-              <a:rPr lang="en-US" sz="1800" b="1" dirty="0">
-                <a:solidFill>
-                  <a:schemeClr val="tx1"/>
-                </a:solidFill>
-              </a:rPr>
-              <a:t>Hard to get wrong</a:t>
-            </a:r>
-            <a:endParaRPr lang="en-US" sz="1800" dirty="0"/>
-          </a:p>
-        </p:txBody>
-      </p:sp>
-      <p:sp>
-        <p:nvSpPr>
-          <p:cNvPr id="14" name="Point 3 text"/>
-          <p:cNvSpPr txBox="1"/>
-          <p:nvPr/>
-        </p:nvSpPr>
-        <p:spPr>
-          <a:xfrm>
-            <a:off x="8668512" y="4800600"/>
-            <a:ext cx="2971800" cy="914400"/>
-          </a:xfrm>
-          <a:prstGeom prst="rect">
-            <a:avLst/>
-          </a:prstGeom>
-          <a:noFill/>
-          <a:ln/>
-        </p:spPr>
-        <p:txBody>
-          <a:bodyPr wrap="square" lIns="0" tIns="0" rIns="0" bIns="0" rtlCol="0" anchor="t"/>
-          <a:lstStyle/>
-          <a:p>
-            <a:pPr indent="0" marL="0">
-              <a:buNone/>
-            </a:pPr>
-            <a:r>
-              <a:rPr lang="en-US" sz="1400" dirty="0">
-                <a:solidFill>
-                  <a:schemeClr val="accent5"/>
-                </a:solidFill>
-              </a:rPr>
-              <a:t>The form starts from last week's answers and asks for a plan only when Health isn't Green.</a:t>
-            </a:r>
-            <a:endParaRPr lang="en-US" sz="1400" dirty="0"/>
+              <a:t>Screenshots from the product, on a seeded 50-goal demo org</a:t>
+            </a:r>
+            <a:endParaRPr lang="en-US" sz="1000" dirty="0"/>
           </a:p>
         </p:txBody>
       </p:sp>
@@ -5373,7 +7127,7 @@
                   <a:schemeClr val="tx2"/>
                 </a:solidFill>
               </a:rPr>
-              <a:t>The monthly review writes itself</a:t>
+              <a:t>The cost: most weeks, one click per goal</a:t>
             </a:r>
             <a:endParaRPr lang="en-US" sz="3600" dirty="0"/>
           </a:p>
@@ -5381,14 +7135,14 @@
       </p:sp>
       <p:sp>
         <p:nvSpPr>
-          <p:cNvPr id="3" name="Published report frame"/>
+          <p:cNvPr id="3" name="Video frame"/>
           <p:cNvSpPr/>
           <p:nvPr/>
         </p:nvSpPr>
         <p:spPr>
           <a:xfrm>
-            <a:off x="4416552" y="1463040"/>
-            <a:ext cx="7223760" cy="4514850"/>
+            <a:off x="548640" y="1463040"/>
+            <a:ext cx="7315200" cy="4114800"/>
           </a:xfrm>
           <a:prstGeom prst="rect">
             <a:avLst/>
@@ -5413,22 +7167,31 @@
       </p:sp>
       <p:pic>
         <p:nvPicPr>
-          <p:cNvPr id="4" name="Published report" descr="A published Growth monthly review with a Health summary and a Red goal in full">    </p:cNvPr>
+          <p:cNvPr id="3" name="Check-in video">
+            <a:hlinkClick r:id="" action="ppaction://media"/>
+          </p:cNvPr>
           <p:cNvPicPr>
             <a:picLocks noChangeAspect="1"/>
           </p:cNvPicPr>
-          <p:nvPr/>
+          <p:nvPr>
+            <a:videoFile r:link="rId1"/>
+            <p:extLst>
+              <p:ext uri="{DAA4B4D4-6D71-4841-9C94-3DE7FCFB9230}">
+                <p14:media xmlns:p14="http://schemas.microsoft.com/office/powerpoint/2010/main" r:embed="rId2"/>
+              </p:ext>
+            </p:extLst>
+          </p:nvPr>
         </p:nvPicPr>
         <p:blipFill>
-          <a:blip r:embed="rId1"/>
+          <a:blip r:embed="rId3"/>
           <a:stretch>
             <a:fillRect/>
           </a:stretch>
         </p:blipFill>
         <p:spPr>
           <a:xfrm>
-            <a:off x="4416552" y="1463040"/>
-            <a:ext cx="7223760" cy="4514850"/>
+            <a:off x="548640" y="1463040"/>
+            <a:ext cx="7315200" cy="4114800"/>
           </a:xfrm>
           <a:prstGeom prst="rect">
             <a:avLst/>
@@ -5443,8 +7206,8 @@
         </p:nvSpPr>
         <p:spPr>
           <a:xfrm>
-            <a:off x="4416552" y="6053328"/>
-            <a:ext cx="6949440" cy="256032"/>
+            <a:off x="548640" y="5715000"/>
+            <a:ext cx="7315200" cy="256032"/>
           </a:xfrm>
           <a:prstGeom prst="rect">
             <a:avLst/>
@@ -5465,7 +7228,7 @@
                   <a:schemeClr val="accent5"/>
                 </a:solidFill>
               </a:rPr>
-              <a:t>Screenshot from the product, on a seeded 50-goal demo org</a:t>
+              <a:t>Recording from the demo org: a one-click No change, then a full check-in. Click to play.</a:t>
             </a:r>
             <a:endParaRPr lang="en-US" sz="1000" dirty="0"/>
           </a:p>
@@ -5479,18 +7242,18 @@
         </p:nvSpPr>
         <p:spPr>
           <a:xfrm>
-            <a:off x="548640" y="1664208"/>
+            <a:off x="8321040" y="1664208"/>
             <a:ext cx="182880" cy="182880"/>
           </a:xfrm>
-          <a:prstGeom prst="rect">
+          <a:prstGeom prst="ellipse">
             <a:avLst/>
           </a:prstGeom>
           <a:solidFill>
-            <a:schemeClr val="accent2"/>
+            <a:schemeClr val="accent4"/>
           </a:solidFill>
           <a:ln w="12700">
             <a:solidFill>
-              <a:schemeClr val="accent2"/>
+              <a:schemeClr val="accent4"/>
             </a:solidFill>
             <a:prstDash val="solid"/>
           </a:ln>
@@ -5504,8 +7267,8 @@
         </p:nvSpPr>
         <p:spPr>
           <a:xfrm>
-            <a:off x="896112" y="1600200"/>
-            <a:ext cx="3172968" cy="329184"/>
+            <a:off x="8668512" y="1600200"/>
+            <a:ext cx="2971800" cy="329184"/>
           </a:xfrm>
           <a:prstGeom prst="rect">
             <a:avLst/>
@@ -5526,7 +7289,7 @@
                   <a:schemeClr val="tx1"/>
                 </a:solidFill>
               </a:rPr>
-              <a:t>Exceptions in full</a:t>
+              <a:t>Home says what's due</a:t>
             </a:r>
             <a:endParaRPr lang="en-US" sz="1800" dirty="0"/>
           </a:p>
@@ -5540,8 +7303,8 @@
         </p:nvSpPr>
         <p:spPr>
           <a:xfrm>
-            <a:off x="896112" y="1965960"/>
-            <a:ext cx="3172968" cy="914400"/>
+            <a:off x="8668512" y="1965960"/>
+            <a:ext cx="2971800" cy="914400"/>
           </a:xfrm>
           <a:prstGeom prst="rect">
             <a:avLst/>
@@ -5562,7 +7325,7 @@
                   <a:schemeClr val="accent5"/>
                 </a:solidFill>
               </a:rPr>
-              <a:t>So What, status, Path to Green and milestones for each. Unchanged Green goals take one line.</a:t>
+              <a:t>"Your week" lists the check-ins that need you, and why each is listed.</a:t>
             </a:r>
             <a:endParaRPr lang="en-US" sz="1400" dirty="0"/>
           </a:p>
@@ -5576,7 +7339,104 @@
         </p:nvSpPr>
         <p:spPr>
           <a:xfrm>
-            <a:off x="548640" y="3081528"/>
+            <a:off x="8321040" y="3081528"/>
+            <a:ext cx="182880" cy="182880"/>
+          </a:xfrm>
+          <a:prstGeom prst="ellipse">
+            <a:avLst/>
+          </a:prstGeom>
+          <a:solidFill>
+            <a:schemeClr val="accent4"/>
+          </a:solidFill>
+          <a:ln w="12700">
+            <a:solidFill>
+              <a:schemeClr val="accent4"/>
+            </a:solidFill>
+            <a:prstDash val="solid"/>
+          </a:ln>
+        </p:spPr>
+      </p:sp>
+      <p:sp>
+        <p:nvSpPr>
+          <p:cNvPr id="10" name="Point 2 heading"/>
+          <p:cNvSpPr txBox="1"/>
+          <p:nvPr/>
+        </p:nvSpPr>
+        <p:spPr>
+          <a:xfrm>
+            <a:off x="8668512" y="3017520"/>
+            <a:ext cx="2971800" cy="329184"/>
+          </a:xfrm>
+          <a:prstGeom prst="rect">
+            <a:avLst/>
+          </a:prstGeom>
+          <a:noFill/>
+          <a:ln/>
+        </p:spPr>
+        <p:txBody>
+          <a:bodyPr wrap="square" lIns="0" tIns="0" rIns="0" bIns="0" rtlCol="0" anchor="t"/>
+          <a:lstStyle/>
+          <a:p>
+            <a:pPr indent="0" marL="0">
+              <a:buNone/>
+            </a:pPr>
+            <a:r>
+              <a:rPr lang="en-US" sz="1800" b="1" dirty="0">
+                <a:solidFill>
+                  <a:schemeClr val="tx1"/>
+                </a:solidFill>
+              </a:rPr>
+              <a:t>No change is one click</a:t>
+            </a:r>
+            <a:endParaRPr lang="en-US" sz="1800" dirty="0"/>
+          </a:p>
+        </p:txBody>
+      </p:sp>
+      <p:sp>
+        <p:nvSpPr>
+          <p:cNvPr id="11" name="Point 2 text"/>
+          <p:cNvSpPr txBox="1"/>
+          <p:nvPr/>
+        </p:nvSpPr>
+        <p:spPr>
+          <a:xfrm>
+            <a:off x="8668512" y="3383280"/>
+            <a:ext cx="2971800" cy="914400"/>
+          </a:xfrm>
+          <a:prstGeom prst="rect">
+            <a:avLst/>
+          </a:prstGeom>
+          <a:noFill/>
+          <a:ln/>
+        </p:spPr>
+        <p:txBody>
+          <a:bodyPr wrap="square" lIns="0" tIns="0" rIns="0" bIns="0" rtlCol="0" anchor="t"/>
+          <a:lstStyle/>
+          <a:p>
+            <a:pPr indent="0" marL="0">
+              <a:buNone/>
+            </a:pPr>
+            <a:r>
+              <a:rPr lang="en-US" sz="1400" dirty="0">
+                <a:solidFill>
+                  <a:schemeClr val="accent5"/>
+                </a:solidFill>
+              </a:rPr>
+              <a:t>A routine week records the same Health and status with today's date.</a:t>
+            </a:r>
+            <a:endParaRPr lang="en-US" sz="1400" dirty="0"/>
+          </a:p>
+        </p:txBody>
+      </p:sp>
+      <p:sp>
+        <p:nvSpPr>
+          <p:cNvPr id="12" name="Point 3 mark"/>
+          <p:cNvSpPr/>
+          <p:nvPr/>
+        </p:nvSpPr>
+        <p:spPr>
+          <a:xfrm>
+            <a:off x="8321040" y="4498848"/>
             <a:ext cx="182880" cy="182880"/>
           </a:xfrm>
           <a:prstGeom prst="triangle">
@@ -5595,14 +7455,14 @@
       </p:sp>
       <p:sp>
         <p:nvSpPr>
-          <p:cNvPr id="10" name="Point 2 heading"/>
-          <p:cNvSpPr txBox="1"/>
-          <p:nvPr/>
-        </p:nvSpPr>
-        <p:spPr>
-          <a:xfrm>
-            <a:off x="896112" y="3017520"/>
-            <a:ext cx="3172968" cy="329184"/>
+          <p:cNvPr id="13" name="Point 3 heading"/>
+          <p:cNvSpPr txBox="1"/>
+          <p:nvPr/>
+        </p:nvSpPr>
+        <p:spPr>
+          <a:xfrm>
+            <a:off x="8668512" y="4434840"/>
+            <a:ext cx="2971800" cy="329184"/>
           </a:xfrm>
           <a:prstGeom prst="rect">
             <a:avLst/>
@@ -5623,7 +7483,7 @@
                   <a:schemeClr val="tx1"/>
                 </a:solidFill>
               </a:rPr>
-              <a:t>Shows what changed</a:t>
+              <a:t>A real update is one form</a:t>
             </a:r>
             <a:endParaRPr lang="en-US" sz="1800" dirty="0"/>
           </a:p>
@@ -5631,14 +7491,14 @@
       </p:sp>
       <p:sp>
         <p:nvSpPr>
-          <p:cNvPr id="11" name="Point 2 text"/>
-          <p:cNvSpPr txBox="1"/>
-          <p:nvPr/>
-        </p:nvSpPr>
-        <p:spPr>
-          <a:xfrm>
-            <a:off x="896112" y="3383280"/>
-            <a:ext cx="3172968" cy="914400"/>
+          <p:cNvPr id="14" name="Point 3 text"/>
+          <p:cNvSpPr txBox="1"/>
+          <p:nvPr/>
+        </p:nvSpPr>
+        <p:spPr>
+          <a:xfrm>
+            <a:off x="8668512" y="4800600"/>
+            <a:ext cx="2971800" cy="914400"/>
           </a:xfrm>
           <a:prstGeom prst="rect">
             <a:avLst/>
@@ -5659,104 +7519,7 @@
                   <a:schemeClr val="accent5"/>
                 </a:solidFill>
               </a:rPr>
-              <a:t>Each publication is a frozen snapshot. The next one shows what moved since.</a:t>
-            </a:r>
-            <a:endParaRPr lang="en-US" sz="1400" dirty="0"/>
-          </a:p>
-        </p:txBody>
-      </p:sp>
-      <p:sp>
-        <p:nvSpPr>
-          <p:cNvPr id="12" name="Point 3 mark"/>
-          <p:cNvSpPr/>
-          <p:nvPr/>
-        </p:nvSpPr>
-        <p:spPr>
-          <a:xfrm>
-            <a:off x="548640" y="4498848"/>
-            <a:ext cx="182880" cy="182880"/>
-          </a:xfrm>
-          <a:prstGeom prst="ellipse">
-            <a:avLst/>
-          </a:prstGeom>
-          <a:solidFill>
-            <a:schemeClr val="accent4"/>
-          </a:solidFill>
-          <a:ln w="12700">
-            <a:solidFill>
-              <a:schemeClr val="accent4"/>
-            </a:solidFill>
-            <a:prstDash val="solid"/>
-          </a:ln>
-        </p:spPr>
-      </p:sp>
-      <p:sp>
-        <p:nvSpPr>
-          <p:cNvPr id="13" name="Point 3 heading"/>
-          <p:cNvSpPr txBox="1"/>
-          <p:nvPr/>
-        </p:nvSpPr>
-        <p:spPr>
-          <a:xfrm>
-            <a:off x="896112" y="4434840"/>
-            <a:ext cx="3172968" cy="329184"/>
-          </a:xfrm>
-          <a:prstGeom prst="rect">
-            <a:avLst/>
-          </a:prstGeom>
-          <a:noFill/>
-          <a:ln/>
-        </p:spPr>
-        <p:txBody>
-          <a:bodyPr wrap="square" lIns="0" tIns="0" rIns="0" bIns="0" rtlCol="0" anchor="t"/>
-          <a:lstStyle/>
-          <a:p>
-            <a:pPr indent="0" marL="0">
-              <a:buNone/>
-            </a:pPr>
-            <a:r>
-              <a:rPr lang="en-US" sz="1800" b="1" dirty="0">
-                <a:solidFill>
-                  <a:schemeClr val="tx1"/>
-                </a:solidFill>
-              </a:rPr>
-              <a:t>Questions reach the owner</a:t>
-            </a:r>
-            <a:endParaRPr lang="en-US" sz="1800" dirty="0"/>
-          </a:p>
-        </p:txBody>
-      </p:sp>
-      <p:sp>
-        <p:nvSpPr>
-          <p:cNvPr id="14" name="Point 3 text"/>
-          <p:cNvSpPr txBox="1"/>
-          <p:nvPr/>
-        </p:nvSpPr>
-        <p:spPr>
-          <a:xfrm>
-            <a:off x="896112" y="4800600"/>
-            <a:ext cx="3172968" cy="914400"/>
-          </a:xfrm>
-          <a:prstGeom prst="rect">
-            <a:avLst/>
-          </a:prstGeom>
-          <a:noFill/>
-          <a:ln/>
-        </p:spPr>
-        <p:txBody>
-          <a:bodyPr wrap="square" lIns="0" tIns="0" rIns="0" bIns="0" rtlCol="0" anchor="t"/>
-          <a:lstStyle/>
-          <a:p>
-            <a:pPr indent="0" marL="0">
-              <a:buNone/>
-            </a:pPr>
-            <a:r>
-              <a:rPr lang="en-US" sz="1400" dirty="0">
-                <a:solidFill>
-                  <a:schemeClr val="accent5"/>
-                </a:solidFill>
-              </a:rPr>
-              <a:t>Comments route to the goal's owner. Action Items carry forward until closed.</a:t>
+              <a:t>It starts from last week's answers and asks for a plan only when Health isn't Green.</a:t>
             </a:r>
             <a:endParaRPr lang="en-US" sz="1400" dirty="0"/>
           </a:p>
@@ -5842,8 +7605,8 @@
         </p:nvSpPr>
         <p:spPr>
           <a:xfrm>
-            <a:off x="640080" y="548640"/>
-            <a:ext cx="10972800" cy="914400"/>
+            <a:off x="548640" y="411480"/>
+            <a:ext cx="11064240" cy="822960"/>
           </a:xfrm>
           <a:prstGeom prst="rect">
             <a:avLst/>
@@ -5859,39 +7622,39 @@
               <a:buNone/>
             </a:pPr>
             <a:r>
-              <a:rPr lang="en-US" sz="4000" b="1" dirty="0">
-                <a:solidFill>
-                  <a:schemeClr val="bg1"/>
-                </a:solidFill>
-              </a:rPr>
-              <a:t>The ask: pilot one org for one review cycle</a:t>
-            </a:r>
-            <a:endParaRPr lang="en-US" sz="4000" dirty="0"/>
-          </a:p>
-        </p:txBody>
-      </p:sp>
-      <p:sp>
-        <p:nvSpPr>
-          <p:cNvPr id="3" name="Plan 1 card"/>
+              <a:rPr lang="en-US" sz="3600" b="1" dirty="0">
+                <a:solidFill>
+                  <a:schemeClr val="tx2"/>
+                </a:solidFill>
+              </a:rPr>
+              <a:t>What's built, and what a pilot still needs</a:t>
+            </a:r>
+            <a:endParaRPr lang="en-US" sz="3600" dirty="0"/>
+          </a:p>
+        </p:txBody>
+      </p:sp>
+      <p:sp>
+        <p:nvSpPr>
+          <p:cNvPr id="3" name="Readiness 1 card"/>
           <p:cNvSpPr/>
           <p:nvPr/>
         </p:nvSpPr>
         <p:spPr>
           <a:xfrm>
-            <a:off x="640080" y="1828800"/>
-            <a:ext cx="3383280" cy="2651760"/>
+            <a:off x="548640" y="1554480"/>
+            <a:ext cx="5367528" cy="4343400"/>
           </a:xfrm>
           <a:prstGeom prst="roundRect">
             <a:avLst>
-              <a:gd name="adj" fmla="val 2759"/>
+              <a:gd name="adj" fmla="val 1263"/>
             </a:avLst>
           </a:prstGeom>
           <a:solidFill>
-            <a:schemeClr val="accent1"/>
+            <a:schemeClr val="bg2"/>
           </a:solidFill>
           <a:ln w="12700">
             <a:solidFill>
-              <a:schemeClr val="accent1"/>
+              <a:schemeClr val="bg2"/>
             </a:solidFill>
             <a:prstDash val="solid"/>
           </a:ln>
@@ -5899,14 +7662,14 @@
       </p:sp>
       <p:sp>
         <p:nvSpPr>
-          <p:cNvPr id="4" name="Plan 1 number"/>
-          <p:cNvSpPr txBox="1"/>
-          <p:nvPr/>
-        </p:nvSpPr>
-        <p:spPr>
-          <a:xfrm>
-            <a:off x="914400" y="2011680"/>
-            <a:ext cx="914400" cy="731520"/>
+          <p:cNvPr id="4" name="Readiness 1 heading"/>
+          <p:cNvSpPr txBox="1"/>
+          <p:nvPr/>
+        </p:nvSpPr>
+        <p:spPr>
+          <a:xfrm>
+            <a:off x="868680" y="1783080"/>
+            <a:ext cx="4754880" cy="457200"/>
           </a:xfrm>
           <a:prstGeom prst="rect">
             <a:avLst/>
@@ -5922,111 +7685,37 @@
               <a:buNone/>
             </a:pPr>
             <a:r>
-              <a:rPr lang="en-US" sz="4400" b="1" dirty="0">
-                <a:solidFill>
-                  <a:schemeClr val="accent6"/>
-                </a:solidFill>
-              </a:rPr>
-              <a:t>1</a:t>
-            </a:r>
-            <a:endParaRPr lang="en-US" sz="4400" dirty="0"/>
-          </a:p>
-        </p:txBody>
-      </p:sp>
-      <p:sp>
-        <p:nvSpPr>
-          <p:cNvPr id="5" name="Plan 1 heading"/>
-          <p:cNvSpPr txBox="1"/>
-          <p:nvPr/>
-        </p:nvSpPr>
-        <p:spPr>
-          <a:xfrm>
-            <a:off x="914400" y="2788920"/>
-            <a:ext cx="2834640" cy="685800"/>
-          </a:xfrm>
-          <a:prstGeom prst="rect">
-            <a:avLst/>
-          </a:prstGeom>
-          <a:noFill/>
-          <a:ln/>
-        </p:spPr>
-        <p:txBody>
-          <a:bodyPr wrap="square" lIns="0" tIns="0" rIns="0" bIns="0" rtlCol="0" anchor="t"/>
-          <a:lstStyle/>
-          <a:p>
-            <a:pPr indent="0" marL="0">
-              <a:buNone/>
-            </a:pPr>
-            <a:r>
-              <a:rPr lang="en-US" sz="2000" b="1" dirty="0">
-                <a:solidFill>
-                  <a:schemeClr val="bg1"/>
-                </a:solidFill>
-              </a:rPr>
-              <a:t>Load one org's goals</a:t>
-            </a:r>
-            <a:endParaRPr lang="en-US" sz="2000" dirty="0"/>
-          </a:p>
-        </p:txBody>
-      </p:sp>
-      <p:sp>
-        <p:nvSpPr>
-          <p:cNvPr id="6" name="Plan 1 text"/>
-          <p:cNvSpPr txBox="1"/>
-          <p:nvPr/>
-        </p:nvSpPr>
-        <p:spPr>
-          <a:xfrm>
-            <a:off x="914400" y="3493008"/>
-            <a:ext cx="2834640" cy="822960"/>
-          </a:xfrm>
-          <a:prstGeom prst="rect">
-            <a:avLst/>
-          </a:prstGeom>
-          <a:noFill/>
-          <a:ln/>
-        </p:spPr>
-        <p:txBody>
-          <a:bodyPr wrap="square" lIns="0" tIns="0" rIns="0" bIns="0" rtlCol="0" anchor="t"/>
-          <a:lstStyle/>
-          <a:p>
-            <a:pPr indent="0" marL="0">
-              <a:buNone/>
-            </a:pPr>
-            <a:r>
-              <a:rPr lang="en-US" sz="1400" dirty="0">
-                <a:solidFill>
-                  <a:schemeClr val="bg1"/>
-                </a:solidFill>
-              </a:rPr>
-              <a:t>Owners state each goal, its So What, and what it contributes to.</a:t>
-            </a:r>
-            <a:endParaRPr lang="en-US" sz="1400" dirty="0"/>
-          </a:p>
-        </p:txBody>
-      </p:sp>
-      <p:sp>
-        <p:nvSpPr>
-          <p:cNvPr id="7" name="Plan 2 card"/>
+              <a:rPr lang="en-US" sz="2200" b="1" dirty="0">
+                <a:solidFill>
+                  <a:schemeClr val="tx2"/>
+                </a:solidFill>
+              </a:rPr>
+              <a:t>Working today</a:t>
+            </a:r>
+            <a:endParaRPr lang="en-US" sz="2200" dirty="0"/>
+          </a:p>
+        </p:txBody>
+      </p:sp>
+      <p:sp>
+        <p:nvSpPr>
+          <p:cNvPr id="5" name="Readiness 1 mark 1"/>
           <p:cNvSpPr/>
           <p:nvPr/>
         </p:nvSpPr>
         <p:spPr>
           <a:xfrm>
-            <a:off x="4389120" y="1828800"/>
-            <a:ext cx="3383280" cy="2651760"/>
-          </a:xfrm>
-          <a:prstGeom prst="roundRect">
-            <a:avLst>
-              <a:gd name="adj" fmla="val 2759"/>
-            </a:avLst>
+            <a:off x="868680" y="2514600"/>
+            <a:ext cx="164592" cy="164592"/>
+          </a:xfrm>
+          <a:prstGeom prst="ellipse">
+            <a:avLst/>
           </a:prstGeom>
           <a:solidFill>
-            <a:schemeClr val="accent1"/>
+            <a:schemeClr val="accent4"/>
           </a:solidFill>
           <a:ln w="12700">
             <a:solidFill>
-              <a:schemeClr val="accent1"/>
+              <a:schemeClr val="accent4"/>
             </a:solidFill>
             <a:prstDash val="solid"/>
           </a:ln>
@@ -6034,50 +7723,14 @@
       </p:sp>
       <p:sp>
         <p:nvSpPr>
-          <p:cNvPr id="8" name="Plan 2 number"/>
-          <p:cNvSpPr txBox="1"/>
-          <p:nvPr/>
-        </p:nvSpPr>
-        <p:spPr>
-          <a:xfrm>
-            <a:off x="4663440" y="2011680"/>
-            <a:ext cx="914400" cy="731520"/>
-          </a:xfrm>
-          <a:prstGeom prst="rect">
-            <a:avLst/>
-          </a:prstGeom>
-          <a:noFill/>
-          <a:ln/>
-        </p:spPr>
-        <p:txBody>
-          <a:bodyPr wrap="square" lIns="0" tIns="0" rIns="0" bIns="0" rtlCol="0" anchor="ctr"/>
-          <a:lstStyle/>
-          <a:p>
-            <a:pPr indent="0" marL="0">
-              <a:buNone/>
-            </a:pPr>
-            <a:r>
-              <a:rPr lang="en-US" sz="4400" b="1" dirty="0">
-                <a:solidFill>
-                  <a:schemeClr val="accent6"/>
-                </a:solidFill>
-              </a:rPr>
-              <a:t>2</a:t>
-            </a:r>
-            <a:endParaRPr lang="en-US" sz="4400" dirty="0"/>
-          </a:p>
-        </p:txBody>
-      </p:sp>
-      <p:sp>
-        <p:nvSpPr>
-          <p:cNvPr id="9" name="Plan 2 heading"/>
-          <p:cNvSpPr txBox="1"/>
-          <p:nvPr/>
-        </p:nvSpPr>
-        <p:spPr>
-          <a:xfrm>
-            <a:off x="4663440" y="2788920"/>
-            <a:ext cx="2834640" cy="685800"/>
+          <p:cNvPr id="6" name="Readiness 1 item 1"/>
+          <p:cNvSpPr txBox="1"/>
+          <p:nvPr/>
+        </p:nvSpPr>
+        <p:spPr>
+          <a:xfrm>
+            <a:off x="1207008" y="2468880"/>
+            <a:ext cx="4434840" cy="548640"/>
           </a:xfrm>
           <a:prstGeom prst="rect">
             <a:avLst/>
@@ -6093,75 +7746,37 @@
               <a:buNone/>
             </a:pPr>
             <a:r>
-              <a:rPr lang="en-US" sz="2000" b="1" dirty="0">
-                <a:solidFill>
-                  <a:schemeClr val="bg1"/>
-                </a:solidFill>
-              </a:rPr>
-              <a:t>Check in weekly for a month</a:t>
-            </a:r>
-            <a:endParaRPr lang="en-US" sz="2000" dirty="0"/>
-          </a:p>
-        </p:txBody>
-      </p:sp>
-      <p:sp>
-        <p:nvSpPr>
-          <p:cNvPr id="10" name="Plan 2 text"/>
-          <p:cNvSpPr txBox="1"/>
-          <p:nvPr/>
-        </p:nvSpPr>
-        <p:spPr>
-          <a:xfrm>
-            <a:off x="4663440" y="3493008"/>
-            <a:ext cx="2834640" cy="822960"/>
-          </a:xfrm>
-          <a:prstGeom prst="rect">
-            <a:avLst/>
-          </a:prstGeom>
-          <a:noFill/>
-          <a:ln/>
-        </p:spPr>
-        <p:txBody>
-          <a:bodyPr wrap="square" lIns="0" tIns="0" rIns="0" bIns="0" rtlCol="0" anchor="t"/>
-          <a:lstStyle/>
-          <a:p>
-            <a:pPr indent="0" marL="0">
-              <a:buNone/>
-            </a:pPr>
-            <a:r>
-              <a:rPr lang="en-US" sz="1400" dirty="0">
-                <a:solidFill>
-                  <a:schemeClr val="bg1"/>
-                </a:solidFill>
-              </a:rPr>
-              <a:t>About a minute per goal. Reminders and nudges do the chasing.</a:t>
-            </a:r>
-            <a:endParaRPr lang="en-US" sz="1400" dirty="0"/>
-          </a:p>
-        </p:txBody>
-      </p:sp>
-      <p:sp>
-        <p:nvSpPr>
-          <p:cNvPr id="11" name="Plan 3 card"/>
+              <a:rPr lang="en-US" sz="1500" dirty="0">
+                <a:solidFill>
+                  <a:schemeClr val="tx1"/>
+                </a:solidFill>
+              </a:rPr>
+              <a:t>Goals, the links between them, and weekly check-ins</a:t>
+            </a:r>
+            <a:endParaRPr lang="en-US" sz="1500" dirty="0"/>
+          </a:p>
+        </p:txBody>
+      </p:sp>
+      <p:sp>
+        <p:nvSpPr>
+          <p:cNvPr id="7" name="Readiness 1 mark 2"/>
           <p:cNvSpPr/>
           <p:nvPr/>
         </p:nvSpPr>
         <p:spPr>
           <a:xfrm>
-            <a:off x="8138160" y="1828800"/>
-            <a:ext cx="3383280" cy="2651760"/>
-          </a:xfrm>
-          <a:prstGeom prst="roundRect">
-            <a:avLst>
-              <a:gd name="adj" fmla="val 2759"/>
-            </a:avLst>
+            <a:off x="868680" y="3172968"/>
+            <a:ext cx="164592" cy="164592"/>
+          </a:xfrm>
+          <a:prstGeom prst="ellipse">
+            <a:avLst/>
           </a:prstGeom>
           <a:solidFill>
-            <a:schemeClr val="accent1"/>
+            <a:schemeClr val="accent4"/>
           </a:solidFill>
           <a:ln w="12700">
             <a:solidFill>
-              <a:schemeClr val="accent1"/>
+              <a:schemeClr val="accent4"/>
             </a:solidFill>
             <a:prstDash val="solid"/>
           </a:ln>
@@ -6169,14 +7784,260 @@
       </p:sp>
       <p:sp>
         <p:nvSpPr>
-          <p:cNvPr id="12" name="Plan 3 number"/>
-          <p:cNvSpPr txBox="1"/>
-          <p:nvPr/>
-        </p:nvSpPr>
-        <p:spPr>
-          <a:xfrm>
-            <a:off x="8412480" y="2011680"/>
-            <a:ext cx="914400" cy="731520"/>
+          <p:cNvPr id="8" name="Readiness 1 item 2"/>
+          <p:cNvSpPr txBox="1"/>
+          <p:nvPr/>
+        </p:nvSpPr>
+        <p:spPr>
+          <a:xfrm>
+            <a:off x="1207008" y="3127248"/>
+            <a:ext cx="4434840" cy="548640"/>
+          </a:xfrm>
+          <a:prstGeom prst="rect">
+            <a:avLst/>
+          </a:prstGeom>
+          <a:noFill/>
+          <a:ln/>
+        </p:spPr>
+        <p:txBody>
+          <a:bodyPr wrap="square" lIns="0" tIns="0" rIns="0" bIns="0" rtlCol="0" anchor="t"/>
+          <a:lstStyle/>
+          <a:p>
+            <a:pPr indent="0" marL="0">
+              <a:buNone/>
+            </a:pPr>
+            <a:r>
+              <a:rPr lang="en-US" sz="1500" dirty="0">
+                <a:solidFill>
+                  <a:schemeClr val="tx1"/>
+                </a:solidFill>
+              </a:rPr>
+              <a:t>Risks: Stale, unaligned, schedule conflicts, ownerless</a:t>
+            </a:r>
+            <a:endParaRPr lang="en-US" sz="1500" dirty="0"/>
+          </a:p>
+        </p:txBody>
+      </p:sp>
+      <p:sp>
+        <p:nvSpPr>
+          <p:cNvPr id="9" name="Readiness 1 mark 3"/>
+          <p:cNvSpPr/>
+          <p:nvPr/>
+        </p:nvSpPr>
+        <p:spPr>
+          <a:xfrm>
+            <a:off x="868680" y="3831336"/>
+            <a:ext cx="164592" cy="164592"/>
+          </a:xfrm>
+          <a:prstGeom prst="ellipse">
+            <a:avLst/>
+          </a:prstGeom>
+          <a:solidFill>
+            <a:schemeClr val="accent4"/>
+          </a:solidFill>
+          <a:ln w="12700">
+            <a:solidFill>
+              <a:schemeClr val="accent4"/>
+            </a:solidFill>
+            <a:prstDash val="solid"/>
+          </a:ln>
+        </p:spPr>
+      </p:sp>
+      <p:sp>
+        <p:nvSpPr>
+          <p:cNvPr id="10" name="Readiness 1 item 3"/>
+          <p:cNvSpPr txBox="1"/>
+          <p:nvPr/>
+        </p:nvSpPr>
+        <p:spPr>
+          <a:xfrm>
+            <a:off x="1207008" y="3785616"/>
+            <a:ext cx="4434840" cy="548640"/>
+          </a:xfrm>
+          <a:prstGeom prst="rect">
+            <a:avLst/>
+          </a:prstGeom>
+          <a:noFill/>
+          <a:ln/>
+        </p:spPr>
+        <p:txBody>
+          <a:bodyPr wrap="square" lIns="0" tIns="0" rIns="0" bIns="0" rtlCol="0" anchor="t"/>
+          <a:lstStyle/>
+          <a:p>
+            <a:pPr indent="0" marL="0">
+              <a:buNone/>
+            </a:pPr>
+            <a:r>
+              <a:rPr lang="en-US" sz="1500" dirty="0">
+                <a:solidFill>
+                  <a:schemeClr val="tx1"/>
+                </a:solidFill>
+              </a:rPr>
+              <a:t>Reports by rule or hand-picked, with Markdown and PDF</a:t>
+            </a:r>
+            <a:endParaRPr lang="en-US" sz="1500" dirty="0"/>
+          </a:p>
+        </p:txBody>
+      </p:sp>
+      <p:sp>
+        <p:nvSpPr>
+          <p:cNvPr id="11" name="Readiness 1 mark 4"/>
+          <p:cNvSpPr/>
+          <p:nvPr/>
+        </p:nvSpPr>
+        <p:spPr>
+          <a:xfrm>
+            <a:off x="868680" y="4489704"/>
+            <a:ext cx="164592" cy="164592"/>
+          </a:xfrm>
+          <a:prstGeom prst="ellipse">
+            <a:avLst/>
+          </a:prstGeom>
+          <a:solidFill>
+            <a:schemeClr val="accent4"/>
+          </a:solidFill>
+          <a:ln w="12700">
+            <a:solidFill>
+              <a:schemeClr val="accent4"/>
+            </a:solidFill>
+            <a:prstDash val="solid"/>
+          </a:ln>
+        </p:spPr>
+      </p:sp>
+      <p:sp>
+        <p:nvSpPr>
+          <p:cNvPr id="12" name="Readiness 1 item 4"/>
+          <p:cNvSpPr txBox="1"/>
+          <p:nvPr/>
+        </p:nvSpPr>
+        <p:spPr>
+          <a:xfrm>
+            <a:off x="1207008" y="4443984"/>
+            <a:ext cx="4434840" cy="548640"/>
+          </a:xfrm>
+          <a:prstGeom prst="rect">
+            <a:avLst/>
+          </a:prstGeom>
+          <a:noFill/>
+          <a:ln/>
+        </p:spPr>
+        <p:txBody>
+          <a:bodyPr wrap="square" lIns="0" tIns="0" rIns="0" bIns="0" rtlCol="0" anchor="t"/>
+          <a:lstStyle/>
+          <a:p>
+            <a:pPr indent="0" marL="0">
+              <a:buNone/>
+            </a:pPr>
+            <a:r>
+              <a:rPr lang="en-US" sz="1500" dirty="0">
+                <a:solidFill>
+                  <a:schemeClr val="tx1"/>
+                </a:solidFill>
+              </a:rPr>
+              <a:t>Comments and Action Items on published reports</a:t>
+            </a:r>
+            <a:endParaRPr lang="en-US" sz="1500" dirty="0"/>
+          </a:p>
+        </p:txBody>
+      </p:sp>
+      <p:sp>
+        <p:nvSpPr>
+          <p:cNvPr id="13" name="Readiness 1 mark 5"/>
+          <p:cNvSpPr/>
+          <p:nvPr/>
+        </p:nvSpPr>
+        <p:spPr>
+          <a:xfrm>
+            <a:off x="868680" y="5148072"/>
+            <a:ext cx="164592" cy="164592"/>
+          </a:xfrm>
+          <a:prstGeom prst="ellipse">
+            <a:avLst/>
+          </a:prstGeom>
+          <a:solidFill>
+            <a:schemeClr val="accent4"/>
+          </a:solidFill>
+          <a:ln w="12700">
+            <a:solidFill>
+              <a:schemeClr val="accent4"/>
+            </a:solidFill>
+            <a:prstDash val="solid"/>
+          </a:ln>
+        </p:spPr>
+      </p:sp>
+      <p:sp>
+        <p:nvSpPr>
+          <p:cNvPr id="14" name="Readiness 1 item 5"/>
+          <p:cNvSpPr txBox="1"/>
+          <p:nvPr/>
+        </p:nvSpPr>
+        <p:spPr>
+          <a:xfrm>
+            <a:off x="1207008" y="5102352"/>
+            <a:ext cx="4434840" cy="548640"/>
+          </a:xfrm>
+          <a:prstGeom prst="rect">
+            <a:avLst/>
+          </a:prstGeom>
+          <a:noFill/>
+          <a:ln/>
+        </p:spPr>
+        <p:txBody>
+          <a:bodyPr wrap="square" lIns="0" tIns="0" rIns="0" bIns="0" rtlCol="0" anchor="t"/>
+          <a:lstStyle/>
+          <a:p>
+            <a:pPr indent="0" marL="0">
+              <a:buNone/>
+            </a:pPr>
+            <a:r>
+              <a:rPr lang="en-US" sz="1500" dirty="0">
+                <a:solidFill>
+                  <a:schemeClr val="tx1"/>
+                </a:solidFill>
+              </a:rPr>
+              <a:t>Spreadsheet import to load an org's goals</a:t>
+            </a:r>
+            <a:endParaRPr lang="en-US" sz="1500" dirty="0"/>
+          </a:p>
+        </p:txBody>
+      </p:sp>
+      <p:sp>
+        <p:nvSpPr>
+          <p:cNvPr id="15" name="Readiness 2 card"/>
+          <p:cNvSpPr/>
+          <p:nvPr/>
+        </p:nvSpPr>
+        <p:spPr>
+          <a:xfrm>
+            <a:off x="6281928" y="1554480"/>
+            <a:ext cx="5367528" cy="4343400"/>
+          </a:xfrm>
+          <a:prstGeom prst="roundRect">
+            <a:avLst>
+              <a:gd name="adj" fmla="val 1263"/>
+            </a:avLst>
+          </a:prstGeom>
+          <a:solidFill>
+            <a:schemeClr val="bg2"/>
+          </a:solidFill>
+          <a:ln w="12700">
+            <a:solidFill>
+              <a:schemeClr val="bg2"/>
+            </a:solidFill>
+            <a:prstDash val="solid"/>
+          </a:ln>
+        </p:spPr>
+      </p:sp>
+      <p:sp>
+        <p:nvSpPr>
+          <p:cNvPr id="16" name="Readiness 2 heading"/>
+          <p:cNvSpPr txBox="1"/>
+          <p:nvPr/>
+        </p:nvSpPr>
+        <p:spPr>
+          <a:xfrm>
+            <a:off x="6601968" y="1783080"/>
+            <a:ext cx="4754880" cy="457200"/>
           </a:xfrm>
           <a:prstGeom prst="rect">
             <a:avLst/>
@@ -6192,27 +8053,52 @@
               <a:buNone/>
             </a:pPr>
             <a:r>
-              <a:rPr lang="en-US" sz="4400" b="1" dirty="0">
-                <a:solidFill>
-                  <a:schemeClr val="accent6"/>
-                </a:solidFill>
-              </a:rPr>
-              <a:t>3</a:t>
-            </a:r>
-            <a:endParaRPr lang="en-US" sz="4400" dirty="0"/>
-          </a:p>
-        </p:txBody>
-      </p:sp>
-      <p:sp>
-        <p:nvSpPr>
-          <p:cNvPr id="13" name="Plan 3 heading"/>
-          <p:cNvSpPr txBox="1"/>
-          <p:nvPr/>
-        </p:nvSpPr>
-        <p:spPr>
-          <a:xfrm>
-            <a:off x="8412480" y="2788920"/>
-            <a:ext cx="2834640" cy="685800"/>
+              <a:rPr lang="en-US" sz="2200" b="1" dirty="0">
+                <a:solidFill>
+                  <a:schemeClr val="tx2"/>
+                </a:solidFill>
+              </a:rPr>
+              <a:t>Needed before a pilot</a:t>
+            </a:r>
+            <a:endParaRPr lang="en-US" sz="2200" dirty="0"/>
+          </a:p>
+        </p:txBody>
+      </p:sp>
+      <p:sp>
+        <p:nvSpPr>
+          <p:cNvPr id="17" name="Readiness 2 mark 1"/>
+          <p:cNvSpPr/>
+          <p:nvPr/>
+        </p:nvSpPr>
+        <p:spPr>
+          <a:xfrm>
+            <a:off x="6601968" y="2514600"/>
+            <a:ext cx="164592" cy="164592"/>
+          </a:xfrm>
+          <a:prstGeom prst="triangle">
+            <a:avLst/>
+          </a:prstGeom>
+          <a:solidFill>
+            <a:schemeClr val="accent3"/>
+          </a:solidFill>
+          <a:ln w="12700">
+            <a:solidFill>
+              <a:schemeClr val="accent3"/>
+            </a:solidFill>
+            <a:prstDash val="solid"/>
+          </a:ln>
+        </p:spPr>
+      </p:sp>
+      <p:sp>
+        <p:nvSpPr>
+          <p:cNvPr id="18" name="Readiness 2 item 1"/>
+          <p:cNvSpPr txBox="1"/>
+          <p:nvPr/>
+        </p:nvSpPr>
+        <p:spPr>
+          <a:xfrm>
+            <a:off x="6940296" y="2468880"/>
+            <a:ext cx="4434840" cy="548640"/>
           </a:xfrm>
           <a:prstGeom prst="rect">
             <a:avLst/>
@@ -6228,27 +8114,52 @@
               <a:buNone/>
             </a:pPr>
             <a:r>
-              <a:rPr lang="en-US" sz="2000" b="1" dirty="0">
-                <a:solidFill>
-                  <a:schemeClr val="bg1"/>
-                </a:solidFill>
-              </a:rPr>
-              <a:t>Run the review from the Report</a:t>
-            </a:r>
-            <a:endParaRPr lang="en-US" sz="2000" dirty="0"/>
-          </a:p>
-        </p:txBody>
-      </p:sp>
-      <p:sp>
-        <p:nvSpPr>
-          <p:cNvPr id="14" name="Plan 3 text"/>
-          <p:cNvSpPr txBox="1"/>
-          <p:nvPr/>
-        </p:nvSpPr>
-        <p:spPr>
-          <a:xfrm>
-            <a:off x="8412480" y="3493008"/>
-            <a:ext cx="2834640" cy="822960"/>
+              <a:rPr lang="en-US" sz="1500" dirty="0">
+                <a:solidFill>
+                  <a:schemeClr val="tx1"/>
+                </a:solidFill>
+              </a:rPr>
+              <a:t>Company sign-in. Today any email address signs in.</a:t>
+            </a:r>
+            <a:endParaRPr lang="en-US" sz="1500" dirty="0"/>
+          </a:p>
+        </p:txBody>
+      </p:sp>
+      <p:sp>
+        <p:nvSpPr>
+          <p:cNvPr id="19" name="Readiness 2 mark 2"/>
+          <p:cNvSpPr/>
+          <p:nvPr/>
+        </p:nvSpPr>
+        <p:spPr>
+          <a:xfrm>
+            <a:off x="6601968" y="3172968"/>
+            <a:ext cx="164592" cy="164592"/>
+          </a:xfrm>
+          <a:prstGeom prst="triangle">
+            <a:avLst/>
+          </a:prstGeom>
+          <a:solidFill>
+            <a:schemeClr val="accent3"/>
+          </a:solidFill>
+          <a:ln w="12700">
+            <a:solidFill>
+              <a:schemeClr val="accent3"/>
+            </a:solidFill>
+            <a:prstDash val="solid"/>
+          </a:ln>
+        </p:spPr>
+      </p:sp>
+      <p:sp>
+        <p:nvSpPr>
+          <p:cNvPr id="20" name="Readiness 2 item 2"/>
+          <p:cNvSpPr txBox="1"/>
+          <p:nvPr/>
+        </p:nvSpPr>
+        <p:spPr>
+          <a:xfrm>
+            <a:off x="6940296" y="3127248"/>
+            <a:ext cx="4434840" cy="548640"/>
           </a:xfrm>
           <a:prstGeom prst="rect">
             <a:avLst/>
@@ -6264,61 +8175,120 @@
               <a:buNone/>
             </a:pPr>
             <a:r>
-              <a:rPr lang="en-US" sz="1400" dirty="0">
-                <a:solidFill>
-                  <a:schemeClr val="bg1"/>
-                </a:solidFill>
-              </a:rPr>
-              <a:t>No hand-built status deck. It publishes from the check-ins.</a:t>
-            </a:r>
-            <a:endParaRPr lang="en-US" sz="1400" dirty="0"/>
-          </a:p>
-        </p:txBody>
-      </p:sp>
-      <p:sp>
-        <p:nvSpPr>
-          <p:cNvPr id="15" name="Success test"/>
-          <p:cNvSpPr txBox="1"/>
-          <p:nvPr/>
-        </p:nvSpPr>
-        <p:spPr>
-          <a:xfrm>
-            <a:off x="640080" y="5029200"/>
-            <a:ext cx="10881360" cy="822960"/>
-          </a:xfrm>
-          <a:prstGeom prst="rect">
-            <a:avLst/>
-          </a:prstGeom>
-          <a:noFill/>
-          <a:ln/>
-        </p:spPr>
-        <p:txBody>
-          <a:bodyPr wrap="square" lIns="0" tIns="0" rIns="0" bIns="0" rtlCol="0" anchor="ctr"/>
-          <a:lstStyle/>
-          <a:p>
-            <a:pPr indent="0" marL="0">
-              <a:buNone/>
-            </a:pPr>
-            <a:r>
-              <a:rPr lang="en-US" sz="2200" b="1" dirty="0">
-                <a:solidFill>
-                  <a:schemeClr val="bg1"/>
-                </a:solidFill>
-              </a:rPr>
-              <a:t>Judge it by one question: </a:t>
-            </a:r>
-            <a:pPr indent="0" marL="0">
-              <a:buNone/>
-            </a:pPr>
-            <a:r>
-              <a:rPr lang="en-US" sz="2200" dirty="0">
-                <a:solidFill>
-                  <a:schemeClr val="accent6"/>
-                </a:solidFill>
-              </a:rPr>
-              <a:t>did we learn about trouble before the review, with a plan attached?</a:t>
-            </a:r>
-            <a:endParaRPr lang="en-US" sz="2200" dirty="0"/>
+              <a:rPr lang="en-US" sz="1500" dirty="0">
+                <a:solidFill>
+                  <a:schemeClr val="tx1"/>
+                </a:solidFill>
+              </a:rPr>
+              <a:t>Sending email. Reminders and alerts are logged, not sent.</a:t>
+            </a:r>
+            <a:endParaRPr lang="en-US" sz="1500" dirty="0"/>
+          </a:p>
+        </p:txBody>
+      </p:sp>
+      <p:sp>
+        <p:nvSpPr>
+          <p:cNvPr id="21" name="Readiness 2 mark 3"/>
+          <p:cNvSpPr/>
+          <p:nvPr/>
+        </p:nvSpPr>
+        <p:spPr>
+          <a:xfrm>
+            <a:off x="6601968" y="3831336"/>
+            <a:ext cx="164592" cy="164592"/>
+          </a:xfrm>
+          <a:prstGeom prst="triangle">
+            <a:avLst/>
+          </a:prstGeom>
+          <a:solidFill>
+            <a:schemeClr val="accent3"/>
+          </a:solidFill>
+          <a:ln w="12700">
+            <a:solidFill>
+              <a:schemeClr val="accent3"/>
+            </a:solidFill>
+            <a:prstDash val="solid"/>
+          </a:ln>
+        </p:spPr>
+      </p:sp>
+      <p:sp>
+        <p:nvSpPr>
+          <p:cNvPr id="22" name="Readiness 2 item 3"/>
+          <p:cNvSpPr txBox="1"/>
+          <p:nvPr/>
+        </p:nvSpPr>
+        <p:spPr>
+          <a:xfrm>
+            <a:off x="6940296" y="3785616"/>
+            <a:ext cx="4434840" cy="548640"/>
+          </a:xfrm>
+          <a:prstGeom prst="rect">
+            <a:avLst/>
+          </a:prstGeom>
+          <a:noFill/>
+          <a:ln/>
+        </p:spPr>
+        <p:txBody>
+          <a:bodyPr wrap="square" lIns="0" tIns="0" rIns="0" bIns="0" rtlCol="0" anchor="t"/>
+          <a:lstStyle/>
+          <a:p>
+            <a:pPr indent="0" marL="0">
+              <a:buNone/>
+            </a:pPr>
+            <a:r>
+              <a:rPr lang="en-US" sz="1500" dirty="0">
+                <a:solidFill>
+                  <a:schemeClr val="tx1"/>
+                </a:solidFill>
+              </a:rPr>
+              <a:t>Hosting, and someone to run it.</a:t>
+            </a:r>
+            <a:endParaRPr lang="en-US" sz="1500" dirty="0"/>
+          </a:p>
+        </p:txBody>
+      </p:sp>
+      <p:sp>
+        <p:nvSpPr>
+          <p:cNvPr id="25" name="Slide Number Placeholder 0"/>
+          <p:cNvSpPr>
+            <a:spLocks noGrp="1"/>
+          </p:cNvSpPr>
+          <p:nvPr>
+            <p:ph type="sldNum" sz="quarter" idx="4294967295"/>
+          </p:nvPr>
+        </p:nvSpPr>
+        <p:spPr>
+          <a:xfrm>
+            <a:off x="11155680" y="6382512"/>
+            <a:ext cx="502920" cy="274320"/>
+          </a:xfrm>
+          <a:prstGeom prst="rect">
+            <a:avLst/>
+          </a:prstGeom>
+          <a:extLst>
+            <a:ext uri="{C572A759-6A51-4108-AA02-DFA0A04FC94B}">
+              <ma14:wrappingTextBoxFlag xmlns:ma14="http://schemas.microsoft.com/office/mac/drawingml/2011/main" val="0"/>
+            </a:ext>
+          </a:extLst>
+        </p:spPr>
+        <p:txBody>
+          <a:bodyPr/>
+          <a:lstStyle>
+            <a:lvl1pPr>
+              <a:defRPr sz="1000">
+                <a:solidFill>
+                  <a:schemeClr val="accent5"/>
+                </a:solidFill>
+              </a:defRPr>
+            </a:lvl1pPr>
+          </a:lstStyle>
+          <a:p>
+            <a:pPr algn="r"/>
+            <a:fld id="{F7021451-1387-4CA6-816F-3879F97B5CBC}" type="slidenum">
+              <a:rPr b="0" lang="en-US"/>
+              <a:t>9</a:t>
+            </a:fld>
+            <a:endParaRPr lang="en-US"/>
           </a:p>
         </p:txBody>
       </p:sp>
